--- a/presentation/hanoch-7-10.pptx
+++ b/presentation/hanoch-7-10.pptx
@@ -11731,6 +11731,30 @@
           </a:p>
         </p:txBody>
       </p:sp>
+      <p:pic>
+        <p:nvPicPr>
+          <p:cNvPr id="6" name="Image 0" descr="nahal-sand.png">    </p:cNvPr>
+          <p:cNvPicPr>
+            <a:picLocks noChangeAspect="1"/>
+          </p:cNvPicPr>
+          <p:nvPr/>
+        </p:nvPicPr>
+        <p:blipFill>
+          <a:blip r:embed="rId1"/>
+          <a:stretch>
+            <a:fillRect/>
+          </a:stretch>
+        </p:blipFill>
+        <p:spPr>
+          <a:xfrm>
+            <a:off x="914400" y="1463040"/>
+            <a:ext cx="3840480" cy="2107166"/>
+          </a:xfrm>
+          <a:prstGeom prst="rect">
+            <a:avLst/>
+          </a:prstGeom>
+        </p:spPr>
+      </p:pic>
     </p:spTree>
   </p:cSld>
   <p:clrMapOvr>
@@ -11772,7 +11796,7 @@
         <p:spPr>
           <a:xfrm>
             <a:off x="822960" y="548640"/>
-            <a:ext cx="10545775" cy="914400"/>
+            <a:ext cx="8534095" cy="914400"/>
           </a:xfrm>
           <a:prstGeom prst="rect">
             <a:avLst/>
@@ -11802,9 +11826,33 @@
           </a:p>
         </p:txBody>
       </p:sp>
-      <p:sp>
-        <p:nvSpPr>
-          <p:cNvPr id="3" name="Shape 1"/>
+      <p:pic>
+        <p:nvPicPr>
+          <p:cNvPr id="3" name="Image 0" descr="nahal-dark.png">    </p:cNvPr>
+          <p:cNvPicPr>
+            <a:picLocks noChangeAspect="1"/>
+          </p:cNvPicPr>
+          <p:nvPr/>
+        </p:nvPicPr>
+        <p:blipFill>
+          <a:blip r:embed="rId1"/>
+          <a:stretch>
+            <a:fillRect/>
+          </a:stretch>
+        </p:blipFill>
+        <p:spPr>
+          <a:xfrm>
+            <a:off x="822960" y="320040"/>
+            <a:ext cx="2468880" cy="1354607"/>
+          </a:xfrm>
+          <a:prstGeom prst="rect">
+            <a:avLst/>
+          </a:prstGeom>
+        </p:spPr>
+      </p:pic>
+      <p:sp>
+        <p:nvSpPr>
+          <p:cNvPr id="4" name="Shape 1"/>
           <p:cNvSpPr/>
           <p:nvPr/>
         </p:nvSpPr>
@@ -11831,14 +11879,14 @@
       </p:sp>
       <p:pic>
         <p:nvPicPr>
-          <p:cNvPr id="4" name="Image 0" descr="preencoded.png">    </p:cNvPr>
+          <p:cNvPr id="5" name="Image 1" descr="preencoded.png">    </p:cNvPr>
           <p:cNvPicPr>
             <a:picLocks noChangeAspect="1"/>
           </p:cNvPicPr>
           <p:nvPr/>
         </p:nvPicPr>
         <p:blipFill>
-          <a:blip r:embed="rId1"/>
+          <a:blip r:embed="rId2"/>
           <a:stretch>
             <a:fillRect/>
           </a:stretch>
@@ -11855,7 +11903,7 @@
       </p:pic>
       <p:sp>
         <p:nvSpPr>
-          <p:cNvPr id="5" name="Text 2"/>
+          <p:cNvPr id="6" name="Text 2"/>
           <p:cNvSpPr txBox="1"/>
           <p:nvPr/>
         </p:nvSpPr>
@@ -11894,7 +11942,7 @@
       </p:sp>
       <p:sp>
         <p:nvSpPr>
-          <p:cNvPr id="6" name="Shape 3"/>
+          <p:cNvPr id="7" name="Shape 3"/>
           <p:cNvSpPr/>
           <p:nvPr/>
         </p:nvSpPr>
@@ -11921,7 +11969,7 @@
       </p:sp>
       <p:sp>
         <p:nvSpPr>
-          <p:cNvPr id="7" name="Shape 4"/>
+          <p:cNvPr id="8" name="Shape 4"/>
           <p:cNvSpPr/>
           <p:nvPr/>
         </p:nvSpPr>
@@ -11946,14 +11994,14 @@
       </p:sp>
       <p:pic>
         <p:nvPicPr>
-          <p:cNvPr id="8" name="Image 1" descr="preencoded.png">    </p:cNvPr>
+          <p:cNvPr id="9" name="Image 2" descr="preencoded.png">    </p:cNvPr>
           <p:cNvPicPr>
             <a:picLocks noChangeAspect="1"/>
           </p:cNvPicPr>
           <p:nvPr/>
         </p:nvPicPr>
         <p:blipFill>
-          <a:blip r:embed="rId2"/>
+          <a:blip r:embed="rId3"/>
           <a:stretch>
             <a:fillRect/>
           </a:stretch>
@@ -11970,7 +12018,7 @@
       </p:pic>
       <p:sp>
         <p:nvSpPr>
-          <p:cNvPr id="9" name="Text 5"/>
+          <p:cNvPr id="10" name="Text 5"/>
           <p:cNvSpPr txBox="1"/>
           <p:nvPr/>
         </p:nvSpPr>
@@ -12009,7 +12057,7 @@
       </p:sp>
       <p:sp>
         <p:nvSpPr>
-          <p:cNvPr id="10" name="Text 6"/>
+          <p:cNvPr id="11" name="Text 6"/>
           <p:cNvSpPr txBox="1"/>
           <p:nvPr/>
         </p:nvSpPr>
@@ -12048,7 +12096,7 @@
       </p:sp>
       <p:sp>
         <p:nvSpPr>
-          <p:cNvPr id="11" name="Shape 7"/>
+          <p:cNvPr id="12" name="Shape 7"/>
           <p:cNvSpPr/>
           <p:nvPr/>
         </p:nvSpPr>
@@ -12075,7 +12123,7 @@
       </p:sp>
       <p:sp>
         <p:nvSpPr>
-          <p:cNvPr id="12" name="Shape 8"/>
+          <p:cNvPr id="13" name="Shape 8"/>
           <p:cNvSpPr/>
           <p:nvPr/>
         </p:nvSpPr>
@@ -12100,14 +12148,14 @@
       </p:sp>
       <p:pic>
         <p:nvPicPr>
-          <p:cNvPr id="13" name="Image 2" descr="preencoded.png">    </p:cNvPr>
+          <p:cNvPr id="14" name="Image 3" descr="preencoded.png">    </p:cNvPr>
           <p:cNvPicPr>
             <a:picLocks noChangeAspect="1"/>
           </p:cNvPicPr>
           <p:nvPr/>
         </p:nvPicPr>
         <p:blipFill>
-          <a:blip r:embed="rId3"/>
+          <a:blip r:embed="rId4"/>
           <a:stretch>
             <a:fillRect/>
           </a:stretch>
@@ -12124,7 +12172,7 @@
       </p:pic>
       <p:sp>
         <p:nvSpPr>
-          <p:cNvPr id="14" name="Text 9"/>
+          <p:cNvPr id="15" name="Text 9"/>
           <p:cNvSpPr txBox="1"/>
           <p:nvPr/>
         </p:nvSpPr>
@@ -12163,7 +12211,7 @@
       </p:sp>
       <p:sp>
         <p:nvSpPr>
-          <p:cNvPr id="15" name="Text 10"/>
+          <p:cNvPr id="16" name="Text 10"/>
           <p:cNvSpPr txBox="1"/>
           <p:nvPr/>
         </p:nvSpPr>
@@ -12202,7 +12250,7 @@
       </p:sp>
       <p:sp>
         <p:nvSpPr>
-          <p:cNvPr id="16" name="Shape 11"/>
+          <p:cNvPr id="17" name="Shape 11"/>
           <p:cNvSpPr/>
           <p:nvPr/>
         </p:nvSpPr>
@@ -12229,7 +12277,7 @@
       </p:sp>
       <p:sp>
         <p:nvSpPr>
-          <p:cNvPr id="17" name="Shape 12"/>
+          <p:cNvPr id="18" name="Shape 12"/>
           <p:cNvSpPr/>
           <p:nvPr/>
         </p:nvSpPr>
@@ -12254,14 +12302,14 @@
       </p:sp>
       <p:pic>
         <p:nvPicPr>
-          <p:cNvPr id="18" name="Image 3" descr="preencoded.png">    </p:cNvPr>
+          <p:cNvPr id="19" name="Image 4" descr="preencoded.png">    </p:cNvPr>
           <p:cNvPicPr>
             <a:picLocks noChangeAspect="1"/>
           </p:cNvPicPr>
           <p:nvPr/>
         </p:nvPicPr>
         <p:blipFill>
-          <a:blip r:embed="rId4"/>
+          <a:blip r:embed="rId5"/>
           <a:stretch>
             <a:fillRect/>
           </a:stretch>
@@ -12278,7 +12326,7 @@
       </p:pic>
       <p:sp>
         <p:nvSpPr>
-          <p:cNvPr id="19" name="Text 13"/>
+          <p:cNvPr id="20" name="Text 13"/>
           <p:cNvSpPr txBox="1"/>
           <p:nvPr/>
         </p:nvSpPr>
@@ -12317,7 +12365,7 @@
       </p:sp>
       <p:sp>
         <p:nvSpPr>
-          <p:cNvPr id="20" name="Text 14"/>
+          <p:cNvPr id="21" name="Text 14"/>
           <p:cNvSpPr txBox="1"/>
           <p:nvPr/>
         </p:nvSpPr>
@@ -12356,7 +12404,7 @@
       </p:sp>
       <p:sp>
         <p:nvSpPr>
-          <p:cNvPr id="21" name="Shape 15"/>
+          <p:cNvPr id="22" name="Shape 15"/>
           <p:cNvSpPr/>
           <p:nvPr/>
         </p:nvSpPr>
@@ -12383,7 +12431,7 @@
       </p:sp>
       <p:sp>
         <p:nvSpPr>
-          <p:cNvPr id="22" name="Shape 16"/>
+          <p:cNvPr id="23" name="Shape 16"/>
           <p:cNvSpPr/>
           <p:nvPr/>
         </p:nvSpPr>
@@ -12408,14 +12456,14 @@
       </p:sp>
       <p:pic>
         <p:nvPicPr>
-          <p:cNvPr id="23" name="Image 4" descr="preencoded.png">    </p:cNvPr>
+          <p:cNvPr id="24" name="Image 5" descr="preencoded.png">    </p:cNvPr>
           <p:cNvPicPr>
             <a:picLocks noChangeAspect="1"/>
           </p:cNvPicPr>
           <p:nvPr/>
         </p:nvPicPr>
         <p:blipFill>
-          <a:blip r:embed="rId5"/>
+          <a:blip r:embed="rId6"/>
           <a:stretch>
             <a:fillRect/>
           </a:stretch>
@@ -12432,7 +12480,7 @@
       </p:pic>
       <p:sp>
         <p:nvSpPr>
-          <p:cNvPr id="24" name="Text 17"/>
+          <p:cNvPr id="25" name="Text 17"/>
           <p:cNvSpPr txBox="1"/>
           <p:nvPr/>
         </p:nvSpPr>
@@ -12471,7 +12519,7 @@
       </p:sp>
       <p:sp>
         <p:nvSpPr>
-          <p:cNvPr id="25" name="Text 18"/>
+          <p:cNvPr id="26" name="Text 18"/>
           <p:cNvSpPr txBox="1"/>
           <p:nvPr/>
         </p:nvSpPr>
@@ -12510,7 +12558,7 @@
       </p:sp>
       <p:sp>
         <p:nvSpPr>
-          <p:cNvPr id="26" name="Text 19"/>
+          <p:cNvPr id="27" name="Text 19"/>
           <p:cNvSpPr txBox="1"/>
           <p:nvPr/>
         </p:nvSpPr>

--- a/presentation/hanoch-7-10.pptx
+++ b/presentation/hanoch-7-10.pptx
@@ -30,9 +30,12 @@
     <p:sldId id="278" r:id="rId24"/>
     <p:sldId id="279" r:id="rId25"/>
     <p:sldId id="280" r:id="rId26"/>
+    <p:sldId id="281" r:id="rId27"/>
+    <p:sldId id="282" r:id="rId28"/>
+    <p:sldId id="283" r:id="rId29"/>
   </p:sldIdLst>
   <p:notesMasterIdLst>
-    <p:notesMasterId r:id="rId27"/>
+    <p:notesMasterId r:id="rId30"/>
   </p:notesMasterIdLst>
   <p:sldSz cx="12192000" cy="6858000"/>
   <p:notesSz cx="6858000" cy="12192000"/>
@@ -614,7 +617,9 @@
           <a:p>
             <a:r>
               <a:rPr lang="en-US" dirty="0"/>
-              <a:t>הרעיון המרכזי של הפרק. להגיד, לעצור, ולתת דוגמה של יום אחד במסלול שבו המוטיבציה נגמרה ורק המשמעת נשארה.</a:t>
+              <a:t>קליין – תמיד דחף אותנו למצוינות ומקצועיות, לעשות דברים כמו שצריך ועד הסוף. עד היום אני במשטר אימונים בגלל המסגרת שהוא הכניס אותנו אליה.
+ברנש – הגיע משלדג, פיקד בתפקידים רבים, עטור שבחים, הישגים מרשימים בכל התחומים. ובכל זאת קודם כל היה אדם: ידע שמות של רוב החיילים, התייעץ איתנו על דברים מבצעיים, דיבר איתנו בשיח חברי ולא כמג"ד-חייל.
+השיעור: אפשר להיות הכי טוב ועדיין להישאר בן אדם.</a:t>
             </a:r>
             <a:endParaRPr lang="en-US" dirty="0"/>
           </a:p>
@@ -702,7 +707,7 @@
           <a:p>
             <a:r>
               <a:rPr lang="en-US" dirty="0"/>
-              <a:t>7 באוקטובר – 15 דקות. הלב הרגשי של ההרצאה, אבל לא כל ההרצאה. לספר כמו סרט. לא רק מה קרה – מה חשבת בכל שלב.</a:t>
+              <a:t>הרעיון המרכזי של הפרק. להגיד, לעצור, ולתת דוגמה של יום אחד במסלול שבו המוטיבציה נגמרה ורק המשמעת נשארה.</a:t>
             </a:r>
             <a:endParaRPr lang="en-US" dirty="0"/>
           </a:p>
@@ -790,8 +795,7 @@
           <a:p>
             <a:r>
               <a:rPr lang="en-US" dirty="0"/>
-              <a:t>לבנות את זה בשלבים: לפני ← ההבנה שמשהו לא רגיל קורה ← הכניסה ללחימה ← המארב ← הפציעה ← ההחלטה להמשיך ← הפינוי.
-בכל שלב: מה חשבתי. לא רק מה קרה.</a:t>
+              <a:t>7 באוקטובר – 15 דקות. הלב הרגשי של ההרצאה, אבל לא כל ההרצאה. לספר כמו סרט. לא רק מה קרה – מה חשבת בכל שלב.</a:t>
             </a:r>
             <a:endParaRPr lang="en-US" dirty="0"/>
           </a:p>
@@ -879,7 +883,8 @@
           <a:p>
             <a:r>
               <a:rPr lang="en-US" dirty="0"/>
-              <a:t>הרגע של הפציעה. לעצור על השקף הזה. להשלים את המשפט בעל פה – מה באמת עבר לך בראש. זה השקף הכי חשוב בפרק.</a:t>
+              <a:t>לבנות את זה בשלבים: לפני ← ההבנה שמשהו לא רגיל קורה ← הכניסה ללחימה ← המארב ← הפציעה ← ההחלטה להמשיך ← הפינוי.
+בכל שלב: מה חשבתי. לא רק מה קרה.</a:t>
             </a:r>
             <a:endParaRPr lang="en-US" dirty="0"/>
           </a:p>
@@ -967,8 +972,9 @@
           <a:p>
             <a:r>
               <a:rPr lang="en-US" dirty="0"/>
-              <a:t>הטוויסט של ההרצאה. הקהל מצפה שהשיא היה 7 באוקטובר – ואתה אומר: הקרב היה החלק הקל.
-מכאן ההרצאה עוברת מסיפור מלחמה לסיפור חיים.</a:t>
+              <a:t>הרגע של הפציעה. לעצור אחרי 'הדבר היחיד שעבר לי בראש היה…' – שנייה של שקט – ואז: תמיד אמרו לנו שמי שלא מתפקד מקבל פוסט טראומה. אז תפקדתי.
+(אם רוצים אפקט: להשאיר את השורה התחתונה מוסתרת ולחשוף בלחיצה.)
+זו ההחלטה השנייה – אותה החלטה מכיתה י': לפעול, לא לתת לדברים לקרות לי.</a:t>
             </a:r>
             <a:endParaRPr lang="en-US" dirty="0"/>
           </a:p>
@@ -1056,7 +1062,8 @@
           <a:p>
             <a:r>
               <a:rPr lang="en-US" dirty="0"/>
-              <a:t>ואז הכול נגמר – 8 דקות.</a:t>
+              <a:t>הטוויסט של ההרצאה. הקהל מצפה שהשיא היה 7 באוקטובר – ואתה אומר: הקרב היה החלק הקל.
+מכאן ההרצאה עוברת מסיפור מלחמה לסיפור חיים.</a:t>
             </a:r>
             <a:endParaRPr lang="en-US" dirty="0"/>
           </a:p>
@@ -1144,8 +1151,7 @@
           <a:p>
             <a:r>
               <a:rPr lang="en-US" dirty="0"/>
-              <a:t>איבדתי מעל 19 חברים באותו יום, ובמהלך המלחמה עוד כמעט עשרה. זה הדבר שהיה לי הכי קשה אחרי השביעי.
-(אפשר להגיד שם אחד או שניים – זה מקרב את הקהל.)</a:t>
+              <a:t>ואז הכול נגמר – 8 דקות.</a:t>
             </a:r>
             <a:endParaRPr lang="en-US" dirty="0"/>
           </a:p>
@@ -1233,11 +1239,8 @@
           <a:p>
             <a:r>
               <a:rPr lang="en-US" dirty="0"/>
-              <a:t>הפציעה – יד (חוסם עורקים) ועין (רסיס).
-השיקום – ארוך ומתיש, לבד רוב הזמן, בלי משככי כאבים, 3 חודשים בתל השומר.
-האובדן.
-החיים שאחרי – המעבר המהיר בין לוחם לפצוע לאזרח. בעיה לסמוך על אנשים, התרחקות מחברים ומהחברה, קושי במקומות רועשים.
-כאן ההרצאה עוברת מסיפור מלחמה לסיפור חיים.</a:t>
+              <a:t>איבדתי מעל 19 חברים באותו יום, ובמהלך המלחמה עוד כמעט עשרה. זה הדבר שהיה לי הכי קשה אחרי השביעי.
+(אפשר להגיד שם אחד או שניים – זה מקרב את הקהל.)</a:t>
             </a:r>
             <a:endParaRPr lang="en-US" dirty="0"/>
           </a:p>
@@ -1325,7 +1328,11 @@
           <a:p>
             <a:r>
               <a:rPr lang="en-US" dirty="0"/>
-              <a:t>מה היה הרגע שבו זה השתנה? מי היה שם? (לספר סיפור אחד קטן.)</a:t>
+              <a:t>הפציעה – יד (חוסם עורקים) ועין (רסיס).
+השיקום – ארוך ומתיש, לבד רוב הזמן, בלי משככי כאבים, 3 חודשים בתל השומר. (לא להיכנס לסיבה – זה אישי ולא חלק מההרצאה.)
+האובדן.
+החיים שאחרי – המעבר המהיר בין לוחם לפצוע לאזרח. בעיה לסמוך על אנשים, התרחקות מחברים ומהחברה, קושי במקומות רועשים.
+כאן ההרצאה עוברת מסיפור מלחמה לסיפור חיים.</a:t>
             </a:r>
             <a:endParaRPr lang="en-US" dirty="0"/>
           </a:p>
@@ -1413,7 +1420,8 @@
           <a:p>
             <a:r>
               <a:rPr lang="en-US" dirty="0"/>
-              <a:t>מה עושים כשהחיים לא חוזרים להיות מה שהיו – 10 דקות. החלק החדש. עליו הדגש.</a:t>
+              <a:t>הרגע שבו הפסקתי להתרחק מאנשים: אחרי ריטריט בפנמה. פגשתי אנשים ממש טובים וראיתי שבאמת קיימים כאלה.
+לספר: מה עשית שם, מי היו האנשים, מה הרגע הספציפי שבו משהו נפתח.</a:t>
             </a:r>
             <a:endParaRPr lang="en-US" dirty="0"/>
           </a:p>
@@ -1591,10 +1599,7 @@
           <a:p>
             <a:r>
               <a:rPr lang="en-US" dirty="0"/>
-              <a:t>עיקרון 1 – אתה לא שולט במה שקורה לך, אבל אתה כן שולט במה שאתה עושה עם זה.
-עיקרון 2 – לא חייבים לדעת את כל הדרך. רק את הצעד הבא.
-עיקרון 3 – זהות לא מקבלים. בונים.
-לכל עיקרון: דוגמה אחת מהחיים שלך מאז הפציעה.</a:t>
+              <a:t>מה עושים כשהחיים לא חוזרים להיות מה שהיו – 10 דקות. החלק החדש. עליו הדגש.</a:t>
             </a:r>
             <a:endParaRPr lang="en-US" dirty="0"/>
           </a:p>
@@ -1682,7 +1687,10 @@
           <a:p>
             <a:r>
               <a:rPr lang="en-US" dirty="0"/>
-              <a:t>להפוך כאב למשהו – 7 דקות.</a:t>
+              <a:t>עיקרון 1 – אתה לא שולט במה שקורה לך, אבל אתה כן שולט במה שאתה עושה עם זה.
+עיקרון 2 – לא חייבים לדעת את כל הדרך. רק את הצעד הבא.
+עיקרון 3 – זהות לא מקבלים. בונים.
+לכל עיקרון: דוגמה אחת מהחיים שלך מאז הפציעה.</a:t>
             </a:r>
             <a:endParaRPr lang="en-US" dirty="0"/>
           </a:p>
@@ -1770,8 +1778,7 @@
           <a:p>
             <a:r>
               <a:rPr lang="en-US" dirty="0"/>
-              <a:t>לימודים, עבודה, הרצאות, מטרות, בניית עתיד, הרצון להתפתח.
-המסר: לא תמיד אפשר לבחור את הסיפור שקיבלת. אפשר לבחור מה אתה עושה איתו.</a:t>
+              <a:t>להפוך כאב למשהו – 7 דקות.</a:t>
             </a:r>
             <a:endParaRPr lang="en-US" dirty="0"/>
           </a:p>
@@ -1859,7 +1866,8 @@
           <a:p>
             <a:r>
               <a:rPr lang="en-US" dirty="0"/>
-              <a:t>למה אתה בכלל עומד מול הקהל. לא בשביל שירחמו. לא בשביל 'איזה גיבור'. אלא בשביל בן אדם אחד שיחליט לקחת אחריות.</a:t>
+              <a:t>לימודים, עבודה, הרצאות, מטרות, בניית עתיד, הרצון להתפתח.
+המסר: לא תמיד אפשר לבחור את הסיפור שקיבלת. אפשר לבחור מה אתה עושה איתו.</a:t>
             </a:r>
             <a:endParaRPr lang="en-US" dirty="0"/>
           </a:p>
@@ -1947,7 +1955,7 @@
           <a:p>
             <a:r>
               <a:rPr lang="en-US" dirty="0"/>
-              <a:t>הסיום – 3 דקות. חוזרים למשפט מהפתיחה.</a:t>
+              <a:t>למה אתה בכלל עומד מול הקהל. לא בשביל שירחמו. לא בשביל 'איזה גיבור'. אלא בשביל בן אדם אחד שיחליט לקחת אחריות.</a:t>
             </a:r>
             <a:endParaRPr lang="en-US" dirty="0"/>
           </a:p>
@@ -2035,7 +2043,8 @@
           <a:p>
             <a:r>
               <a:rPr lang="en-US" dirty="0"/>
-              <a:t>המשפט האחרון. לעצור. לא להוסיף כלום אחריו.</a:t>
+              <a:t>הקהל תמיד שואל את זה, אז עדיף להקדים. אין בי כעס על ההפקרה, על המדינה או על מישהו. אני מקווה שנתאחד בתור עם – זה הדבר הראשון שצריך לקרות בשביל שינוי אמיתי.
+לא להיכנס לפוליטיקה. משפט אחד וממשיכים.</a:t>
             </a:r>
             <a:endParaRPr lang="en-US" dirty="0"/>
           </a:p>
@@ -2059,6 +2068,270 @@
             <a:fld id="{F7021451-1387-4CA6-816F-3879F97B5CBC}" type="slidenum">
               <a:rPr lang="en-US"/>
               <a:t>25</a:t>
+            </a:fld>
+            <a:endParaRPr lang="en-US"/>
+          </a:p>
+        </p:txBody>
+      </p:sp>
+    </p:spTree>
+    <p:extLst>
+      <p:ext uri="{BB962C8B-B14F-4D97-AF65-F5344CB8AC3E}">
+        <p14:creationId xmlns:p14="http://schemas.microsoft.com/office/powerpoint/2010/main" val="1024086991"/>
+      </p:ext>
+    </p:extLst>
+  </p:cSld>
+  <p:clrMapOvr>
+    <a:masterClrMapping/>
+  </p:clrMapOvr>
+</p:notes>
+</file>
+
+<file path=ppt/notesSlides/notesSlide26.xml><?xml version="1.0" encoding="utf-8"?>
+<p:notes xmlns:a="http://schemas.openxmlformats.org/drawingml/2006/main" xmlns:r="http://schemas.openxmlformats.org/officeDocument/2006/relationships" xmlns:p="http://schemas.openxmlformats.org/presentationml/2006/main">
+  <p:cSld>
+    <p:spTree>
+      <p:nvGrpSpPr>
+        <p:cNvPr id="1" name=""/>
+        <p:cNvGrpSpPr/>
+        <p:nvPr/>
+      </p:nvGrpSpPr>
+      <p:grpSpPr>
+        <a:xfrm>
+          <a:off x="0" y="0"/>
+          <a:ext cx="0" cy="0"/>
+          <a:chOff x="0" y="0"/>
+          <a:chExt cx="0" cy="0"/>
+        </a:xfrm>
+      </p:grpSpPr>
+      <p:sp>
+        <p:nvSpPr>
+          <p:cNvPr id="2" name="Slide Image Placeholder 1"/>
+          <p:cNvSpPr>
+            <a:spLocks noGrp="1" noRot="1" noChangeAspect="1"/>
+          </p:cNvSpPr>
+          <p:nvPr>
+            <p:ph type="sldImg"/>
+          </p:nvPr>
+        </p:nvSpPr>
+        <p:spPr/>
+      </p:sp>
+      <p:sp>
+        <p:nvSpPr>
+          <p:cNvPr id="3" name="Notes Placeholder 2"/>
+          <p:cNvSpPr>
+            <a:spLocks noGrp="1"/>
+          </p:cNvSpPr>
+          <p:nvPr>
+            <p:ph type="body" idx="1"/>
+          </p:nvPr>
+        </p:nvSpPr>
+        <p:spPr/>
+        <p:txBody>
+          <a:bodyPr/>
+          <a:lstStyle/>
+          <a:p>
+            <a:r>
+              <a:rPr lang="en-US" dirty="0"/>
+              <a:t>הסיום – 3 דקות. חוזרים למשפט מהפתיחה.</a:t>
+            </a:r>
+            <a:endParaRPr lang="en-US" dirty="0"/>
+          </a:p>
+        </p:txBody>
+      </p:sp>
+      <p:sp>
+        <p:nvSpPr>
+          <p:cNvPr id="4" name="Slide Number Placeholder 3"/>
+          <p:cNvSpPr>
+            <a:spLocks noGrp="1"/>
+          </p:cNvSpPr>
+          <p:nvPr>
+            <p:ph type="sldNum" sz="quarter" idx="10"/>
+          </p:nvPr>
+        </p:nvSpPr>
+        <p:spPr/>
+        <p:txBody>
+          <a:bodyPr/>
+          <a:lstStyle/>
+          <a:p>
+            <a:fld id="{F7021451-1387-4CA6-816F-3879F97B5CBC}" type="slidenum">
+              <a:rPr lang="en-US"/>
+              <a:t>26</a:t>
+            </a:fld>
+            <a:endParaRPr lang="en-US"/>
+          </a:p>
+        </p:txBody>
+      </p:sp>
+    </p:spTree>
+    <p:extLst>
+      <p:ext uri="{BB962C8B-B14F-4D97-AF65-F5344CB8AC3E}">
+        <p14:creationId xmlns:p14="http://schemas.microsoft.com/office/powerpoint/2010/main" val="1024086991"/>
+      </p:ext>
+    </p:extLst>
+  </p:cSld>
+  <p:clrMapOvr>
+    <a:masterClrMapping/>
+  </p:clrMapOvr>
+</p:notes>
+</file>
+
+<file path=ppt/notesSlides/notesSlide27.xml><?xml version="1.0" encoding="utf-8"?>
+<p:notes xmlns:a="http://schemas.openxmlformats.org/drawingml/2006/main" xmlns:r="http://schemas.openxmlformats.org/officeDocument/2006/relationships" xmlns:p="http://schemas.openxmlformats.org/presentationml/2006/main">
+  <p:cSld>
+    <p:spTree>
+      <p:nvGrpSpPr>
+        <p:cNvPr id="1" name=""/>
+        <p:cNvGrpSpPr/>
+        <p:nvPr/>
+      </p:nvGrpSpPr>
+      <p:grpSpPr>
+        <a:xfrm>
+          <a:off x="0" y="0"/>
+          <a:ext cx="0" cy="0"/>
+          <a:chOff x="0" y="0"/>
+          <a:chExt cx="0" cy="0"/>
+        </a:xfrm>
+      </p:grpSpPr>
+      <p:sp>
+        <p:nvSpPr>
+          <p:cNvPr id="2" name="Slide Image Placeholder 1"/>
+          <p:cNvSpPr>
+            <a:spLocks noGrp="1" noRot="1" noChangeAspect="1"/>
+          </p:cNvSpPr>
+          <p:nvPr>
+            <p:ph type="sldImg"/>
+          </p:nvPr>
+        </p:nvSpPr>
+        <p:spPr/>
+      </p:sp>
+      <p:sp>
+        <p:nvSpPr>
+          <p:cNvPr id="3" name="Notes Placeholder 2"/>
+          <p:cNvSpPr>
+            <a:spLocks noGrp="1"/>
+          </p:cNvSpPr>
+          <p:nvPr>
+            <p:ph type="body" idx="1"/>
+          </p:nvPr>
+        </p:nvSpPr>
+        <p:spPr/>
+        <p:txBody>
+          <a:bodyPr/>
+          <a:lstStyle/>
+          <a:p>
+            <a:r>
+              <a:rPr lang="en-US" dirty="0"/>
+              <a:t>כאן סוגרים את המעגל מהפתיחה: 'ההחלטה' לא הייתה רק להמשיך להילחם. ההחלטה הייתה לקחת החלטות ולפעול בחיים של עצמי – כמו שעשיתי כילד, כמו שעשיתי בקרב, כמו שאני עושה היום.</a:t>
+            </a:r>
+            <a:endParaRPr lang="en-US" dirty="0"/>
+          </a:p>
+        </p:txBody>
+      </p:sp>
+      <p:sp>
+        <p:nvSpPr>
+          <p:cNvPr id="4" name="Slide Number Placeholder 3"/>
+          <p:cNvSpPr>
+            <a:spLocks noGrp="1"/>
+          </p:cNvSpPr>
+          <p:nvPr>
+            <p:ph type="sldNum" sz="quarter" idx="10"/>
+          </p:nvPr>
+        </p:nvSpPr>
+        <p:spPr/>
+        <p:txBody>
+          <a:bodyPr/>
+          <a:lstStyle/>
+          <a:p>
+            <a:fld id="{F7021451-1387-4CA6-816F-3879F97B5CBC}" type="slidenum">
+              <a:rPr lang="en-US"/>
+              <a:t>27</a:t>
+            </a:fld>
+            <a:endParaRPr lang="en-US"/>
+          </a:p>
+        </p:txBody>
+      </p:sp>
+    </p:spTree>
+    <p:extLst>
+      <p:ext uri="{BB962C8B-B14F-4D97-AF65-F5344CB8AC3E}">
+        <p14:creationId xmlns:p14="http://schemas.microsoft.com/office/powerpoint/2010/main" val="1024086991"/>
+      </p:ext>
+    </p:extLst>
+  </p:cSld>
+  <p:clrMapOvr>
+    <a:masterClrMapping/>
+  </p:clrMapOvr>
+</p:notes>
+</file>
+
+<file path=ppt/notesSlides/notesSlide28.xml><?xml version="1.0" encoding="utf-8"?>
+<p:notes xmlns:a="http://schemas.openxmlformats.org/drawingml/2006/main" xmlns:r="http://schemas.openxmlformats.org/officeDocument/2006/relationships" xmlns:p="http://schemas.openxmlformats.org/presentationml/2006/main">
+  <p:cSld>
+    <p:spTree>
+      <p:nvGrpSpPr>
+        <p:cNvPr id="1" name=""/>
+        <p:cNvGrpSpPr/>
+        <p:nvPr/>
+      </p:nvGrpSpPr>
+      <p:grpSpPr>
+        <a:xfrm>
+          <a:off x="0" y="0"/>
+          <a:ext cx="0" cy="0"/>
+          <a:chOff x="0" y="0"/>
+          <a:chExt cx="0" cy="0"/>
+        </a:xfrm>
+      </p:grpSpPr>
+      <p:sp>
+        <p:nvSpPr>
+          <p:cNvPr id="2" name="Slide Image Placeholder 1"/>
+          <p:cNvSpPr>
+            <a:spLocks noGrp="1" noRot="1" noChangeAspect="1"/>
+          </p:cNvSpPr>
+          <p:nvPr>
+            <p:ph type="sldImg"/>
+          </p:nvPr>
+        </p:nvSpPr>
+        <p:spPr/>
+      </p:sp>
+      <p:sp>
+        <p:nvSpPr>
+          <p:cNvPr id="3" name="Notes Placeholder 2"/>
+          <p:cNvSpPr>
+            <a:spLocks noGrp="1"/>
+          </p:cNvSpPr>
+          <p:nvPr>
+            <p:ph type="body" idx="1"/>
+          </p:nvPr>
+        </p:nvSpPr>
+        <p:spPr/>
+        <p:txBody>
+          <a:bodyPr/>
+          <a:lstStyle/>
+          <a:p>
+            <a:r>
+              <a:rPr lang="en-US" dirty="0"/>
+              <a:t>המשפט האחרון. לעצור. לא להוסיף כלום אחריו.</a:t>
+            </a:r>
+            <a:endParaRPr lang="en-US" dirty="0"/>
+          </a:p>
+        </p:txBody>
+      </p:sp>
+      <p:sp>
+        <p:nvSpPr>
+          <p:cNvPr id="4" name="Slide Number Placeholder 3"/>
+          <p:cNvSpPr>
+            <a:spLocks noGrp="1"/>
+          </p:cNvSpPr>
+          <p:nvPr>
+            <p:ph type="sldNum" sz="quarter" idx="10"/>
+          </p:nvPr>
+        </p:nvSpPr>
+        <p:spPr/>
+        <p:txBody>
+          <a:bodyPr/>
+          <a:lstStyle/>
+          <a:p>
+            <a:fld id="{F7021451-1387-4CA6-816F-3879F97B5CBC}" type="slidenum">
+              <a:rPr lang="en-US"/>
+              <a:t>28</a:t>
             </a:fld>
             <a:endParaRPr lang="en-US"/>
           </a:p>
@@ -2391,6 +2664,8 @@
             <a:r>
               <a:rPr lang="en-US" dirty="0"/>
               <a:t>אירוע אחד בכיתה י' ששינה לי את כל התפיסה. האשימו אותי בבית הספר בסחר בסמים ולא היה לי שום קשר לזה.
+בסוף השיחה הם האמינו לי – אבל זה השאיר בי חותם: שיכולים לחשוד בי בדבר כל כך חמור.
+זו הפעם הראשונה שהחלטתי לקחת את ההחלטות בחיים שלי בעצמי.
 משם הבנתי שאני לא 'ילד רע', וקיבלתי החלטה 'לכתוב את הסיפור שלי' ולשנות את התדמית.
 מאותו רגע: חיפוש שנת שירות איכותית, שאיפה לשירות קרבי משמעותי.</a:t>
             </a:r>
@@ -3315,24 +3590,129 @@
         </p:nvSpPr>
         <p:spPr>
           <a:xfrm>
-            <a:off x="914400" y="2011680"/>
-            <a:ext cx="10362895" cy="1005840"/>
-          </a:xfrm>
-          <a:prstGeom prst="rect">
-            <a:avLst/>
-          </a:prstGeom>
-          <a:noFill/>
-          <a:ln/>
-        </p:spPr>
-        <p:txBody>
-          <a:bodyPr wrap="square" lIns="0" tIns="0" rIns="0" bIns="0" rtlCol="0" anchor="t"/>
-          <a:lstStyle/>
-          <a:p>
-            <a:pPr rtl="1" algn="ctr" indent="0" marL="0">
-              <a:buNone/>
-            </a:pPr>
-            <a:r>
-              <a:rPr lang="he-IL" altLang="en-US" sz="4400" b="1" dirty="0">
+            <a:off x="822960" y="548640"/>
+            <a:ext cx="10545775" cy="914400"/>
+          </a:xfrm>
+          <a:prstGeom prst="rect">
+            <a:avLst/>
+          </a:prstGeom>
+          <a:noFill/>
+          <a:ln/>
+        </p:spPr>
+        <p:txBody>
+          <a:bodyPr wrap="square" lIns="0" tIns="0" rIns="0" bIns="0" rtlCol="0" anchor="t"/>
+          <a:lstStyle/>
+          <a:p>
+            <a:pPr rtl="1" algn="r" indent="0" marL="0">
+              <a:buNone/>
+            </a:pPr>
+            <a:r>
+              <a:rPr lang="he-IL" altLang="en-US" sz="3600" b="1" dirty="0">
+                <a:solidFill>
+                  <a:srgbClr val="FFFFFF"/>
+                </a:solidFill>
+                <a:latin typeface="Arial" pitchFamily="34" charset="0"/>
+                <a:ea typeface="Arial" pitchFamily="34" charset="-122"/>
+                <a:cs typeface="Arial" pitchFamily="34" charset="-120"/>
+              </a:rPr>
+              <a:t>שני מפקדים. שני שיעורים.</a:t>
+            </a:r>
+            <a:endParaRPr lang="he-IL" sz="3600" dirty="0"/>
+          </a:p>
+        </p:txBody>
+      </p:sp>
+      <p:sp>
+        <p:nvSpPr>
+          <p:cNvPr id="3" name="Shape 1"/>
+          <p:cNvSpPr/>
+          <p:nvPr/>
+        </p:nvSpPr>
+        <p:spPr>
+          <a:xfrm>
+            <a:off x="6278728" y="1645920"/>
+            <a:ext cx="5090008" cy="4297680"/>
+          </a:xfrm>
+          <a:prstGeom prst="roundRect">
+            <a:avLst>
+              <a:gd name="adj" fmla="val 2979"/>
+            </a:avLst>
+          </a:prstGeom>
+          <a:solidFill>
+            <a:srgbClr val="171C24"/>
+          </a:solidFill>
+          <a:ln w="9525">
+            <a:solidFill>
+              <a:srgbClr val="2A313C"/>
+            </a:solidFill>
+            <a:prstDash val="solid"/>
+          </a:ln>
+        </p:spPr>
+      </p:sp>
+      <p:sp>
+        <p:nvSpPr>
+          <p:cNvPr id="4" name="Text 2"/>
+          <p:cNvSpPr txBox="1"/>
+          <p:nvPr/>
+        </p:nvSpPr>
+        <p:spPr>
+          <a:xfrm>
+            <a:off x="6644488" y="1965960"/>
+            <a:ext cx="4358488" cy="731520"/>
+          </a:xfrm>
+          <a:prstGeom prst="rect">
+            <a:avLst/>
+          </a:prstGeom>
+          <a:noFill/>
+          <a:ln/>
+        </p:spPr>
+        <p:txBody>
+          <a:bodyPr wrap="square" lIns="0" tIns="0" rIns="0" bIns="0" rtlCol="0" anchor="t"/>
+          <a:lstStyle/>
+          <a:p>
+            <a:pPr rtl="1" algn="r" indent="0" marL="0">
+              <a:buNone/>
+            </a:pPr>
+            <a:r>
+              <a:rPr lang="he-IL" altLang="en-US" sz="4000" b="1" dirty="0">
+                <a:solidFill>
+                  <a:srgbClr val="D9B78C"/>
+                </a:solidFill>
+                <a:latin typeface="Arial" pitchFamily="34" charset="0"/>
+                <a:ea typeface="Arial" pitchFamily="34" charset="-122"/>
+                <a:cs typeface="Arial" pitchFamily="34" charset="-120"/>
+              </a:rPr>
+              <a:t>קליין</a:t>
+            </a:r>
+            <a:endParaRPr lang="he-IL" sz="4000" dirty="0"/>
+          </a:p>
+        </p:txBody>
+      </p:sp>
+      <p:sp>
+        <p:nvSpPr>
+          <p:cNvPr id="5" name="Text 3"/>
+          <p:cNvSpPr txBox="1"/>
+          <p:nvPr/>
+        </p:nvSpPr>
+        <p:spPr>
+          <a:xfrm>
+            <a:off x="6644488" y="2697480"/>
+            <a:ext cx="4358488" cy="365760"/>
+          </a:xfrm>
+          <a:prstGeom prst="rect">
+            <a:avLst/>
+          </a:prstGeom>
+          <a:noFill/>
+          <a:ln/>
+        </p:spPr>
+        <p:txBody>
+          <a:bodyPr wrap="square" lIns="0" tIns="0" rIns="0" bIns="0" rtlCol="0" anchor="t"/>
+          <a:lstStyle/>
+          <a:p>
+            <a:pPr rtl="1" algn="r" indent="0" marL="0">
+              <a:buNone/>
+            </a:pPr>
+            <a:r>
+              <a:rPr lang="he-IL" altLang="en-US" sz="1400" dirty="0">
                 <a:solidFill>
                   <a:srgbClr val="A7ADB8"/>
                 </a:solidFill>
@@ -3340,38 +3720,143 @@
                 <a:ea typeface="Arial" pitchFamily="34" charset="-122"/>
                 <a:cs typeface="Arial" pitchFamily="34" charset="-120"/>
               </a:rPr>
-              <a:t>מוטיבציה מביאה אותך להתחלה.</a:t>
-            </a:r>
-            <a:endParaRPr lang="he-IL" sz="4400" dirty="0"/>
-          </a:p>
-        </p:txBody>
-      </p:sp>
-      <p:sp>
-        <p:nvSpPr>
-          <p:cNvPr id="3" name="Text 1"/>
-          <p:cNvSpPr txBox="1"/>
-          <p:nvPr/>
-        </p:nvSpPr>
-        <p:spPr>
-          <a:xfrm>
-            <a:off x="914400" y="3108960"/>
-            <a:ext cx="10362895" cy="1097280"/>
-          </a:xfrm>
-          <a:prstGeom prst="rect">
-            <a:avLst/>
-          </a:prstGeom>
-          <a:noFill/>
-          <a:ln/>
-        </p:spPr>
-        <p:txBody>
-          <a:bodyPr wrap="square" lIns="0" tIns="0" rIns="0" bIns="0" rtlCol="0" anchor="t"/>
-          <a:lstStyle/>
-          <a:p>
-            <a:pPr rtl="1" algn="ctr" indent="0" marL="0">
-              <a:buNone/>
-            </a:pPr>
-            <a:r>
-              <a:rPr lang="he-IL" altLang="en-US" sz="5200" b="1" dirty="0">
+              <a:t>המפקצ׳</a:t>
+            </a:r>
+            <a:endParaRPr lang="he-IL" sz="1400" dirty="0"/>
+          </a:p>
+        </p:txBody>
+      </p:sp>
+      <p:sp>
+        <p:nvSpPr>
+          <p:cNvPr id="6" name="Text 4"/>
+          <p:cNvSpPr txBox="1"/>
+          <p:nvPr/>
+        </p:nvSpPr>
+        <p:spPr>
+          <a:xfrm>
+            <a:off x="6644488" y="3246120"/>
+            <a:ext cx="4358488" cy="1005840"/>
+          </a:xfrm>
+          <a:prstGeom prst="rect">
+            <a:avLst/>
+          </a:prstGeom>
+          <a:noFill/>
+          <a:ln/>
+        </p:spPr>
+        <p:txBody>
+          <a:bodyPr wrap="square" lIns="0" tIns="0" rIns="0" bIns="0" rtlCol="0" anchor="t"/>
+          <a:lstStyle/>
+          <a:p>
+            <a:pPr rtl="1" algn="r" indent="0" marL="0">
+              <a:buNone/>
+            </a:pPr>
+            <a:r>
+              <a:rPr lang="he-IL" altLang="en-US" sz="2200" b="1" dirty="0">
+                <a:solidFill>
+                  <a:srgbClr val="FFFFFF"/>
+                </a:solidFill>
+                <a:latin typeface="Arial" pitchFamily="34" charset="0"/>
+                <a:ea typeface="Arial" pitchFamily="34" charset="-122"/>
+                <a:cs typeface="Arial" pitchFamily="34" charset="-120"/>
+              </a:rPr>
+              <a:t>מצוינות. מקצועיות. לעשות דברים כמו שצריך – ועד הסוף.</a:t>
+            </a:r>
+            <a:endParaRPr lang="he-IL" sz="2200" dirty="0"/>
+          </a:p>
+        </p:txBody>
+      </p:sp>
+      <p:sp>
+        <p:nvSpPr>
+          <p:cNvPr id="7" name="Text 5"/>
+          <p:cNvSpPr txBox="1"/>
+          <p:nvPr/>
+        </p:nvSpPr>
+        <p:spPr>
+          <a:xfrm>
+            <a:off x="6644488" y="4343400"/>
+            <a:ext cx="4358488" cy="1463040"/>
+          </a:xfrm>
+          <a:prstGeom prst="rect">
+            <a:avLst/>
+          </a:prstGeom>
+          <a:noFill/>
+          <a:ln/>
+        </p:spPr>
+        <p:txBody>
+          <a:bodyPr wrap="square" lIns="0" tIns="0" rIns="0" bIns="0" rtlCol="0" anchor="t"/>
+          <a:lstStyle/>
+          <a:p>
+            <a:pPr rtl="1" algn="r" indent="0" marL="0">
+              <a:buNone/>
+            </a:pPr>
+            <a:r>
+              <a:rPr lang="he-IL" altLang="en-US" sz="1450" dirty="0">
+                <a:solidFill>
+                  <a:srgbClr val="A7ADB8"/>
+                </a:solidFill>
+                <a:latin typeface="Arial" pitchFamily="34" charset="0"/>
+                <a:ea typeface="Arial" pitchFamily="34" charset="-122"/>
+                <a:cs typeface="Arial" pitchFamily="34" charset="-120"/>
+              </a:rPr>
+              <a:t>המסגרת שהוא הכניס אותנו אליה לא נגמרה בשחרור. עד היום אני במשטר אימונים בגללו.</a:t>
+            </a:r>
+            <a:endParaRPr lang="he-IL" sz="1450" dirty="0"/>
+          </a:p>
+        </p:txBody>
+      </p:sp>
+      <p:sp>
+        <p:nvSpPr>
+          <p:cNvPr id="8" name="Shape 6"/>
+          <p:cNvSpPr/>
+          <p:nvPr/>
+        </p:nvSpPr>
+        <p:spPr>
+          <a:xfrm>
+            <a:off x="822960" y="1645920"/>
+            <a:ext cx="5090008" cy="4297680"/>
+          </a:xfrm>
+          <a:prstGeom prst="roundRect">
+            <a:avLst>
+              <a:gd name="adj" fmla="val 2979"/>
+            </a:avLst>
+          </a:prstGeom>
+          <a:solidFill>
+            <a:srgbClr val="171C24"/>
+          </a:solidFill>
+          <a:ln w="9525">
+            <a:solidFill>
+              <a:srgbClr val="2A313C"/>
+            </a:solidFill>
+            <a:prstDash val="solid"/>
+          </a:ln>
+        </p:spPr>
+      </p:sp>
+      <p:sp>
+        <p:nvSpPr>
+          <p:cNvPr id="9" name="Text 7"/>
+          <p:cNvSpPr txBox="1"/>
+          <p:nvPr/>
+        </p:nvSpPr>
+        <p:spPr>
+          <a:xfrm>
+            <a:off x="1188720" y="1965960"/>
+            <a:ext cx="4358488" cy="731520"/>
+          </a:xfrm>
+          <a:prstGeom prst="rect">
+            <a:avLst/>
+          </a:prstGeom>
+          <a:noFill/>
+          <a:ln/>
+        </p:spPr>
+        <p:txBody>
+          <a:bodyPr wrap="square" lIns="0" tIns="0" rIns="0" bIns="0" rtlCol="0" anchor="t"/>
+          <a:lstStyle/>
+          <a:p>
+            <a:pPr rtl="1" algn="r" indent="0" marL="0">
+              <a:buNone/>
+            </a:pPr>
+            <a:r>
+              <a:rPr lang="he-IL" altLang="en-US" sz="4000" b="1" dirty="0">
                 <a:solidFill>
                   <a:srgbClr val="D9B78C"/>
                 </a:solidFill>
@@ -3379,15 +3864,132 @@
                 <a:ea typeface="Arial" pitchFamily="34" charset="-122"/>
                 <a:cs typeface="Arial" pitchFamily="34" charset="-120"/>
               </a:rPr>
-              <a:t>משמעת מביאה אותך לסוף.</a:t>
-            </a:r>
-            <a:endParaRPr lang="he-IL" sz="5200" dirty="0"/>
-          </a:p>
-        </p:txBody>
-      </p:sp>
-      <p:sp>
-        <p:nvSpPr>
-          <p:cNvPr id="4" name="Text 2"/>
+              <a:t>ברנש</a:t>
+            </a:r>
+            <a:endParaRPr lang="he-IL" sz="4000" dirty="0"/>
+          </a:p>
+        </p:txBody>
+      </p:sp>
+      <p:sp>
+        <p:nvSpPr>
+          <p:cNvPr id="10" name="Text 8"/>
+          <p:cNvSpPr txBox="1"/>
+          <p:nvPr/>
+        </p:nvSpPr>
+        <p:spPr>
+          <a:xfrm>
+            <a:off x="1188720" y="2697480"/>
+            <a:ext cx="4358488" cy="365760"/>
+          </a:xfrm>
+          <a:prstGeom prst="rect">
+            <a:avLst/>
+          </a:prstGeom>
+          <a:noFill/>
+          <a:ln/>
+        </p:spPr>
+        <p:txBody>
+          <a:bodyPr wrap="square" lIns="0" tIns="0" rIns="0" bIns="0" rtlCol="0" anchor="t"/>
+          <a:lstStyle/>
+          <a:p>
+            <a:pPr rtl="1" algn="r" indent="0" marL="0">
+              <a:buNone/>
+            </a:pPr>
+            <a:r>
+              <a:rPr lang="he-IL" altLang="en-US" sz="1400" dirty="0">
+                <a:solidFill>
+                  <a:srgbClr val="A7ADB8"/>
+                </a:solidFill>
+                <a:latin typeface="Arial" pitchFamily="34" charset="0"/>
+                <a:ea typeface="Arial" pitchFamily="34" charset="-122"/>
+                <a:cs typeface="Arial" pitchFamily="34" charset="-120"/>
+              </a:rPr>
+              <a:t>המג״ד</a:t>
+            </a:r>
+            <a:endParaRPr lang="he-IL" sz="1400" dirty="0"/>
+          </a:p>
+        </p:txBody>
+      </p:sp>
+      <p:sp>
+        <p:nvSpPr>
+          <p:cNvPr id="11" name="Text 9"/>
+          <p:cNvSpPr txBox="1"/>
+          <p:nvPr/>
+        </p:nvSpPr>
+        <p:spPr>
+          <a:xfrm>
+            <a:off x="1188720" y="3246120"/>
+            <a:ext cx="4358488" cy="1005840"/>
+          </a:xfrm>
+          <a:prstGeom prst="rect">
+            <a:avLst/>
+          </a:prstGeom>
+          <a:noFill/>
+          <a:ln/>
+        </p:spPr>
+        <p:txBody>
+          <a:bodyPr wrap="square" lIns="0" tIns="0" rIns="0" bIns="0" rtlCol="0" anchor="t"/>
+          <a:lstStyle/>
+          <a:p>
+            <a:pPr rtl="1" algn="r" indent="0" marL="0">
+              <a:buNone/>
+            </a:pPr>
+            <a:r>
+              <a:rPr lang="he-IL" altLang="en-US" sz="2200" b="1" dirty="0">
+                <a:solidFill>
+                  <a:srgbClr val="FFFFFF"/>
+                </a:solidFill>
+                <a:latin typeface="Arial" pitchFamily="34" charset="0"/>
+                <a:ea typeface="Arial" pitchFamily="34" charset="-122"/>
+                <a:cs typeface="Arial" pitchFamily="34" charset="-120"/>
+              </a:rPr>
+              <a:t>קודם כל בן אדם.</a:t>
+            </a:r>
+            <a:endParaRPr lang="he-IL" sz="2200" dirty="0"/>
+          </a:p>
+        </p:txBody>
+      </p:sp>
+      <p:sp>
+        <p:nvSpPr>
+          <p:cNvPr id="12" name="Text 10"/>
+          <p:cNvSpPr txBox="1"/>
+          <p:nvPr/>
+        </p:nvSpPr>
+        <p:spPr>
+          <a:xfrm>
+            <a:off x="1188720" y="4343400"/>
+            <a:ext cx="4358488" cy="1463040"/>
+          </a:xfrm>
+          <a:prstGeom prst="rect">
+            <a:avLst/>
+          </a:prstGeom>
+          <a:noFill/>
+          <a:ln/>
+        </p:spPr>
+        <p:txBody>
+          <a:bodyPr wrap="square" lIns="0" tIns="0" rIns="0" bIns="0" rtlCol="0" anchor="t"/>
+          <a:lstStyle/>
+          <a:p>
+            <a:pPr rtl="1" algn="r" indent="0" marL="0">
+              <a:buNone/>
+            </a:pPr>
+            <a:r>
+              <a:rPr lang="he-IL" altLang="en-US" sz="1450" dirty="0">
+                <a:solidFill>
+                  <a:srgbClr val="A7ADB8"/>
+                </a:solidFill>
+                <a:latin typeface="Arial" pitchFamily="34" charset="0"/>
+                <a:ea typeface="Arial" pitchFamily="34" charset="-122"/>
+                <a:cs typeface="Arial" pitchFamily="34" charset="-120"/>
+              </a:rPr>
+              <a:t>הגיע משלדג, פיקד בתפקידים רבים, עטור שבחים והישגים בכל תחום. ובכל זאת: ידע את השמות של רוב החיילים, התייעץ איתנו על דברים מבצעיים, ודיבר איתנו כחבר – לא כמג״ד לחייל.</a:t>
+            </a:r>
+            <a:endParaRPr lang="he-IL" sz="1450" dirty="0"/>
+          </a:p>
+        </p:txBody>
+      </p:sp>
+      <p:sp>
+        <p:nvSpPr>
+          <p:cNvPr id="13" name="Text 11"/>
           <p:cNvSpPr txBox="1"/>
           <p:nvPr/>
         </p:nvSpPr>
@@ -3464,24 +4066,63 @@
         </p:nvSpPr>
         <p:spPr>
           <a:xfrm>
-            <a:off x="822960" y="1280160"/>
-            <a:ext cx="10545775" cy="1463040"/>
-          </a:xfrm>
-          <a:prstGeom prst="rect">
-            <a:avLst/>
-          </a:prstGeom>
-          <a:noFill/>
-          <a:ln/>
-        </p:spPr>
-        <p:txBody>
-          <a:bodyPr wrap="square" lIns="0" tIns="0" rIns="0" bIns="0" rtlCol="0" anchor="t"/>
-          <a:lstStyle/>
-          <a:p>
-            <a:pPr rtl="1" algn="r" indent="0" marL="0">
-              <a:buNone/>
-            </a:pPr>
-            <a:r>
-              <a:rPr lang="he-IL" altLang="en-US" sz="9600" b="1" dirty="0">
+            <a:off x="914400" y="2011680"/>
+            <a:ext cx="10362895" cy="1005840"/>
+          </a:xfrm>
+          <a:prstGeom prst="rect">
+            <a:avLst/>
+          </a:prstGeom>
+          <a:noFill/>
+          <a:ln/>
+        </p:spPr>
+        <p:txBody>
+          <a:bodyPr wrap="square" lIns="0" tIns="0" rIns="0" bIns="0" rtlCol="0" anchor="t"/>
+          <a:lstStyle/>
+          <a:p>
+            <a:pPr rtl="1" algn="ctr" indent="0" marL="0">
+              <a:buNone/>
+            </a:pPr>
+            <a:r>
+              <a:rPr lang="he-IL" altLang="en-US" sz="4400" b="1" dirty="0">
+                <a:solidFill>
+                  <a:srgbClr val="A7ADB8"/>
+                </a:solidFill>
+                <a:latin typeface="Arial" pitchFamily="34" charset="0"/>
+                <a:ea typeface="Arial" pitchFamily="34" charset="-122"/>
+                <a:cs typeface="Arial" pitchFamily="34" charset="-120"/>
+              </a:rPr>
+              <a:t>מוטיבציה מביאה אותך להתחלה.</a:t>
+            </a:r>
+            <a:endParaRPr lang="he-IL" sz="4400" dirty="0"/>
+          </a:p>
+        </p:txBody>
+      </p:sp>
+      <p:sp>
+        <p:nvSpPr>
+          <p:cNvPr id="3" name="Text 1"/>
+          <p:cNvSpPr txBox="1"/>
+          <p:nvPr/>
+        </p:nvSpPr>
+        <p:spPr>
+          <a:xfrm>
+            <a:off x="914400" y="3108960"/>
+            <a:ext cx="10362895" cy="1097280"/>
+          </a:xfrm>
+          <a:prstGeom prst="rect">
+            <a:avLst/>
+          </a:prstGeom>
+          <a:noFill/>
+          <a:ln/>
+        </p:spPr>
+        <p:txBody>
+          <a:bodyPr wrap="square" lIns="0" tIns="0" rIns="0" bIns="0" rtlCol="0" anchor="t"/>
+          <a:lstStyle/>
+          <a:p>
+            <a:pPr rtl="1" algn="ctr" indent="0" marL="0">
+              <a:buNone/>
+            </a:pPr>
+            <a:r>
+              <a:rPr lang="he-IL" altLang="en-US" sz="5200" b="1" dirty="0">
                 <a:solidFill>
                   <a:srgbClr val="D9B78C"/>
                 </a:solidFill>
@@ -3489,93 +4130,15 @@
                 <a:ea typeface="Arial" pitchFamily="34" charset="-122"/>
                 <a:cs typeface="Arial" pitchFamily="34" charset="-120"/>
               </a:rPr>
-              <a:t>03</a:t>
-            </a:r>
-            <a:endParaRPr lang="he-IL" sz="9600" dirty="0"/>
-          </a:p>
-        </p:txBody>
-      </p:sp>
-      <p:sp>
-        <p:nvSpPr>
-          <p:cNvPr id="3" name="Text 1"/>
-          <p:cNvSpPr txBox="1"/>
-          <p:nvPr/>
-        </p:nvSpPr>
-        <p:spPr>
-          <a:xfrm>
-            <a:off x="822960" y="2926080"/>
-            <a:ext cx="10545775" cy="1097280"/>
-          </a:xfrm>
-          <a:prstGeom prst="rect">
-            <a:avLst/>
-          </a:prstGeom>
-          <a:noFill/>
-          <a:ln/>
-        </p:spPr>
-        <p:txBody>
-          <a:bodyPr wrap="square" lIns="0" tIns="0" rIns="0" bIns="0" rtlCol="0" anchor="t"/>
-          <a:lstStyle/>
-          <a:p>
-            <a:pPr rtl="1" algn="r" indent="0" marL="0">
-              <a:buNone/>
-            </a:pPr>
-            <a:r>
-              <a:rPr lang="he-IL" altLang="en-US" sz="4400" b="1" dirty="0">
-                <a:solidFill>
-                  <a:srgbClr val="FFFFFF"/>
-                </a:solidFill>
-                <a:latin typeface="Arial" pitchFamily="34" charset="0"/>
-                <a:ea typeface="Arial" pitchFamily="34" charset="-122"/>
-                <a:cs typeface="Arial" pitchFamily="34" charset="-120"/>
-              </a:rPr>
-              <a:t>7 באוקטובר</a:t>
-            </a:r>
-            <a:endParaRPr lang="he-IL" sz="4400" dirty="0"/>
+              <a:t>משמעת מביאה אותך לסוף.</a:t>
+            </a:r>
+            <a:endParaRPr lang="he-IL" sz="5200" dirty="0"/>
           </a:p>
         </p:txBody>
       </p:sp>
       <p:sp>
         <p:nvSpPr>
           <p:cNvPr id="4" name="Text 2"/>
-          <p:cNvSpPr txBox="1"/>
-          <p:nvPr/>
-        </p:nvSpPr>
-        <p:spPr>
-          <a:xfrm>
-            <a:off x="822960" y="4206240"/>
-            <a:ext cx="10545775" cy="1097280"/>
-          </a:xfrm>
-          <a:prstGeom prst="rect">
-            <a:avLst/>
-          </a:prstGeom>
-          <a:noFill/>
-          <a:ln/>
-        </p:spPr>
-        <p:txBody>
-          <a:bodyPr wrap="square" lIns="0" tIns="0" rIns="0" bIns="0" rtlCol="0" anchor="t"/>
-          <a:lstStyle/>
-          <a:p>
-            <a:pPr rtl="1" algn="r" indent="0" marL="0">
-              <a:buNone/>
-            </a:pPr>
-            <a:r>
-              <a:rPr lang="he-IL" altLang="en-US" sz="2000" dirty="0">
-                <a:solidFill>
-                  <a:srgbClr val="A7ADB8"/>
-                </a:solidFill>
-                <a:latin typeface="Arial" pitchFamily="34" charset="0"/>
-                <a:ea typeface="Arial" pitchFamily="34" charset="-122"/>
-                <a:cs typeface="Arial" pitchFamily="34" charset="-120"/>
-              </a:rPr>
-              <a:t>לא ״בשעה X קרה Y״. מה חשבתי בכל שלב.</a:t>
-            </a:r>
-            <a:endParaRPr lang="he-IL" sz="2000" dirty="0"/>
-          </a:p>
-        </p:txBody>
-      </p:sp>
-      <p:sp>
-        <p:nvSpPr>
-          <p:cNvPr id="5" name="Text 3"/>
           <p:cNvSpPr txBox="1"/>
           <p:nvPr/>
         </p:nvSpPr>
@@ -3652,8 +4215,8 @@
         </p:nvSpPr>
         <p:spPr>
           <a:xfrm>
-            <a:off x="822960" y="548640"/>
-            <a:ext cx="10545775" cy="914400"/>
+            <a:off x="822960" y="1280160"/>
+            <a:ext cx="10545775" cy="1463040"/>
           </a:xfrm>
           <a:prstGeom prst="rect">
             <a:avLst/>
@@ -3669,7 +4232,46 @@
               <a:buNone/>
             </a:pPr>
             <a:r>
-              <a:rPr lang="he-IL" altLang="en-US" sz="3600" b="1" dirty="0">
+              <a:rPr lang="he-IL" altLang="en-US" sz="9600" b="1" dirty="0">
+                <a:solidFill>
+                  <a:srgbClr val="D9B78C"/>
+                </a:solidFill>
+                <a:latin typeface="Arial" pitchFamily="34" charset="0"/>
+                <a:ea typeface="Arial" pitchFamily="34" charset="-122"/>
+                <a:cs typeface="Arial" pitchFamily="34" charset="-120"/>
+              </a:rPr>
+              <a:t>03</a:t>
+            </a:r>
+            <a:endParaRPr lang="he-IL" sz="9600" dirty="0"/>
+          </a:p>
+        </p:txBody>
+      </p:sp>
+      <p:sp>
+        <p:nvSpPr>
+          <p:cNvPr id="3" name="Text 1"/>
+          <p:cNvSpPr txBox="1"/>
+          <p:nvPr/>
+        </p:nvSpPr>
+        <p:spPr>
+          <a:xfrm>
+            <a:off x="822960" y="2926080"/>
+            <a:ext cx="10545775" cy="1097280"/>
+          </a:xfrm>
+          <a:prstGeom prst="rect">
+            <a:avLst/>
+          </a:prstGeom>
+          <a:noFill/>
+          <a:ln/>
+        </p:spPr>
+        <p:txBody>
+          <a:bodyPr wrap="square" lIns="0" tIns="0" rIns="0" bIns="0" rtlCol="0" anchor="t"/>
+          <a:lstStyle/>
+          <a:p>
+            <a:pPr rtl="1" algn="r" indent="0" marL="0">
+              <a:buNone/>
+            </a:pPr>
+            <a:r>
+              <a:rPr lang="he-IL" altLang="en-US" sz="4400" b="1" dirty="0">
                 <a:solidFill>
                   <a:srgbClr val="FFFFFF"/>
                 </a:solidFill>
@@ -3677,798 +4279,54 @@
                 <a:ea typeface="Arial" pitchFamily="34" charset="-122"/>
                 <a:cs typeface="Arial" pitchFamily="34" charset="-120"/>
               </a:rPr>
-              <a:t>שבעה שלבים באותו יום</a:t>
-            </a:r>
-            <a:endParaRPr lang="he-IL" sz="3600" dirty="0"/>
-          </a:p>
-        </p:txBody>
-      </p:sp>
-      <p:sp>
-        <p:nvSpPr>
-          <p:cNvPr id="3" name="Shape 1"/>
-          <p:cNvSpPr/>
-          <p:nvPr/>
-        </p:nvSpPr>
-        <p:spPr>
-          <a:xfrm>
-            <a:off x="1505690" y="2926080"/>
-            <a:ext cx="9180315" cy="0"/>
-          </a:xfrm>
-          <a:prstGeom prst="line">
-            <a:avLst/>
-          </a:prstGeom>
-          <a:noFill/>
-          <a:ln w="25400">
-            <a:solidFill>
-              <a:srgbClr val="3A4150"/>
-            </a:solidFill>
-            <a:prstDash val="solid"/>
-          </a:ln>
-        </p:spPr>
-      </p:sp>
-      <p:sp>
-        <p:nvSpPr>
-          <p:cNvPr id="4" name="Shape 2"/>
-          <p:cNvSpPr/>
-          <p:nvPr/>
-        </p:nvSpPr>
-        <p:spPr>
-          <a:xfrm>
-            <a:off x="10411685" y="2651760"/>
-            <a:ext cx="548640" cy="548640"/>
-          </a:xfrm>
-          <a:prstGeom prst="ellipse">
-            <a:avLst/>
-          </a:prstGeom>
-          <a:solidFill>
-            <a:srgbClr val="171C24"/>
-          </a:solidFill>
-          <a:ln w="19050">
-            <a:solidFill>
-              <a:srgbClr val="D9B78C"/>
-            </a:solidFill>
-            <a:prstDash val="solid"/>
-          </a:ln>
-        </p:spPr>
+              <a:t>7 באוקטובר</a:t>
+            </a:r>
+            <a:endParaRPr lang="he-IL" sz="4400" dirty="0"/>
+          </a:p>
+        </p:txBody>
+      </p:sp>
+      <p:sp>
+        <p:nvSpPr>
+          <p:cNvPr id="4" name="Text 2"/>
+          <p:cNvSpPr txBox="1"/>
+          <p:nvPr/>
+        </p:nvSpPr>
+        <p:spPr>
+          <a:xfrm>
+            <a:off x="822960" y="4206240"/>
+            <a:ext cx="10545775" cy="1097280"/>
+          </a:xfrm>
+          <a:prstGeom prst="rect">
+            <a:avLst/>
+          </a:prstGeom>
+          <a:noFill/>
+          <a:ln/>
+        </p:spPr>
+        <p:txBody>
+          <a:bodyPr wrap="square" lIns="0" tIns="0" rIns="0" bIns="0" rtlCol="0" anchor="t"/>
+          <a:lstStyle/>
+          <a:p>
+            <a:pPr rtl="1" algn="r" indent="0" marL="0">
+              <a:buNone/>
+            </a:pPr>
+            <a:r>
+              <a:rPr lang="he-IL" altLang="en-US" sz="2000" dirty="0">
+                <a:solidFill>
+                  <a:srgbClr val="A7ADB8"/>
+                </a:solidFill>
+                <a:latin typeface="Arial" pitchFamily="34" charset="0"/>
+                <a:ea typeface="Arial" pitchFamily="34" charset="-122"/>
+                <a:cs typeface="Arial" pitchFamily="34" charset="-120"/>
+              </a:rPr>
+              <a:t>לא ״בשעה X קרה Y״. מה חשבתי בכל שלב.</a:t>
+            </a:r>
+            <a:endParaRPr lang="he-IL" sz="2000" dirty="0"/>
+          </a:p>
+        </p:txBody>
       </p:sp>
       <p:sp>
         <p:nvSpPr>
           <p:cNvPr id="5" name="Text 3"/>
-          <p:cNvSpPr txBox="1"/>
-          <p:nvPr/>
-        </p:nvSpPr>
-        <p:spPr>
-          <a:xfrm>
-            <a:off x="10411685" y="2651760"/>
-            <a:ext cx="548640" cy="548640"/>
-          </a:xfrm>
-          <a:prstGeom prst="rect">
-            <a:avLst/>
-          </a:prstGeom>
-          <a:noFill/>
-          <a:ln/>
-        </p:spPr>
-        <p:txBody>
-          <a:bodyPr wrap="square" lIns="0" tIns="0" rIns="0" bIns="0" rtlCol="0" anchor="ctr"/>
-          <a:lstStyle/>
-          <a:p>
-            <a:pPr rtl="1" algn="ctr" indent="0" marL="0">
-              <a:buNone/>
-            </a:pPr>
-            <a:r>
-              <a:rPr lang="he-IL" altLang="en-US" sz="1400" b="1" dirty="0">
-                <a:solidFill>
-                  <a:srgbClr val="D9B78C"/>
-                </a:solidFill>
-                <a:latin typeface="Arial" pitchFamily="34" charset="0"/>
-                <a:ea typeface="Arial" pitchFamily="34" charset="-122"/>
-                <a:cs typeface="Arial" pitchFamily="34" charset="-120"/>
-              </a:rPr>
-              <a:t>1</a:t>
-            </a:r>
-            <a:endParaRPr lang="he-IL" sz="1400" dirty="0"/>
-          </a:p>
-        </p:txBody>
-      </p:sp>
-      <p:sp>
-        <p:nvSpPr>
-          <p:cNvPr id="6" name="Text 4"/>
-          <p:cNvSpPr txBox="1"/>
-          <p:nvPr/>
-        </p:nvSpPr>
-        <p:spPr>
-          <a:xfrm>
-            <a:off x="10003275" y="3429000"/>
-            <a:ext cx="1365460" cy="1371600"/>
-          </a:xfrm>
-          <a:prstGeom prst="rect">
-            <a:avLst/>
-          </a:prstGeom>
-          <a:noFill/>
-          <a:ln/>
-        </p:spPr>
-        <p:txBody>
-          <a:bodyPr wrap="square" lIns="0" tIns="0" rIns="0" bIns="0" rtlCol="0" anchor="t"/>
-          <a:lstStyle/>
-          <a:p>
-            <a:pPr rtl="1" algn="ctr" indent="0" marL="0">
-              <a:buNone/>
-            </a:pPr>
-            <a:r>
-              <a:rPr lang="he-IL" altLang="en-US" sz="1500" dirty="0">
-                <a:solidFill>
-                  <a:srgbClr val="FFFFFF"/>
-                </a:solidFill>
-                <a:latin typeface="Arial" pitchFamily="34" charset="0"/>
-                <a:ea typeface="Arial" pitchFamily="34" charset="-122"/>
-                <a:cs typeface="Arial" pitchFamily="34" charset="-120"/>
-              </a:rPr>
-              <a:t>לפני</a:t>
-            </a:r>
-            <a:endParaRPr lang="he-IL" sz="1500" dirty="0"/>
-          </a:p>
-        </p:txBody>
-      </p:sp>
-      <p:sp>
-        <p:nvSpPr>
-          <p:cNvPr id="7" name="Shape 5"/>
-          <p:cNvSpPr/>
-          <p:nvPr/>
-        </p:nvSpPr>
-        <p:spPr>
-          <a:xfrm>
-            <a:off x="8881633" y="2651760"/>
-            <a:ext cx="548640" cy="548640"/>
-          </a:xfrm>
-          <a:prstGeom prst="ellipse">
-            <a:avLst/>
-          </a:prstGeom>
-          <a:solidFill>
-            <a:srgbClr val="171C24"/>
-          </a:solidFill>
-          <a:ln w="19050">
-            <a:solidFill>
-              <a:srgbClr val="D9B78C"/>
-            </a:solidFill>
-            <a:prstDash val="solid"/>
-          </a:ln>
-        </p:spPr>
-      </p:sp>
-      <p:sp>
-        <p:nvSpPr>
-          <p:cNvPr id="8" name="Text 6"/>
-          <p:cNvSpPr txBox="1"/>
-          <p:nvPr/>
-        </p:nvSpPr>
-        <p:spPr>
-          <a:xfrm>
-            <a:off x="8881633" y="2651760"/>
-            <a:ext cx="548640" cy="548640"/>
-          </a:xfrm>
-          <a:prstGeom prst="rect">
-            <a:avLst/>
-          </a:prstGeom>
-          <a:noFill/>
-          <a:ln/>
-        </p:spPr>
-        <p:txBody>
-          <a:bodyPr wrap="square" lIns="0" tIns="0" rIns="0" bIns="0" rtlCol="0" anchor="ctr"/>
-          <a:lstStyle/>
-          <a:p>
-            <a:pPr rtl="1" algn="ctr" indent="0" marL="0">
-              <a:buNone/>
-            </a:pPr>
-            <a:r>
-              <a:rPr lang="he-IL" altLang="en-US" sz="1400" b="1" dirty="0">
-                <a:solidFill>
-                  <a:srgbClr val="D9B78C"/>
-                </a:solidFill>
-                <a:latin typeface="Arial" pitchFamily="34" charset="0"/>
-                <a:ea typeface="Arial" pitchFamily="34" charset="-122"/>
-                <a:cs typeface="Arial" pitchFamily="34" charset="-120"/>
-              </a:rPr>
-              <a:t>2</a:t>
-            </a:r>
-            <a:endParaRPr lang="he-IL" sz="1400" dirty="0"/>
-          </a:p>
-        </p:txBody>
-      </p:sp>
-      <p:sp>
-        <p:nvSpPr>
-          <p:cNvPr id="9" name="Text 7"/>
-          <p:cNvSpPr txBox="1"/>
-          <p:nvPr/>
-        </p:nvSpPr>
-        <p:spPr>
-          <a:xfrm>
-            <a:off x="8473222" y="3429000"/>
-            <a:ext cx="1365460" cy="1371600"/>
-          </a:xfrm>
-          <a:prstGeom prst="rect">
-            <a:avLst/>
-          </a:prstGeom>
-          <a:noFill/>
-          <a:ln/>
-        </p:spPr>
-        <p:txBody>
-          <a:bodyPr wrap="square" lIns="0" tIns="0" rIns="0" bIns="0" rtlCol="0" anchor="t"/>
-          <a:lstStyle/>
-          <a:p>
-            <a:pPr rtl="1" algn="ctr" indent="0" marL="0">
-              <a:buNone/>
-            </a:pPr>
-            <a:r>
-              <a:rPr lang="he-IL" altLang="en-US" sz="1500" dirty="0">
-                <a:solidFill>
-                  <a:srgbClr val="FFFFFF"/>
-                </a:solidFill>
-                <a:latin typeface="Arial" pitchFamily="34" charset="0"/>
-                <a:ea typeface="Arial" pitchFamily="34" charset="-122"/>
-                <a:cs typeface="Arial" pitchFamily="34" charset="-120"/>
-              </a:rPr>
-              <a:t>ההבנה שמשהו לא רגיל קורה</a:t>
-            </a:r>
-            <a:endParaRPr lang="he-IL" sz="1500" dirty="0"/>
-          </a:p>
-        </p:txBody>
-      </p:sp>
-      <p:sp>
-        <p:nvSpPr>
-          <p:cNvPr id="10" name="Shape 8"/>
-          <p:cNvSpPr/>
-          <p:nvPr/>
-        </p:nvSpPr>
-        <p:spPr>
-          <a:xfrm>
-            <a:off x="7351580" y="2651760"/>
-            <a:ext cx="548640" cy="548640"/>
-          </a:xfrm>
-          <a:prstGeom prst="ellipse">
-            <a:avLst/>
-          </a:prstGeom>
-          <a:solidFill>
-            <a:srgbClr val="171C24"/>
-          </a:solidFill>
-          <a:ln w="19050">
-            <a:solidFill>
-              <a:srgbClr val="D9B78C"/>
-            </a:solidFill>
-            <a:prstDash val="solid"/>
-          </a:ln>
-        </p:spPr>
-      </p:sp>
-      <p:sp>
-        <p:nvSpPr>
-          <p:cNvPr id="11" name="Text 9"/>
-          <p:cNvSpPr txBox="1"/>
-          <p:nvPr/>
-        </p:nvSpPr>
-        <p:spPr>
-          <a:xfrm>
-            <a:off x="7351580" y="2651760"/>
-            <a:ext cx="548640" cy="548640"/>
-          </a:xfrm>
-          <a:prstGeom prst="rect">
-            <a:avLst/>
-          </a:prstGeom>
-          <a:noFill/>
-          <a:ln/>
-        </p:spPr>
-        <p:txBody>
-          <a:bodyPr wrap="square" lIns="0" tIns="0" rIns="0" bIns="0" rtlCol="0" anchor="ctr"/>
-          <a:lstStyle/>
-          <a:p>
-            <a:pPr rtl="1" algn="ctr" indent="0" marL="0">
-              <a:buNone/>
-            </a:pPr>
-            <a:r>
-              <a:rPr lang="he-IL" altLang="en-US" sz="1400" b="1" dirty="0">
-                <a:solidFill>
-                  <a:srgbClr val="D9B78C"/>
-                </a:solidFill>
-                <a:latin typeface="Arial" pitchFamily="34" charset="0"/>
-                <a:ea typeface="Arial" pitchFamily="34" charset="-122"/>
-                <a:cs typeface="Arial" pitchFamily="34" charset="-120"/>
-              </a:rPr>
-              <a:t>3</a:t>
-            </a:r>
-            <a:endParaRPr lang="he-IL" sz="1400" dirty="0"/>
-          </a:p>
-        </p:txBody>
-      </p:sp>
-      <p:sp>
-        <p:nvSpPr>
-          <p:cNvPr id="12" name="Text 10"/>
-          <p:cNvSpPr txBox="1"/>
-          <p:nvPr/>
-        </p:nvSpPr>
-        <p:spPr>
-          <a:xfrm>
-            <a:off x="6943170" y="3429000"/>
-            <a:ext cx="1365460" cy="1371600"/>
-          </a:xfrm>
-          <a:prstGeom prst="rect">
-            <a:avLst/>
-          </a:prstGeom>
-          <a:noFill/>
-          <a:ln/>
-        </p:spPr>
-        <p:txBody>
-          <a:bodyPr wrap="square" lIns="0" tIns="0" rIns="0" bIns="0" rtlCol="0" anchor="t"/>
-          <a:lstStyle/>
-          <a:p>
-            <a:pPr rtl="1" algn="ctr" indent="0" marL="0">
-              <a:buNone/>
-            </a:pPr>
-            <a:r>
-              <a:rPr lang="he-IL" altLang="en-US" sz="1500" dirty="0">
-                <a:solidFill>
-                  <a:srgbClr val="FFFFFF"/>
-                </a:solidFill>
-                <a:latin typeface="Arial" pitchFamily="34" charset="0"/>
-                <a:ea typeface="Arial" pitchFamily="34" charset="-122"/>
-                <a:cs typeface="Arial" pitchFamily="34" charset="-120"/>
-              </a:rPr>
-              <a:t>הכניסה ללחימה</a:t>
-            </a:r>
-            <a:endParaRPr lang="he-IL" sz="1500" dirty="0"/>
-          </a:p>
-        </p:txBody>
-      </p:sp>
-      <p:sp>
-        <p:nvSpPr>
-          <p:cNvPr id="13" name="Shape 11"/>
-          <p:cNvSpPr/>
-          <p:nvPr/>
-        </p:nvSpPr>
-        <p:spPr>
-          <a:xfrm>
-            <a:off x="5821528" y="2651760"/>
-            <a:ext cx="548640" cy="548640"/>
-          </a:xfrm>
-          <a:prstGeom prst="ellipse">
-            <a:avLst/>
-          </a:prstGeom>
-          <a:solidFill>
-            <a:srgbClr val="D9B78C"/>
-          </a:solidFill>
-          <a:ln w="19050">
-            <a:solidFill>
-              <a:srgbClr val="D9B78C"/>
-            </a:solidFill>
-            <a:prstDash val="solid"/>
-          </a:ln>
-        </p:spPr>
-      </p:sp>
-      <p:sp>
-        <p:nvSpPr>
-          <p:cNvPr id="14" name="Text 12"/>
-          <p:cNvSpPr txBox="1"/>
-          <p:nvPr/>
-        </p:nvSpPr>
-        <p:spPr>
-          <a:xfrm>
-            <a:off x="5821528" y="2651760"/>
-            <a:ext cx="548640" cy="548640"/>
-          </a:xfrm>
-          <a:prstGeom prst="rect">
-            <a:avLst/>
-          </a:prstGeom>
-          <a:noFill/>
-          <a:ln/>
-        </p:spPr>
-        <p:txBody>
-          <a:bodyPr wrap="square" lIns="0" tIns="0" rIns="0" bIns="0" rtlCol="0" anchor="ctr"/>
-          <a:lstStyle/>
-          <a:p>
-            <a:pPr rtl="1" algn="ctr" indent="0" marL="0">
-              <a:buNone/>
-            </a:pPr>
-            <a:r>
-              <a:rPr lang="he-IL" altLang="en-US" sz="1400" b="1" dirty="0">
-                <a:solidFill>
-                  <a:srgbClr val="0E1116"/>
-                </a:solidFill>
-                <a:latin typeface="Arial" pitchFamily="34" charset="0"/>
-                <a:ea typeface="Arial" pitchFamily="34" charset="-122"/>
-                <a:cs typeface="Arial" pitchFamily="34" charset="-120"/>
-              </a:rPr>
-              <a:t>4</a:t>
-            </a:r>
-            <a:endParaRPr lang="he-IL" sz="1400" dirty="0"/>
-          </a:p>
-        </p:txBody>
-      </p:sp>
-      <p:sp>
-        <p:nvSpPr>
-          <p:cNvPr id="15" name="Text 13"/>
-          <p:cNvSpPr txBox="1"/>
-          <p:nvPr/>
-        </p:nvSpPr>
-        <p:spPr>
-          <a:xfrm>
-            <a:off x="5413117" y="3429000"/>
-            <a:ext cx="1365460" cy="1371600"/>
-          </a:xfrm>
-          <a:prstGeom prst="rect">
-            <a:avLst/>
-          </a:prstGeom>
-          <a:noFill/>
-          <a:ln/>
-        </p:spPr>
-        <p:txBody>
-          <a:bodyPr wrap="square" lIns="0" tIns="0" rIns="0" bIns="0" rtlCol="0" anchor="t"/>
-          <a:lstStyle/>
-          <a:p>
-            <a:pPr rtl="1" algn="ctr" indent="0" marL="0">
-              <a:buNone/>
-            </a:pPr>
-            <a:r>
-              <a:rPr lang="he-IL" altLang="en-US" sz="1500" b="1" dirty="0">
-                <a:solidFill>
-                  <a:srgbClr val="D9B78C"/>
-                </a:solidFill>
-                <a:latin typeface="Arial" pitchFamily="34" charset="0"/>
-                <a:ea typeface="Arial" pitchFamily="34" charset="-122"/>
-                <a:cs typeface="Arial" pitchFamily="34" charset="-120"/>
-              </a:rPr>
-              <a:t>המארב</a:t>
-            </a:r>
-            <a:endParaRPr lang="he-IL" sz="1500" dirty="0"/>
-          </a:p>
-        </p:txBody>
-      </p:sp>
-      <p:sp>
-        <p:nvSpPr>
-          <p:cNvPr id="16" name="Shape 14"/>
-          <p:cNvSpPr/>
-          <p:nvPr/>
-        </p:nvSpPr>
-        <p:spPr>
-          <a:xfrm>
-            <a:off x="4291475" y="2651760"/>
-            <a:ext cx="548640" cy="548640"/>
-          </a:xfrm>
-          <a:prstGeom prst="ellipse">
-            <a:avLst/>
-          </a:prstGeom>
-          <a:solidFill>
-            <a:srgbClr val="D9B78C"/>
-          </a:solidFill>
-          <a:ln w="19050">
-            <a:solidFill>
-              <a:srgbClr val="D9B78C"/>
-            </a:solidFill>
-            <a:prstDash val="solid"/>
-          </a:ln>
-        </p:spPr>
-      </p:sp>
-      <p:sp>
-        <p:nvSpPr>
-          <p:cNvPr id="17" name="Text 15"/>
-          <p:cNvSpPr txBox="1"/>
-          <p:nvPr/>
-        </p:nvSpPr>
-        <p:spPr>
-          <a:xfrm>
-            <a:off x="4291475" y="2651760"/>
-            <a:ext cx="548640" cy="548640"/>
-          </a:xfrm>
-          <a:prstGeom prst="rect">
-            <a:avLst/>
-          </a:prstGeom>
-          <a:noFill/>
-          <a:ln/>
-        </p:spPr>
-        <p:txBody>
-          <a:bodyPr wrap="square" lIns="0" tIns="0" rIns="0" bIns="0" rtlCol="0" anchor="ctr"/>
-          <a:lstStyle/>
-          <a:p>
-            <a:pPr rtl="1" algn="ctr" indent="0" marL="0">
-              <a:buNone/>
-            </a:pPr>
-            <a:r>
-              <a:rPr lang="he-IL" altLang="en-US" sz="1400" b="1" dirty="0">
-                <a:solidFill>
-                  <a:srgbClr val="0E1116"/>
-                </a:solidFill>
-                <a:latin typeface="Arial" pitchFamily="34" charset="0"/>
-                <a:ea typeface="Arial" pitchFamily="34" charset="-122"/>
-                <a:cs typeface="Arial" pitchFamily="34" charset="-120"/>
-              </a:rPr>
-              <a:t>5</a:t>
-            </a:r>
-            <a:endParaRPr lang="he-IL" sz="1400" dirty="0"/>
-          </a:p>
-        </p:txBody>
-      </p:sp>
-      <p:sp>
-        <p:nvSpPr>
-          <p:cNvPr id="18" name="Text 16"/>
-          <p:cNvSpPr txBox="1"/>
-          <p:nvPr/>
-        </p:nvSpPr>
-        <p:spPr>
-          <a:xfrm>
-            <a:off x="3883065" y="3429000"/>
-            <a:ext cx="1365460" cy="1371600"/>
-          </a:xfrm>
-          <a:prstGeom prst="rect">
-            <a:avLst/>
-          </a:prstGeom>
-          <a:noFill/>
-          <a:ln/>
-        </p:spPr>
-        <p:txBody>
-          <a:bodyPr wrap="square" lIns="0" tIns="0" rIns="0" bIns="0" rtlCol="0" anchor="t"/>
-          <a:lstStyle/>
-          <a:p>
-            <a:pPr rtl="1" algn="ctr" indent="0" marL="0">
-              <a:buNone/>
-            </a:pPr>
-            <a:r>
-              <a:rPr lang="he-IL" altLang="en-US" sz="1500" b="1" dirty="0">
-                <a:solidFill>
-                  <a:srgbClr val="D9B78C"/>
-                </a:solidFill>
-                <a:latin typeface="Arial" pitchFamily="34" charset="0"/>
-                <a:ea typeface="Arial" pitchFamily="34" charset="-122"/>
-                <a:cs typeface="Arial" pitchFamily="34" charset="-120"/>
-              </a:rPr>
-              <a:t>הפציעה</a:t>
-            </a:r>
-            <a:endParaRPr lang="he-IL" sz="1500" dirty="0"/>
-          </a:p>
-        </p:txBody>
-      </p:sp>
-      <p:sp>
-        <p:nvSpPr>
-          <p:cNvPr id="19" name="Shape 17"/>
-          <p:cNvSpPr/>
-          <p:nvPr/>
-        </p:nvSpPr>
-        <p:spPr>
-          <a:xfrm>
-            <a:off x="2761423" y="2651760"/>
-            <a:ext cx="548640" cy="548640"/>
-          </a:xfrm>
-          <a:prstGeom prst="ellipse">
-            <a:avLst/>
-          </a:prstGeom>
-          <a:solidFill>
-            <a:srgbClr val="171C24"/>
-          </a:solidFill>
-          <a:ln w="19050">
-            <a:solidFill>
-              <a:srgbClr val="D9B78C"/>
-            </a:solidFill>
-            <a:prstDash val="solid"/>
-          </a:ln>
-        </p:spPr>
-      </p:sp>
-      <p:sp>
-        <p:nvSpPr>
-          <p:cNvPr id="20" name="Text 18"/>
-          <p:cNvSpPr txBox="1"/>
-          <p:nvPr/>
-        </p:nvSpPr>
-        <p:spPr>
-          <a:xfrm>
-            <a:off x="2761423" y="2651760"/>
-            <a:ext cx="548640" cy="548640"/>
-          </a:xfrm>
-          <a:prstGeom prst="rect">
-            <a:avLst/>
-          </a:prstGeom>
-          <a:noFill/>
-          <a:ln/>
-        </p:spPr>
-        <p:txBody>
-          <a:bodyPr wrap="square" lIns="0" tIns="0" rIns="0" bIns="0" rtlCol="0" anchor="ctr"/>
-          <a:lstStyle/>
-          <a:p>
-            <a:pPr rtl="1" algn="ctr" indent="0" marL="0">
-              <a:buNone/>
-            </a:pPr>
-            <a:r>
-              <a:rPr lang="he-IL" altLang="en-US" sz="1400" b="1" dirty="0">
-                <a:solidFill>
-                  <a:srgbClr val="D9B78C"/>
-                </a:solidFill>
-                <a:latin typeface="Arial" pitchFamily="34" charset="0"/>
-                <a:ea typeface="Arial" pitchFamily="34" charset="-122"/>
-                <a:cs typeface="Arial" pitchFamily="34" charset="-120"/>
-              </a:rPr>
-              <a:t>6</a:t>
-            </a:r>
-            <a:endParaRPr lang="he-IL" sz="1400" dirty="0"/>
-          </a:p>
-        </p:txBody>
-      </p:sp>
-      <p:sp>
-        <p:nvSpPr>
-          <p:cNvPr id="21" name="Text 19"/>
-          <p:cNvSpPr txBox="1"/>
-          <p:nvPr/>
-        </p:nvSpPr>
-        <p:spPr>
-          <a:xfrm>
-            <a:off x="2353012" y="3429000"/>
-            <a:ext cx="1365460" cy="1371600"/>
-          </a:xfrm>
-          <a:prstGeom prst="rect">
-            <a:avLst/>
-          </a:prstGeom>
-          <a:noFill/>
-          <a:ln/>
-        </p:spPr>
-        <p:txBody>
-          <a:bodyPr wrap="square" lIns="0" tIns="0" rIns="0" bIns="0" rtlCol="0" anchor="t"/>
-          <a:lstStyle/>
-          <a:p>
-            <a:pPr rtl="1" algn="ctr" indent="0" marL="0">
-              <a:buNone/>
-            </a:pPr>
-            <a:r>
-              <a:rPr lang="he-IL" altLang="en-US" sz="1500" dirty="0">
-                <a:solidFill>
-                  <a:srgbClr val="FFFFFF"/>
-                </a:solidFill>
-                <a:latin typeface="Arial" pitchFamily="34" charset="0"/>
-                <a:ea typeface="Arial" pitchFamily="34" charset="-122"/>
-                <a:cs typeface="Arial" pitchFamily="34" charset="-120"/>
-              </a:rPr>
-              <a:t>ההחלטה להמשיך</a:t>
-            </a:r>
-            <a:endParaRPr lang="he-IL" sz="1500" dirty="0"/>
-          </a:p>
-        </p:txBody>
-      </p:sp>
-      <p:sp>
-        <p:nvSpPr>
-          <p:cNvPr id="22" name="Shape 20"/>
-          <p:cNvSpPr/>
-          <p:nvPr/>
-        </p:nvSpPr>
-        <p:spPr>
-          <a:xfrm>
-            <a:off x="1231370" y="2651760"/>
-            <a:ext cx="548640" cy="548640"/>
-          </a:xfrm>
-          <a:prstGeom prst="ellipse">
-            <a:avLst/>
-          </a:prstGeom>
-          <a:solidFill>
-            <a:srgbClr val="171C24"/>
-          </a:solidFill>
-          <a:ln w="19050">
-            <a:solidFill>
-              <a:srgbClr val="D9B78C"/>
-            </a:solidFill>
-            <a:prstDash val="solid"/>
-          </a:ln>
-        </p:spPr>
-      </p:sp>
-      <p:sp>
-        <p:nvSpPr>
-          <p:cNvPr id="23" name="Text 21"/>
-          <p:cNvSpPr txBox="1"/>
-          <p:nvPr/>
-        </p:nvSpPr>
-        <p:spPr>
-          <a:xfrm>
-            <a:off x="1231370" y="2651760"/>
-            <a:ext cx="548640" cy="548640"/>
-          </a:xfrm>
-          <a:prstGeom prst="rect">
-            <a:avLst/>
-          </a:prstGeom>
-          <a:noFill/>
-          <a:ln/>
-        </p:spPr>
-        <p:txBody>
-          <a:bodyPr wrap="square" lIns="0" tIns="0" rIns="0" bIns="0" rtlCol="0" anchor="ctr"/>
-          <a:lstStyle/>
-          <a:p>
-            <a:pPr rtl="1" algn="ctr" indent="0" marL="0">
-              <a:buNone/>
-            </a:pPr>
-            <a:r>
-              <a:rPr lang="he-IL" altLang="en-US" sz="1400" b="1" dirty="0">
-                <a:solidFill>
-                  <a:srgbClr val="D9B78C"/>
-                </a:solidFill>
-                <a:latin typeface="Arial" pitchFamily="34" charset="0"/>
-                <a:ea typeface="Arial" pitchFamily="34" charset="-122"/>
-                <a:cs typeface="Arial" pitchFamily="34" charset="-120"/>
-              </a:rPr>
-              <a:t>7</a:t>
-            </a:r>
-            <a:endParaRPr lang="he-IL" sz="1400" dirty="0"/>
-          </a:p>
-        </p:txBody>
-      </p:sp>
-      <p:sp>
-        <p:nvSpPr>
-          <p:cNvPr id="24" name="Text 22"/>
-          <p:cNvSpPr txBox="1"/>
-          <p:nvPr/>
-        </p:nvSpPr>
-        <p:spPr>
-          <a:xfrm>
-            <a:off x="822960" y="3429000"/>
-            <a:ext cx="1365460" cy="1371600"/>
-          </a:xfrm>
-          <a:prstGeom prst="rect">
-            <a:avLst/>
-          </a:prstGeom>
-          <a:noFill/>
-          <a:ln/>
-        </p:spPr>
-        <p:txBody>
-          <a:bodyPr wrap="square" lIns="0" tIns="0" rIns="0" bIns="0" rtlCol="0" anchor="t"/>
-          <a:lstStyle/>
-          <a:p>
-            <a:pPr rtl="1" algn="ctr" indent="0" marL="0">
-              <a:buNone/>
-            </a:pPr>
-            <a:r>
-              <a:rPr lang="he-IL" altLang="en-US" sz="1500" dirty="0">
-                <a:solidFill>
-                  <a:srgbClr val="FFFFFF"/>
-                </a:solidFill>
-                <a:latin typeface="Arial" pitchFamily="34" charset="0"/>
-                <a:ea typeface="Arial" pitchFamily="34" charset="-122"/>
-                <a:cs typeface="Arial" pitchFamily="34" charset="-120"/>
-              </a:rPr>
-              <a:t>הפינוי</a:t>
-            </a:r>
-            <a:endParaRPr lang="he-IL" sz="1500" dirty="0"/>
-          </a:p>
-        </p:txBody>
-      </p:sp>
-      <p:sp>
-        <p:nvSpPr>
-          <p:cNvPr id="25" name="Text 23"/>
-          <p:cNvSpPr txBox="1"/>
-          <p:nvPr/>
-        </p:nvSpPr>
-        <p:spPr>
-          <a:xfrm>
-            <a:off x="822960" y="5120640"/>
-            <a:ext cx="10545775" cy="731520"/>
-          </a:xfrm>
-          <a:prstGeom prst="rect">
-            <a:avLst/>
-          </a:prstGeom>
-          <a:noFill/>
-          <a:ln/>
-        </p:spPr>
-        <p:txBody>
-          <a:bodyPr wrap="square" lIns="0" tIns="0" rIns="0" bIns="0" rtlCol="0" anchor="t"/>
-          <a:lstStyle/>
-          <a:p>
-            <a:pPr rtl="1" algn="ctr" indent="0" marL="0">
-              <a:buNone/>
-            </a:pPr>
-            <a:r>
-              <a:rPr lang="he-IL" altLang="en-US" sz="1600" dirty="0">
-                <a:solidFill>
-                  <a:srgbClr val="A7ADB8"/>
-                </a:solidFill>
-                <a:latin typeface="Arial" pitchFamily="34" charset="0"/>
-                <a:ea typeface="Arial" pitchFamily="34" charset="-122"/>
-                <a:cs typeface="Arial" pitchFamily="34" charset="-120"/>
-              </a:rPr>
-              <a:t>בכל שלב – משפט אחד על מה שעבר לי בראש. זה מה שהופך אירוע צבאי לסיפור אנושי.</a:t>
-            </a:r>
-            <a:endParaRPr lang="he-IL" sz="1600" dirty="0"/>
-          </a:p>
-        </p:txBody>
-      </p:sp>
-      <p:sp>
-        <p:nvSpPr>
-          <p:cNvPr id="26" name="Text 24"/>
           <p:cNvSpPr txBox="1"/>
           <p:nvPr/>
         </p:nvSpPr>
@@ -4539,81 +4397,813 @@
       </p:grpSpPr>
       <p:sp>
         <p:nvSpPr>
-          <p:cNvPr id="2" name="Shape 0"/>
+          <p:cNvPr id="2" name="Text 0"/>
+          <p:cNvSpPr txBox="1"/>
+          <p:nvPr/>
+        </p:nvSpPr>
+        <p:spPr>
+          <a:xfrm>
+            <a:off x="822960" y="548640"/>
+            <a:ext cx="10545775" cy="914400"/>
+          </a:xfrm>
+          <a:prstGeom prst="rect">
+            <a:avLst/>
+          </a:prstGeom>
+          <a:noFill/>
+          <a:ln/>
+        </p:spPr>
+        <p:txBody>
+          <a:bodyPr wrap="square" lIns="0" tIns="0" rIns="0" bIns="0" rtlCol="0" anchor="t"/>
+          <a:lstStyle/>
+          <a:p>
+            <a:pPr rtl="1" algn="r" indent="0" marL="0">
+              <a:buNone/>
+            </a:pPr>
+            <a:r>
+              <a:rPr lang="he-IL" altLang="en-US" sz="3600" b="1" dirty="0">
+                <a:solidFill>
+                  <a:srgbClr val="FFFFFF"/>
+                </a:solidFill>
+                <a:latin typeface="Arial" pitchFamily="34" charset="0"/>
+                <a:ea typeface="Arial" pitchFamily="34" charset="-122"/>
+                <a:cs typeface="Arial" pitchFamily="34" charset="-120"/>
+              </a:rPr>
+              <a:t>שבעה שלבים באותו יום</a:t>
+            </a:r>
+            <a:endParaRPr lang="he-IL" sz="3600" dirty="0"/>
+          </a:p>
+        </p:txBody>
+      </p:sp>
+      <p:sp>
+        <p:nvSpPr>
+          <p:cNvPr id="3" name="Shape 1"/>
           <p:cNvSpPr/>
           <p:nvPr/>
         </p:nvSpPr>
         <p:spPr>
           <a:xfrm>
-            <a:off x="822960" y="822960"/>
-            <a:ext cx="4754880" cy="5212080"/>
-          </a:xfrm>
-          <a:prstGeom prst="roundRect">
-            <a:avLst>
-              <a:gd name="adj" fmla="val 2885"/>
-            </a:avLst>
+            <a:off x="1505690" y="2926080"/>
+            <a:ext cx="9180315" cy="0"/>
+          </a:xfrm>
+          <a:prstGeom prst="line">
+            <a:avLst/>
+          </a:prstGeom>
+          <a:noFill/>
+          <a:ln w="25400">
+            <a:solidFill>
+              <a:srgbClr val="3A4150"/>
+            </a:solidFill>
+            <a:prstDash val="solid"/>
+          </a:ln>
+        </p:spPr>
+      </p:sp>
+      <p:sp>
+        <p:nvSpPr>
+          <p:cNvPr id="4" name="Shape 2"/>
+          <p:cNvSpPr/>
+          <p:nvPr/>
+        </p:nvSpPr>
+        <p:spPr>
+          <a:xfrm>
+            <a:off x="10411685" y="2651760"/>
+            <a:ext cx="548640" cy="548640"/>
+          </a:xfrm>
+          <a:prstGeom prst="ellipse">
+            <a:avLst/>
           </a:prstGeom>
           <a:solidFill>
             <a:srgbClr val="171C24"/>
           </a:solidFill>
-          <a:ln w="15875">
+          <a:ln w="19050">
             <a:solidFill>
-              <a:srgbClr val="3A4150"/>
+              <a:srgbClr val="D9B78C"/>
             </a:solidFill>
-            <a:prstDash val="dash"/>
+            <a:prstDash val="solid"/>
           </a:ln>
         </p:spPr>
       </p:sp>
-      <p:pic>
-        <p:nvPicPr>
-          <p:cNvPr id="3" name="Image 0" descr="preencoded.png">    </p:cNvPr>
-          <p:cNvPicPr>
-            <a:picLocks noChangeAspect="1"/>
-          </p:cNvPicPr>
-          <p:nvPr/>
-        </p:nvPicPr>
-        <p:blipFill>
-          <a:blip r:embed="rId1"/>
-          <a:stretch>
-            <a:fillRect/>
-          </a:stretch>
-        </p:blipFill>
-        <p:spPr>
-          <a:xfrm>
-            <a:off x="2926080" y="2834640"/>
+      <p:sp>
+        <p:nvSpPr>
+          <p:cNvPr id="5" name="Text 3"/>
+          <p:cNvSpPr txBox="1"/>
+          <p:nvPr/>
+        </p:nvSpPr>
+        <p:spPr>
+          <a:xfrm>
+            <a:off x="10411685" y="2651760"/>
             <a:ext cx="548640" cy="548640"/>
           </a:xfrm>
           <a:prstGeom prst="rect">
             <a:avLst/>
           </a:prstGeom>
-        </p:spPr>
-      </p:pic>
-      <p:sp>
-        <p:nvSpPr>
-          <p:cNvPr id="4" name="Text 1"/>
-          <p:cNvSpPr txBox="1"/>
-          <p:nvPr/>
-        </p:nvSpPr>
-        <p:spPr>
-          <a:xfrm>
-            <a:off x="1097280" y="3657600"/>
-            <a:ext cx="4206240" cy="640080"/>
-          </a:xfrm>
-          <a:prstGeom prst="rect">
-            <a:avLst/>
-          </a:prstGeom>
-          <a:noFill/>
-          <a:ln/>
-        </p:spPr>
-        <p:txBody>
-          <a:bodyPr wrap="square" lIns="0" tIns="0" rIns="0" bIns="0" rtlCol="0" anchor="t"/>
+          <a:noFill/>
+          <a:ln/>
+        </p:spPr>
+        <p:txBody>
+          <a:bodyPr wrap="square" lIns="0" tIns="0" rIns="0" bIns="0" rtlCol="0" anchor="ctr"/>
           <a:lstStyle/>
           <a:p>
             <a:pPr rtl="1" algn="ctr" indent="0" marL="0">
               <a:buNone/>
             </a:pPr>
             <a:r>
-              <a:rPr lang="he-IL" altLang="en-US" sz="1200" dirty="0">
+              <a:rPr lang="he-IL" altLang="en-US" sz="1400" b="1" dirty="0">
+                <a:solidFill>
+                  <a:srgbClr val="D9B78C"/>
+                </a:solidFill>
+                <a:latin typeface="Arial" pitchFamily="34" charset="0"/>
+                <a:ea typeface="Arial" pitchFamily="34" charset="-122"/>
+                <a:cs typeface="Arial" pitchFamily="34" charset="-120"/>
+              </a:rPr>
+              <a:t>1</a:t>
+            </a:r>
+            <a:endParaRPr lang="he-IL" sz="1400" dirty="0"/>
+          </a:p>
+        </p:txBody>
+      </p:sp>
+      <p:sp>
+        <p:nvSpPr>
+          <p:cNvPr id="6" name="Text 4"/>
+          <p:cNvSpPr txBox="1"/>
+          <p:nvPr/>
+        </p:nvSpPr>
+        <p:spPr>
+          <a:xfrm>
+            <a:off x="10003275" y="3429000"/>
+            <a:ext cx="1365460" cy="1371600"/>
+          </a:xfrm>
+          <a:prstGeom prst="rect">
+            <a:avLst/>
+          </a:prstGeom>
+          <a:noFill/>
+          <a:ln/>
+        </p:spPr>
+        <p:txBody>
+          <a:bodyPr wrap="square" lIns="0" tIns="0" rIns="0" bIns="0" rtlCol="0" anchor="t"/>
+          <a:lstStyle/>
+          <a:p>
+            <a:pPr rtl="1" algn="ctr" indent="0" marL="0">
+              <a:buNone/>
+            </a:pPr>
+            <a:r>
+              <a:rPr lang="he-IL" altLang="en-US" sz="1500" dirty="0">
+                <a:solidFill>
+                  <a:srgbClr val="FFFFFF"/>
+                </a:solidFill>
+                <a:latin typeface="Arial" pitchFamily="34" charset="0"/>
+                <a:ea typeface="Arial" pitchFamily="34" charset="-122"/>
+                <a:cs typeface="Arial" pitchFamily="34" charset="-120"/>
+              </a:rPr>
+              <a:t>לפני</a:t>
+            </a:r>
+            <a:endParaRPr lang="he-IL" sz="1500" dirty="0"/>
+          </a:p>
+        </p:txBody>
+      </p:sp>
+      <p:sp>
+        <p:nvSpPr>
+          <p:cNvPr id="7" name="Shape 5"/>
+          <p:cNvSpPr/>
+          <p:nvPr/>
+        </p:nvSpPr>
+        <p:spPr>
+          <a:xfrm>
+            <a:off x="8881633" y="2651760"/>
+            <a:ext cx="548640" cy="548640"/>
+          </a:xfrm>
+          <a:prstGeom prst="ellipse">
+            <a:avLst/>
+          </a:prstGeom>
+          <a:solidFill>
+            <a:srgbClr val="171C24"/>
+          </a:solidFill>
+          <a:ln w="19050">
+            <a:solidFill>
+              <a:srgbClr val="D9B78C"/>
+            </a:solidFill>
+            <a:prstDash val="solid"/>
+          </a:ln>
+        </p:spPr>
+      </p:sp>
+      <p:sp>
+        <p:nvSpPr>
+          <p:cNvPr id="8" name="Text 6"/>
+          <p:cNvSpPr txBox="1"/>
+          <p:nvPr/>
+        </p:nvSpPr>
+        <p:spPr>
+          <a:xfrm>
+            <a:off x="8881633" y="2651760"/>
+            <a:ext cx="548640" cy="548640"/>
+          </a:xfrm>
+          <a:prstGeom prst="rect">
+            <a:avLst/>
+          </a:prstGeom>
+          <a:noFill/>
+          <a:ln/>
+        </p:spPr>
+        <p:txBody>
+          <a:bodyPr wrap="square" lIns="0" tIns="0" rIns="0" bIns="0" rtlCol="0" anchor="ctr"/>
+          <a:lstStyle/>
+          <a:p>
+            <a:pPr rtl="1" algn="ctr" indent="0" marL="0">
+              <a:buNone/>
+            </a:pPr>
+            <a:r>
+              <a:rPr lang="he-IL" altLang="en-US" sz="1400" b="1" dirty="0">
+                <a:solidFill>
+                  <a:srgbClr val="D9B78C"/>
+                </a:solidFill>
+                <a:latin typeface="Arial" pitchFamily="34" charset="0"/>
+                <a:ea typeface="Arial" pitchFamily="34" charset="-122"/>
+                <a:cs typeface="Arial" pitchFamily="34" charset="-120"/>
+              </a:rPr>
+              <a:t>2</a:t>
+            </a:r>
+            <a:endParaRPr lang="he-IL" sz="1400" dirty="0"/>
+          </a:p>
+        </p:txBody>
+      </p:sp>
+      <p:sp>
+        <p:nvSpPr>
+          <p:cNvPr id="9" name="Text 7"/>
+          <p:cNvSpPr txBox="1"/>
+          <p:nvPr/>
+        </p:nvSpPr>
+        <p:spPr>
+          <a:xfrm>
+            <a:off x="8473222" y="3429000"/>
+            <a:ext cx="1365460" cy="1371600"/>
+          </a:xfrm>
+          <a:prstGeom prst="rect">
+            <a:avLst/>
+          </a:prstGeom>
+          <a:noFill/>
+          <a:ln/>
+        </p:spPr>
+        <p:txBody>
+          <a:bodyPr wrap="square" lIns="0" tIns="0" rIns="0" bIns="0" rtlCol="0" anchor="t"/>
+          <a:lstStyle/>
+          <a:p>
+            <a:pPr rtl="1" algn="ctr" indent="0" marL="0">
+              <a:buNone/>
+            </a:pPr>
+            <a:r>
+              <a:rPr lang="he-IL" altLang="en-US" sz="1500" dirty="0">
+                <a:solidFill>
+                  <a:srgbClr val="FFFFFF"/>
+                </a:solidFill>
+                <a:latin typeface="Arial" pitchFamily="34" charset="0"/>
+                <a:ea typeface="Arial" pitchFamily="34" charset="-122"/>
+                <a:cs typeface="Arial" pitchFamily="34" charset="-120"/>
+              </a:rPr>
+              <a:t>ההבנה שמשהו לא רגיל קורה</a:t>
+            </a:r>
+            <a:endParaRPr lang="he-IL" sz="1500" dirty="0"/>
+          </a:p>
+        </p:txBody>
+      </p:sp>
+      <p:sp>
+        <p:nvSpPr>
+          <p:cNvPr id="10" name="Shape 8"/>
+          <p:cNvSpPr/>
+          <p:nvPr/>
+        </p:nvSpPr>
+        <p:spPr>
+          <a:xfrm>
+            <a:off x="7351580" y="2651760"/>
+            <a:ext cx="548640" cy="548640"/>
+          </a:xfrm>
+          <a:prstGeom prst="ellipse">
+            <a:avLst/>
+          </a:prstGeom>
+          <a:solidFill>
+            <a:srgbClr val="171C24"/>
+          </a:solidFill>
+          <a:ln w="19050">
+            <a:solidFill>
+              <a:srgbClr val="D9B78C"/>
+            </a:solidFill>
+            <a:prstDash val="solid"/>
+          </a:ln>
+        </p:spPr>
+      </p:sp>
+      <p:sp>
+        <p:nvSpPr>
+          <p:cNvPr id="11" name="Text 9"/>
+          <p:cNvSpPr txBox="1"/>
+          <p:nvPr/>
+        </p:nvSpPr>
+        <p:spPr>
+          <a:xfrm>
+            <a:off x="7351580" y="2651760"/>
+            <a:ext cx="548640" cy="548640"/>
+          </a:xfrm>
+          <a:prstGeom prst="rect">
+            <a:avLst/>
+          </a:prstGeom>
+          <a:noFill/>
+          <a:ln/>
+        </p:spPr>
+        <p:txBody>
+          <a:bodyPr wrap="square" lIns="0" tIns="0" rIns="0" bIns="0" rtlCol="0" anchor="ctr"/>
+          <a:lstStyle/>
+          <a:p>
+            <a:pPr rtl="1" algn="ctr" indent="0" marL="0">
+              <a:buNone/>
+            </a:pPr>
+            <a:r>
+              <a:rPr lang="he-IL" altLang="en-US" sz="1400" b="1" dirty="0">
+                <a:solidFill>
+                  <a:srgbClr val="D9B78C"/>
+                </a:solidFill>
+                <a:latin typeface="Arial" pitchFamily="34" charset="0"/>
+                <a:ea typeface="Arial" pitchFamily="34" charset="-122"/>
+                <a:cs typeface="Arial" pitchFamily="34" charset="-120"/>
+              </a:rPr>
+              <a:t>3</a:t>
+            </a:r>
+            <a:endParaRPr lang="he-IL" sz="1400" dirty="0"/>
+          </a:p>
+        </p:txBody>
+      </p:sp>
+      <p:sp>
+        <p:nvSpPr>
+          <p:cNvPr id="12" name="Text 10"/>
+          <p:cNvSpPr txBox="1"/>
+          <p:nvPr/>
+        </p:nvSpPr>
+        <p:spPr>
+          <a:xfrm>
+            <a:off x="6943170" y="3429000"/>
+            <a:ext cx="1365460" cy="1371600"/>
+          </a:xfrm>
+          <a:prstGeom prst="rect">
+            <a:avLst/>
+          </a:prstGeom>
+          <a:noFill/>
+          <a:ln/>
+        </p:spPr>
+        <p:txBody>
+          <a:bodyPr wrap="square" lIns="0" tIns="0" rIns="0" bIns="0" rtlCol="0" anchor="t"/>
+          <a:lstStyle/>
+          <a:p>
+            <a:pPr rtl="1" algn="ctr" indent="0" marL="0">
+              <a:buNone/>
+            </a:pPr>
+            <a:r>
+              <a:rPr lang="he-IL" altLang="en-US" sz="1500" dirty="0">
+                <a:solidFill>
+                  <a:srgbClr val="FFFFFF"/>
+                </a:solidFill>
+                <a:latin typeface="Arial" pitchFamily="34" charset="0"/>
+                <a:ea typeface="Arial" pitchFamily="34" charset="-122"/>
+                <a:cs typeface="Arial" pitchFamily="34" charset="-120"/>
+              </a:rPr>
+              <a:t>הכניסה ללחימה</a:t>
+            </a:r>
+            <a:endParaRPr lang="he-IL" sz="1500" dirty="0"/>
+          </a:p>
+        </p:txBody>
+      </p:sp>
+      <p:sp>
+        <p:nvSpPr>
+          <p:cNvPr id="13" name="Shape 11"/>
+          <p:cNvSpPr/>
+          <p:nvPr/>
+        </p:nvSpPr>
+        <p:spPr>
+          <a:xfrm>
+            <a:off x="5821528" y="2651760"/>
+            <a:ext cx="548640" cy="548640"/>
+          </a:xfrm>
+          <a:prstGeom prst="ellipse">
+            <a:avLst/>
+          </a:prstGeom>
+          <a:solidFill>
+            <a:srgbClr val="D9B78C"/>
+          </a:solidFill>
+          <a:ln w="19050">
+            <a:solidFill>
+              <a:srgbClr val="D9B78C"/>
+            </a:solidFill>
+            <a:prstDash val="solid"/>
+          </a:ln>
+        </p:spPr>
+      </p:sp>
+      <p:sp>
+        <p:nvSpPr>
+          <p:cNvPr id="14" name="Text 12"/>
+          <p:cNvSpPr txBox="1"/>
+          <p:nvPr/>
+        </p:nvSpPr>
+        <p:spPr>
+          <a:xfrm>
+            <a:off x="5821528" y="2651760"/>
+            <a:ext cx="548640" cy="548640"/>
+          </a:xfrm>
+          <a:prstGeom prst="rect">
+            <a:avLst/>
+          </a:prstGeom>
+          <a:noFill/>
+          <a:ln/>
+        </p:spPr>
+        <p:txBody>
+          <a:bodyPr wrap="square" lIns="0" tIns="0" rIns="0" bIns="0" rtlCol="0" anchor="ctr"/>
+          <a:lstStyle/>
+          <a:p>
+            <a:pPr rtl="1" algn="ctr" indent="0" marL="0">
+              <a:buNone/>
+            </a:pPr>
+            <a:r>
+              <a:rPr lang="he-IL" altLang="en-US" sz="1400" b="1" dirty="0">
+                <a:solidFill>
+                  <a:srgbClr val="0E1116"/>
+                </a:solidFill>
+                <a:latin typeface="Arial" pitchFamily="34" charset="0"/>
+                <a:ea typeface="Arial" pitchFamily="34" charset="-122"/>
+                <a:cs typeface="Arial" pitchFamily="34" charset="-120"/>
+              </a:rPr>
+              <a:t>4</a:t>
+            </a:r>
+            <a:endParaRPr lang="he-IL" sz="1400" dirty="0"/>
+          </a:p>
+        </p:txBody>
+      </p:sp>
+      <p:sp>
+        <p:nvSpPr>
+          <p:cNvPr id="15" name="Text 13"/>
+          <p:cNvSpPr txBox="1"/>
+          <p:nvPr/>
+        </p:nvSpPr>
+        <p:spPr>
+          <a:xfrm>
+            <a:off x="5413117" y="3429000"/>
+            <a:ext cx="1365460" cy="1371600"/>
+          </a:xfrm>
+          <a:prstGeom prst="rect">
+            <a:avLst/>
+          </a:prstGeom>
+          <a:noFill/>
+          <a:ln/>
+        </p:spPr>
+        <p:txBody>
+          <a:bodyPr wrap="square" lIns="0" tIns="0" rIns="0" bIns="0" rtlCol="0" anchor="t"/>
+          <a:lstStyle/>
+          <a:p>
+            <a:pPr rtl="1" algn="ctr" indent="0" marL="0">
+              <a:buNone/>
+            </a:pPr>
+            <a:r>
+              <a:rPr lang="he-IL" altLang="en-US" sz="1500" b="1" dirty="0">
+                <a:solidFill>
+                  <a:srgbClr val="D9B78C"/>
+                </a:solidFill>
+                <a:latin typeface="Arial" pitchFamily="34" charset="0"/>
+                <a:ea typeface="Arial" pitchFamily="34" charset="-122"/>
+                <a:cs typeface="Arial" pitchFamily="34" charset="-120"/>
+              </a:rPr>
+              <a:t>המארב</a:t>
+            </a:r>
+            <a:endParaRPr lang="he-IL" sz="1500" dirty="0"/>
+          </a:p>
+        </p:txBody>
+      </p:sp>
+      <p:sp>
+        <p:nvSpPr>
+          <p:cNvPr id="16" name="Shape 14"/>
+          <p:cNvSpPr/>
+          <p:nvPr/>
+        </p:nvSpPr>
+        <p:spPr>
+          <a:xfrm>
+            <a:off x="4291475" y="2651760"/>
+            <a:ext cx="548640" cy="548640"/>
+          </a:xfrm>
+          <a:prstGeom prst="ellipse">
+            <a:avLst/>
+          </a:prstGeom>
+          <a:solidFill>
+            <a:srgbClr val="D9B78C"/>
+          </a:solidFill>
+          <a:ln w="19050">
+            <a:solidFill>
+              <a:srgbClr val="D9B78C"/>
+            </a:solidFill>
+            <a:prstDash val="solid"/>
+          </a:ln>
+        </p:spPr>
+      </p:sp>
+      <p:sp>
+        <p:nvSpPr>
+          <p:cNvPr id="17" name="Text 15"/>
+          <p:cNvSpPr txBox="1"/>
+          <p:nvPr/>
+        </p:nvSpPr>
+        <p:spPr>
+          <a:xfrm>
+            <a:off x="4291475" y="2651760"/>
+            <a:ext cx="548640" cy="548640"/>
+          </a:xfrm>
+          <a:prstGeom prst="rect">
+            <a:avLst/>
+          </a:prstGeom>
+          <a:noFill/>
+          <a:ln/>
+        </p:spPr>
+        <p:txBody>
+          <a:bodyPr wrap="square" lIns="0" tIns="0" rIns="0" bIns="0" rtlCol="0" anchor="ctr"/>
+          <a:lstStyle/>
+          <a:p>
+            <a:pPr rtl="1" algn="ctr" indent="0" marL="0">
+              <a:buNone/>
+            </a:pPr>
+            <a:r>
+              <a:rPr lang="he-IL" altLang="en-US" sz="1400" b="1" dirty="0">
+                <a:solidFill>
+                  <a:srgbClr val="0E1116"/>
+                </a:solidFill>
+                <a:latin typeface="Arial" pitchFamily="34" charset="0"/>
+                <a:ea typeface="Arial" pitchFamily="34" charset="-122"/>
+                <a:cs typeface="Arial" pitchFamily="34" charset="-120"/>
+              </a:rPr>
+              <a:t>5</a:t>
+            </a:r>
+            <a:endParaRPr lang="he-IL" sz="1400" dirty="0"/>
+          </a:p>
+        </p:txBody>
+      </p:sp>
+      <p:sp>
+        <p:nvSpPr>
+          <p:cNvPr id="18" name="Text 16"/>
+          <p:cNvSpPr txBox="1"/>
+          <p:nvPr/>
+        </p:nvSpPr>
+        <p:spPr>
+          <a:xfrm>
+            <a:off x="3883065" y="3429000"/>
+            <a:ext cx="1365460" cy="1371600"/>
+          </a:xfrm>
+          <a:prstGeom prst="rect">
+            <a:avLst/>
+          </a:prstGeom>
+          <a:noFill/>
+          <a:ln/>
+        </p:spPr>
+        <p:txBody>
+          <a:bodyPr wrap="square" lIns="0" tIns="0" rIns="0" bIns="0" rtlCol="0" anchor="t"/>
+          <a:lstStyle/>
+          <a:p>
+            <a:pPr rtl="1" algn="ctr" indent="0" marL="0">
+              <a:buNone/>
+            </a:pPr>
+            <a:r>
+              <a:rPr lang="he-IL" altLang="en-US" sz="1500" b="1" dirty="0">
+                <a:solidFill>
+                  <a:srgbClr val="D9B78C"/>
+                </a:solidFill>
+                <a:latin typeface="Arial" pitchFamily="34" charset="0"/>
+                <a:ea typeface="Arial" pitchFamily="34" charset="-122"/>
+                <a:cs typeface="Arial" pitchFamily="34" charset="-120"/>
+              </a:rPr>
+              <a:t>הפציעה</a:t>
+            </a:r>
+            <a:endParaRPr lang="he-IL" sz="1500" dirty="0"/>
+          </a:p>
+        </p:txBody>
+      </p:sp>
+      <p:sp>
+        <p:nvSpPr>
+          <p:cNvPr id="19" name="Shape 17"/>
+          <p:cNvSpPr/>
+          <p:nvPr/>
+        </p:nvSpPr>
+        <p:spPr>
+          <a:xfrm>
+            <a:off x="2761423" y="2651760"/>
+            <a:ext cx="548640" cy="548640"/>
+          </a:xfrm>
+          <a:prstGeom prst="ellipse">
+            <a:avLst/>
+          </a:prstGeom>
+          <a:solidFill>
+            <a:srgbClr val="171C24"/>
+          </a:solidFill>
+          <a:ln w="19050">
+            <a:solidFill>
+              <a:srgbClr val="D9B78C"/>
+            </a:solidFill>
+            <a:prstDash val="solid"/>
+          </a:ln>
+        </p:spPr>
+      </p:sp>
+      <p:sp>
+        <p:nvSpPr>
+          <p:cNvPr id="20" name="Text 18"/>
+          <p:cNvSpPr txBox="1"/>
+          <p:nvPr/>
+        </p:nvSpPr>
+        <p:spPr>
+          <a:xfrm>
+            <a:off x="2761423" y="2651760"/>
+            <a:ext cx="548640" cy="548640"/>
+          </a:xfrm>
+          <a:prstGeom prst="rect">
+            <a:avLst/>
+          </a:prstGeom>
+          <a:noFill/>
+          <a:ln/>
+        </p:spPr>
+        <p:txBody>
+          <a:bodyPr wrap="square" lIns="0" tIns="0" rIns="0" bIns="0" rtlCol="0" anchor="ctr"/>
+          <a:lstStyle/>
+          <a:p>
+            <a:pPr rtl="1" algn="ctr" indent="0" marL="0">
+              <a:buNone/>
+            </a:pPr>
+            <a:r>
+              <a:rPr lang="he-IL" altLang="en-US" sz="1400" b="1" dirty="0">
+                <a:solidFill>
+                  <a:srgbClr val="D9B78C"/>
+                </a:solidFill>
+                <a:latin typeface="Arial" pitchFamily="34" charset="0"/>
+                <a:ea typeface="Arial" pitchFamily="34" charset="-122"/>
+                <a:cs typeface="Arial" pitchFamily="34" charset="-120"/>
+              </a:rPr>
+              <a:t>6</a:t>
+            </a:r>
+            <a:endParaRPr lang="he-IL" sz="1400" dirty="0"/>
+          </a:p>
+        </p:txBody>
+      </p:sp>
+      <p:sp>
+        <p:nvSpPr>
+          <p:cNvPr id="21" name="Text 19"/>
+          <p:cNvSpPr txBox="1"/>
+          <p:nvPr/>
+        </p:nvSpPr>
+        <p:spPr>
+          <a:xfrm>
+            <a:off x="2353012" y="3429000"/>
+            <a:ext cx="1365460" cy="1371600"/>
+          </a:xfrm>
+          <a:prstGeom prst="rect">
+            <a:avLst/>
+          </a:prstGeom>
+          <a:noFill/>
+          <a:ln/>
+        </p:spPr>
+        <p:txBody>
+          <a:bodyPr wrap="square" lIns="0" tIns="0" rIns="0" bIns="0" rtlCol="0" anchor="t"/>
+          <a:lstStyle/>
+          <a:p>
+            <a:pPr rtl="1" algn="ctr" indent="0" marL="0">
+              <a:buNone/>
+            </a:pPr>
+            <a:r>
+              <a:rPr lang="he-IL" altLang="en-US" sz="1500" dirty="0">
+                <a:solidFill>
+                  <a:srgbClr val="FFFFFF"/>
+                </a:solidFill>
+                <a:latin typeface="Arial" pitchFamily="34" charset="0"/>
+                <a:ea typeface="Arial" pitchFamily="34" charset="-122"/>
+                <a:cs typeface="Arial" pitchFamily="34" charset="-120"/>
+              </a:rPr>
+              <a:t>ההחלטה להמשיך</a:t>
+            </a:r>
+            <a:endParaRPr lang="he-IL" sz="1500" dirty="0"/>
+          </a:p>
+        </p:txBody>
+      </p:sp>
+      <p:sp>
+        <p:nvSpPr>
+          <p:cNvPr id="22" name="Shape 20"/>
+          <p:cNvSpPr/>
+          <p:nvPr/>
+        </p:nvSpPr>
+        <p:spPr>
+          <a:xfrm>
+            <a:off x="1231370" y="2651760"/>
+            <a:ext cx="548640" cy="548640"/>
+          </a:xfrm>
+          <a:prstGeom prst="ellipse">
+            <a:avLst/>
+          </a:prstGeom>
+          <a:solidFill>
+            <a:srgbClr val="171C24"/>
+          </a:solidFill>
+          <a:ln w="19050">
+            <a:solidFill>
+              <a:srgbClr val="D9B78C"/>
+            </a:solidFill>
+            <a:prstDash val="solid"/>
+          </a:ln>
+        </p:spPr>
+      </p:sp>
+      <p:sp>
+        <p:nvSpPr>
+          <p:cNvPr id="23" name="Text 21"/>
+          <p:cNvSpPr txBox="1"/>
+          <p:nvPr/>
+        </p:nvSpPr>
+        <p:spPr>
+          <a:xfrm>
+            <a:off x="1231370" y="2651760"/>
+            <a:ext cx="548640" cy="548640"/>
+          </a:xfrm>
+          <a:prstGeom prst="rect">
+            <a:avLst/>
+          </a:prstGeom>
+          <a:noFill/>
+          <a:ln/>
+        </p:spPr>
+        <p:txBody>
+          <a:bodyPr wrap="square" lIns="0" tIns="0" rIns="0" bIns="0" rtlCol="0" anchor="ctr"/>
+          <a:lstStyle/>
+          <a:p>
+            <a:pPr rtl="1" algn="ctr" indent="0" marL="0">
+              <a:buNone/>
+            </a:pPr>
+            <a:r>
+              <a:rPr lang="he-IL" altLang="en-US" sz="1400" b="1" dirty="0">
+                <a:solidFill>
+                  <a:srgbClr val="D9B78C"/>
+                </a:solidFill>
+                <a:latin typeface="Arial" pitchFamily="34" charset="0"/>
+                <a:ea typeface="Arial" pitchFamily="34" charset="-122"/>
+                <a:cs typeface="Arial" pitchFamily="34" charset="-120"/>
+              </a:rPr>
+              <a:t>7</a:t>
+            </a:r>
+            <a:endParaRPr lang="he-IL" sz="1400" dirty="0"/>
+          </a:p>
+        </p:txBody>
+      </p:sp>
+      <p:sp>
+        <p:nvSpPr>
+          <p:cNvPr id="24" name="Text 22"/>
+          <p:cNvSpPr txBox="1"/>
+          <p:nvPr/>
+        </p:nvSpPr>
+        <p:spPr>
+          <a:xfrm>
+            <a:off x="822960" y="3429000"/>
+            <a:ext cx="1365460" cy="1371600"/>
+          </a:xfrm>
+          <a:prstGeom prst="rect">
+            <a:avLst/>
+          </a:prstGeom>
+          <a:noFill/>
+          <a:ln/>
+        </p:spPr>
+        <p:txBody>
+          <a:bodyPr wrap="square" lIns="0" tIns="0" rIns="0" bIns="0" rtlCol="0" anchor="t"/>
+          <a:lstStyle/>
+          <a:p>
+            <a:pPr rtl="1" algn="ctr" indent="0" marL="0">
+              <a:buNone/>
+            </a:pPr>
+            <a:r>
+              <a:rPr lang="he-IL" altLang="en-US" sz="1500" dirty="0">
+                <a:solidFill>
+                  <a:srgbClr val="FFFFFF"/>
+                </a:solidFill>
+                <a:latin typeface="Arial" pitchFamily="34" charset="0"/>
+                <a:ea typeface="Arial" pitchFamily="34" charset="-122"/>
+                <a:cs typeface="Arial" pitchFamily="34" charset="-120"/>
+              </a:rPr>
+              <a:t>הפינוי</a:t>
+            </a:r>
+            <a:endParaRPr lang="he-IL" sz="1500" dirty="0"/>
+          </a:p>
+        </p:txBody>
+      </p:sp>
+      <p:sp>
+        <p:nvSpPr>
+          <p:cNvPr id="25" name="Text 23"/>
+          <p:cNvSpPr txBox="1"/>
+          <p:nvPr/>
+        </p:nvSpPr>
+        <p:spPr>
+          <a:xfrm>
+            <a:off x="822960" y="5120640"/>
+            <a:ext cx="10545775" cy="731520"/>
+          </a:xfrm>
+          <a:prstGeom prst="rect">
+            <a:avLst/>
+          </a:prstGeom>
+          <a:noFill/>
+          <a:ln/>
+        </p:spPr>
+        <p:txBody>
+          <a:bodyPr wrap="square" lIns="0" tIns="0" rIns="0" bIns="0" rtlCol="0" anchor="t"/>
+          <a:lstStyle/>
+          <a:p>
+            <a:pPr rtl="1" algn="ctr" indent="0" marL="0">
+              <a:buNone/>
+            </a:pPr>
+            <a:r>
+              <a:rPr lang="he-IL" altLang="en-US" sz="1600" dirty="0">
                 <a:solidFill>
                   <a:srgbClr val="A7ADB8"/>
                 </a:solidFill>
@@ -4621,156 +5211,15 @@
                 <a:ea typeface="Arial" pitchFamily="34" charset="-122"/>
                 <a:cs typeface="Arial" pitchFamily="34" charset="-120"/>
               </a:rPr>
-              <a:t>תמונה: מהיום עצמו / מהגזרה (אם יש) – או תמונה של הצוות לפני</a:t>
-            </a:r>
-            <a:endParaRPr lang="he-IL" sz="1200" dirty="0"/>
-          </a:p>
-        </p:txBody>
-      </p:sp>
-      <p:pic>
-        <p:nvPicPr>
-          <p:cNvPr id="5" name="Image 1" descr="preencoded.png">    </p:cNvPr>
-          <p:cNvPicPr>
-            <a:picLocks noChangeAspect="1"/>
-          </p:cNvPicPr>
-          <p:nvPr/>
-        </p:nvPicPr>
-        <p:blipFill>
-          <a:blip r:embed="rId2"/>
-          <a:stretch>
-            <a:fillRect/>
-          </a:stretch>
-        </p:blipFill>
-        <p:spPr>
-          <a:xfrm>
-            <a:off x="10545775" y="1188720"/>
-            <a:ext cx="731520" cy="731520"/>
-          </a:xfrm>
-          <a:prstGeom prst="rect">
-            <a:avLst/>
-          </a:prstGeom>
-        </p:spPr>
-      </p:pic>
-      <p:sp>
-        <p:nvSpPr>
-          <p:cNvPr id="6" name="Text 2"/>
-          <p:cNvSpPr txBox="1"/>
-          <p:nvPr/>
-        </p:nvSpPr>
-        <p:spPr>
-          <a:xfrm>
-            <a:off x="6035040" y="2194560"/>
-            <a:ext cx="5333695" cy="1097280"/>
-          </a:xfrm>
-          <a:prstGeom prst="rect">
-            <a:avLst/>
-          </a:prstGeom>
-          <a:noFill/>
-          <a:ln/>
-        </p:spPr>
-        <p:txBody>
-          <a:bodyPr wrap="square" lIns="0" tIns="0" rIns="0" bIns="0" rtlCol="0" anchor="t"/>
-          <a:lstStyle/>
-          <a:p>
-            <a:pPr rtl="1" algn="r" indent="0" marL="0">
-              <a:buNone/>
-            </a:pPr>
-            <a:r>
-              <a:rPr lang="he-IL" altLang="en-US" sz="3200" b="1" dirty="0">
-                <a:solidFill>
-                  <a:srgbClr val="FFFFFF"/>
-                </a:solidFill>
-                <a:latin typeface="Arial" pitchFamily="34" charset="0"/>
-                <a:ea typeface="Arial" pitchFamily="34" charset="-122"/>
-                <a:cs typeface="Arial" pitchFamily="34" charset="-120"/>
-              </a:rPr>
-              <a:t>״באותו רגע עוד לא הבנתי שאני פצוע.</a:t>
-            </a:r>
-            <a:endParaRPr lang="he-IL" sz="3200" dirty="0"/>
-          </a:p>
-        </p:txBody>
-      </p:sp>
-      <p:sp>
-        <p:nvSpPr>
-          <p:cNvPr id="7" name="Text 3"/>
-          <p:cNvSpPr txBox="1"/>
-          <p:nvPr/>
-        </p:nvSpPr>
-        <p:spPr>
-          <a:xfrm>
-            <a:off x="6035040" y="3383280"/>
-            <a:ext cx="5333695" cy="914400"/>
-          </a:xfrm>
-          <a:prstGeom prst="rect">
-            <a:avLst/>
-          </a:prstGeom>
-          <a:noFill/>
-          <a:ln/>
-        </p:spPr>
-        <p:txBody>
-          <a:bodyPr wrap="square" lIns="0" tIns="0" rIns="0" bIns="0" rtlCol="0" anchor="t"/>
-          <a:lstStyle/>
-          <a:p>
-            <a:pPr rtl="1" algn="r" indent="0" marL="0">
-              <a:buNone/>
-            </a:pPr>
-            <a:r>
-              <a:rPr lang="he-IL" altLang="en-US" sz="3200" b="1" dirty="0">
-                <a:solidFill>
-                  <a:srgbClr val="D9B78C"/>
-                </a:solidFill>
-                <a:latin typeface="Arial" pitchFamily="34" charset="0"/>
-                <a:ea typeface="Arial" pitchFamily="34" charset="-122"/>
-                <a:cs typeface="Arial" pitchFamily="34" charset="-120"/>
-              </a:rPr>
-              <a:t>הדבר היחיד שעבר לי בראש היה…״</a:t>
-            </a:r>
-            <a:endParaRPr lang="he-IL" sz="3200" dirty="0"/>
-          </a:p>
-        </p:txBody>
-      </p:sp>
-      <p:sp>
-        <p:nvSpPr>
-          <p:cNvPr id="8" name="Text 4"/>
-          <p:cNvSpPr txBox="1"/>
-          <p:nvPr/>
-        </p:nvSpPr>
-        <p:spPr>
-          <a:xfrm>
-            <a:off x="6035040" y="4572000"/>
-            <a:ext cx="5333695" cy="548640"/>
-          </a:xfrm>
-          <a:prstGeom prst="rect">
-            <a:avLst/>
-          </a:prstGeom>
-          <a:noFill/>
-          <a:ln/>
-        </p:spPr>
-        <p:txBody>
-          <a:bodyPr wrap="square" lIns="0" tIns="0" rIns="0" bIns="0" rtlCol="0" anchor="t"/>
-          <a:lstStyle/>
-          <a:p>
-            <a:pPr rtl="1" algn="r" indent="0" marL="0">
-              <a:buNone/>
-            </a:pPr>
-            <a:r>
-              <a:rPr lang="he-IL" altLang="en-US" sz="1400" i="1" dirty="0">
-                <a:solidFill>
-                  <a:srgbClr val="A7ADB8"/>
-                </a:solidFill>
-                <a:latin typeface="Arial" pitchFamily="34" charset="0"/>
-                <a:ea typeface="Arial" pitchFamily="34" charset="-122"/>
-                <a:cs typeface="Arial" pitchFamily="34" charset="-120"/>
-              </a:rPr>
-              <a:t>(כאן משלימים בעל פה – לא כותבים על השקף)</a:t>
-            </a:r>
-            <a:endParaRPr lang="he-IL" sz="1400" dirty="0"/>
-          </a:p>
-        </p:txBody>
-      </p:sp>
-      <p:sp>
-        <p:nvSpPr>
-          <p:cNvPr id="9" name="Text 5"/>
+              <a:t>בכל שלב – משפט אחד על מה שעבר לי בראש. זה מה שהופך אירוע צבאי לסיפור אנושי.</a:t>
+            </a:r>
+            <a:endParaRPr lang="he-IL" sz="1600" dirty="0"/>
+          </a:p>
+        </p:txBody>
+      </p:sp>
+      <p:sp>
+        <p:nvSpPr>
+          <p:cNvPr id="26" name="Text 24"/>
           <p:cNvSpPr txBox="1"/>
           <p:nvPr/>
         </p:nvSpPr>
@@ -4818,6 +5267,308 @@
 <file path=ppt/slides/slide14.xml><?xml version="1.0" encoding="utf-8"?>
 <p:sld xmlns:a="http://schemas.openxmlformats.org/drawingml/2006/main" xmlns:r="http://schemas.openxmlformats.org/officeDocument/2006/relationships" xmlns:p="http://schemas.openxmlformats.org/presentationml/2006/main">
   <p:cSld name="Slide 14">
+    <p:bg>
+      <p:bgPr>
+        <a:solidFill>
+          <a:srgbClr val="0E1116"/>
+        </a:solidFill>
+      </p:bgPr>
+    </p:bg>
+    <p:spTree>
+      <p:nvGrpSpPr>
+        <p:cNvPr id="1" name=""/>
+        <p:cNvGrpSpPr/>
+        <p:nvPr/>
+      </p:nvGrpSpPr>
+      <p:grpSpPr>
+        <a:xfrm>
+          <a:off x="0" y="0"/>
+          <a:ext cx="0" cy="0"/>
+          <a:chOff x="0" y="0"/>
+          <a:chExt cx="0" cy="0"/>
+        </a:xfrm>
+      </p:grpSpPr>
+      <p:sp>
+        <p:nvSpPr>
+          <p:cNvPr id="2" name="Shape 0"/>
+          <p:cNvSpPr/>
+          <p:nvPr/>
+        </p:nvSpPr>
+        <p:spPr>
+          <a:xfrm>
+            <a:off x="822960" y="822960"/>
+            <a:ext cx="4754880" cy="5212080"/>
+          </a:xfrm>
+          <a:prstGeom prst="roundRect">
+            <a:avLst>
+              <a:gd name="adj" fmla="val 2885"/>
+            </a:avLst>
+          </a:prstGeom>
+          <a:solidFill>
+            <a:srgbClr val="171C24"/>
+          </a:solidFill>
+          <a:ln w="15875">
+            <a:solidFill>
+              <a:srgbClr val="3A4150"/>
+            </a:solidFill>
+            <a:prstDash val="dash"/>
+          </a:ln>
+        </p:spPr>
+      </p:sp>
+      <p:pic>
+        <p:nvPicPr>
+          <p:cNvPr id="3" name="Image 0" descr="preencoded.png">    </p:cNvPr>
+          <p:cNvPicPr>
+            <a:picLocks noChangeAspect="1"/>
+          </p:cNvPicPr>
+          <p:nvPr/>
+        </p:nvPicPr>
+        <p:blipFill>
+          <a:blip r:embed="rId1"/>
+          <a:stretch>
+            <a:fillRect/>
+          </a:stretch>
+        </p:blipFill>
+        <p:spPr>
+          <a:xfrm>
+            <a:off x="2926080" y="2834640"/>
+            <a:ext cx="548640" cy="548640"/>
+          </a:xfrm>
+          <a:prstGeom prst="rect">
+            <a:avLst/>
+          </a:prstGeom>
+        </p:spPr>
+      </p:pic>
+      <p:sp>
+        <p:nvSpPr>
+          <p:cNvPr id="4" name="Text 1"/>
+          <p:cNvSpPr txBox="1"/>
+          <p:nvPr/>
+        </p:nvSpPr>
+        <p:spPr>
+          <a:xfrm>
+            <a:off x="1097280" y="3657600"/>
+            <a:ext cx="4206240" cy="640080"/>
+          </a:xfrm>
+          <a:prstGeom prst="rect">
+            <a:avLst/>
+          </a:prstGeom>
+          <a:noFill/>
+          <a:ln/>
+        </p:spPr>
+        <p:txBody>
+          <a:bodyPr wrap="square" lIns="0" tIns="0" rIns="0" bIns="0" rtlCol="0" anchor="t"/>
+          <a:lstStyle/>
+          <a:p>
+            <a:pPr rtl="1" algn="ctr" indent="0" marL="0">
+              <a:buNone/>
+            </a:pPr>
+            <a:r>
+              <a:rPr lang="he-IL" altLang="en-US" sz="1200" dirty="0">
+                <a:solidFill>
+                  <a:srgbClr val="A7ADB8"/>
+                </a:solidFill>
+                <a:latin typeface="Arial" pitchFamily="34" charset="0"/>
+                <a:ea typeface="Arial" pitchFamily="34" charset="-122"/>
+                <a:cs typeface="Arial" pitchFamily="34" charset="-120"/>
+              </a:rPr>
+              <a:t>תמונה: מהיום עצמו / מהגזרה (אם יש) – או תמונה של הצוות לפני</a:t>
+            </a:r>
+            <a:endParaRPr lang="he-IL" sz="1200" dirty="0"/>
+          </a:p>
+        </p:txBody>
+      </p:sp>
+      <p:pic>
+        <p:nvPicPr>
+          <p:cNvPr id="5" name="Image 1" descr="preencoded.png">    </p:cNvPr>
+          <p:cNvPicPr>
+            <a:picLocks noChangeAspect="1"/>
+          </p:cNvPicPr>
+          <p:nvPr/>
+        </p:nvPicPr>
+        <p:blipFill>
+          <a:blip r:embed="rId2"/>
+          <a:stretch>
+            <a:fillRect/>
+          </a:stretch>
+        </p:blipFill>
+        <p:spPr>
+          <a:xfrm>
+            <a:off x="10545775" y="1188720"/>
+            <a:ext cx="731520" cy="731520"/>
+          </a:xfrm>
+          <a:prstGeom prst="rect">
+            <a:avLst/>
+          </a:prstGeom>
+        </p:spPr>
+      </p:pic>
+      <p:sp>
+        <p:nvSpPr>
+          <p:cNvPr id="6" name="Text 2"/>
+          <p:cNvSpPr txBox="1"/>
+          <p:nvPr/>
+        </p:nvSpPr>
+        <p:spPr>
+          <a:xfrm>
+            <a:off x="6035040" y="2194560"/>
+            <a:ext cx="5333695" cy="1097280"/>
+          </a:xfrm>
+          <a:prstGeom prst="rect">
+            <a:avLst/>
+          </a:prstGeom>
+          <a:noFill/>
+          <a:ln/>
+        </p:spPr>
+        <p:txBody>
+          <a:bodyPr wrap="square" lIns="0" tIns="0" rIns="0" bIns="0" rtlCol="0" anchor="t"/>
+          <a:lstStyle/>
+          <a:p>
+            <a:pPr rtl="1" algn="r" indent="0" marL="0">
+              <a:buNone/>
+            </a:pPr>
+            <a:r>
+              <a:rPr lang="he-IL" altLang="en-US" sz="3200" b="1" dirty="0">
+                <a:solidFill>
+                  <a:srgbClr val="FFFFFF"/>
+                </a:solidFill>
+                <a:latin typeface="Arial" pitchFamily="34" charset="0"/>
+                <a:ea typeface="Arial" pitchFamily="34" charset="-122"/>
+                <a:cs typeface="Arial" pitchFamily="34" charset="-120"/>
+              </a:rPr>
+              <a:t>״באותו רגע עוד לא הבנתי שאני פצוע.</a:t>
+            </a:r>
+            <a:endParaRPr lang="he-IL" sz="3200" dirty="0"/>
+          </a:p>
+        </p:txBody>
+      </p:sp>
+      <p:sp>
+        <p:nvSpPr>
+          <p:cNvPr id="7" name="Text 3"/>
+          <p:cNvSpPr txBox="1"/>
+          <p:nvPr/>
+        </p:nvSpPr>
+        <p:spPr>
+          <a:xfrm>
+            <a:off x="6035040" y="3383280"/>
+            <a:ext cx="5333695" cy="914400"/>
+          </a:xfrm>
+          <a:prstGeom prst="rect">
+            <a:avLst/>
+          </a:prstGeom>
+          <a:noFill/>
+          <a:ln/>
+        </p:spPr>
+        <p:txBody>
+          <a:bodyPr wrap="square" lIns="0" tIns="0" rIns="0" bIns="0" rtlCol="0" anchor="t"/>
+          <a:lstStyle/>
+          <a:p>
+            <a:pPr rtl="1" algn="r" indent="0" marL="0">
+              <a:buNone/>
+            </a:pPr>
+            <a:r>
+              <a:rPr lang="he-IL" altLang="en-US" sz="3200" b="1" dirty="0">
+                <a:solidFill>
+                  <a:srgbClr val="D9B78C"/>
+                </a:solidFill>
+                <a:latin typeface="Arial" pitchFamily="34" charset="0"/>
+                <a:ea typeface="Arial" pitchFamily="34" charset="-122"/>
+                <a:cs typeface="Arial" pitchFamily="34" charset="-120"/>
+              </a:rPr>
+              <a:t>הדבר היחיד שעבר לי בראש היה…״</a:t>
+            </a:r>
+            <a:endParaRPr lang="he-IL" sz="3200" dirty="0"/>
+          </a:p>
+        </p:txBody>
+      </p:sp>
+      <p:sp>
+        <p:nvSpPr>
+          <p:cNvPr id="8" name="Text 4"/>
+          <p:cNvSpPr txBox="1"/>
+          <p:nvPr/>
+        </p:nvSpPr>
+        <p:spPr>
+          <a:xfrm>
+            <a:off x="6035040" y="4572000"/>
+            <a:ext cx="5333695" cy="914400"/>
+          </a:xfrm>
+          <a:prstGeom prst="rect">
+            <a:avLst/>
+          </a:prstGeom>
+          <a:noFill/>
+          <a:ln/>
+        </p:spPr>
+        <p:txBody>
+          <a:bodyPr wrap="square" lIns="0" tIns="0" rIns="0" bIns="0" rtlCol="0" anchor="t"/>
+          <a:lstStyle/>
+          <a:p>
+            <a:pPr rtl="1" algn="r" indent="0" marL="0">
+              <a:buNone/>
+            </a:pPr>
+            <a:r>
+              <a:rPr lang="he-IL" altLang="en-US" sz="2000" dirty="0">
+                <a:solidFill>
+                  <a:srgbClr val="A7ADB8"/>
+                </a:solidFill>
+                <a:latin typeface="Arial" pitchFamily="34" charset="0"/>
+                <a:ea typeface="Arial" pitchFamily="34" charset="-122"/>
+                <a:cs typeface="Arial" pitchFamily="34" charset="-120"/>
+              </a:rPr>
+              <a:t>״תמיד אמרו לנו: מי שלא מתפקד – מקבל פוסט־טראומה.״</a:t>
+            </a:r>
+            <a:endParaRPr lang="he-IL" sz="2000" dirty="0"/>
+          </a:p>
+        </p:txBody>
+      </p:sp>
+      <p:sp>
+        <p:nvSpPr>
+          <p:cNvPr id="9" name="Text 5"/>
+          <p:cNvSpPr txBox="1"/>
+          <p:nvPr/>
+        </p:nvSpPr>
+        <p:spPr>
+          <a:xfrm>
+            <a:off x="457200" y="6309360"/>
+            <a:ext cx="548640" cy="274320"/>
+          </a:xfrm>
+          <a:prstGeom prst="rect">
+            <a:avLst/>
+          </a:prstGeom>
+          <a:noFill/>
+          <a:ln/>
+        </p:spPr>
+        <p:txBody>
+          <a:bodyPr wrap="square" lIns="0" tIns="0" rIns="0" bIns="0" rtlCol="0" anchor="t"/>
+          <a:lstStyle/>
+          <a:p>
+            <a:pPr rtl="1" algn="l" indent="0" marL="0">
+              <a:buNone/>
+            </a:pPr>
+            <a:r>
+              <a:rPr lang="he-IL" altLang="en-US" sz="1000" dirty="0">
+                <a:solidFill>
+                  <a:srgbClr val="A7ADB8"/>
+                </a:solidFill>
+                <a:latin typeface="Arial" pitchFamily="34" charset="0"/>
+                <a:ea typeface="Arial" pitchFamily="34" charset="-122"/>
+                <a:cs typeface="Arial" pitchFamily="34" charset="-120"/>
+              </a:rPr>
+              <a:t>14</a:t>
+            </a:r>
+            <a:endParaRPr lang="he-IL" sz="1000" dirty="0"/>
+          </a:p>
+        </p:txBody>
+      </p:sp>
+    </p:spTree>
+  </p:cSld>
+  <p:clrMapOvr>
+    <a:masterClrMapping/>
+  </p:clrMapOvr>
+</p:sld>
+</file>
+
+<file path=ppt/slides/slide15.xml><?xml version="1.0" encoding="utf-8"?>
+<p:sld xmlns:a="http://schemas.openxmlformats.org/drawingml/2006/main" xmlns:r="http://schemas.openxmlformats.org/officeDocument/2006/relationships" xmlns:p="http://schemas.openxmlformats.org/presentationml/2006/main">
+  <p:cSld name="Slide 15">
     <p:bg>
       <p:bgPr>
         <a:solidFill>
@@ -4953,194 +5704,6 @@
               <a:t>הקהל מצפה שהשיא היה 7 באוקטובר. הוא לא.</a:t>
             </a:r>
             <a:endParaRPr lang="he-IL" sz="1800" dirty="0"/>
-          </a:p>
-        </p:txBody>
-      </p:sp>
-    </p:spTree>
-  </p:cSld>
-  <p:clrMapOvr>
-    <a:masterClrMapping/>
-  </p:clrMapOvr>
-</p:sld>
-</file>
-
-<file path=ppt/slides/slide15.xml><?xml version="1.0" encoding="utf-8"?>
-<p:sld xmlns:a="http://schemas.openxmlformats.org/drawingml/2006/main" xmlns:r="http://schemas.openxmlformats.org/officeDocument/2006/relationships" xmlns:p="http://schemas.openxmlformats.org/presentationml/2006/main">
-  <p:cSld name="Slide 15">
-    <p:bg>
-      <p:bgPr>
-        <a:solidFill>
-          <a:srgbClr val="0E1116"/>
-        </a:solidFill>
-      </p:bgPr>
-    </p:bg>
-    <p:spTree>
-      <p:nvGrpSpPr>
-        <p:cNvPr id="1" name=""/>
-        <p:cNvGrpSpPr/>
-        <p:nvPr/>
-      </p:nvGrpSpPr>
-      <p:grpSpPr>
-        <a:xfrm>
-          <a:off x="0" y="0"/>
-          <a:ext cx="0" cy="0"/>
-          <a:chOff x="0" y="0"/>
-          <a:chExt cx="0" cy="0"/>
-        </a:xfrm>
-      </p:grpSpPr>
-      <p:sp>
-        <p:nvSpPr>
-          <p:cNvPr id="2" name="Text 0"/>
-          <p:cNvSpPr txBox="1"/>
-          <p:nvPr/>
-        </p:nvSpPr>
-        <p:spPr>
-          <a:xfrm>
-            <a:off x="822960" y="1280160"/>
-            <a:ext cx="10545775" cy="1463040"/>
-          </a:xfrm>
-          <a:prstGeom prst="rect">
-            <a:avLst/>
-          </a:prstGeom>
-          <a:noFill/>
-          <a:ln/>
-        </p:spPr>
-        <p:txBody>
-          <a:bodyPr wrap="square" lIns="0" tIns="0" rIns="0" bIns="0" rtlCol="0" anchor="t"/>
-          <a:lstStyle/>
-          <a:p>
-            <a:pPr rtl="1" algn="r" indent="0" marL="0">
-              <a:buNone/>
-            </a:pPr>
-            <a:r>
-              <a:rPr lang="he-IL" altLang="en-US" sz="9600" b="1" dirty="0">
-                <a:solidFill>
-                  <a:srgbClr val="D9B78C"/>
-                </a:solidFill>
-                <a:latin typeface="Arial" pitchFamily="34" charset="0"/>
-                <a:ea typeface="Arial" pitchFamily="34" charset="-122"/>
-                <a:cs typeface="Arial" pitchFamily="34" charset="-120"/>
-              </a:rPr>
-              <a:t>04</a:t>
-            </a:r>
-            <a:endParaRPr lang="he-IL" sz="9600" dirty="0"/>
-          </a:p>
-        </p:txBody>
-      </p:sp>
-      <p:sp>
-        <p:nvSpPr>
-          <p:cNvPr id="3" name="Text 1"/>
-          <p:cNvSpPr txBox="1"/>
-          <p:nvPr/>
-        </p:nvSpPr>
-        <p:spPr>
-          <a:xfrm>
-            <a:off x="822960" y="2926080"/>
-            <a:ext cx="10545775" cy="1097280"/>
-          </a:xfrm>
-          <a:prstGeom prst="rect">
-            <a:avLst/>
-          </a:prstGeom>
-          <a:noFill/>
-          <a:ln/>
-        </p:spPr>
-        <p:txBody>
-          <a:bodyPr wrap="square" lIns="0" tIns="0" rIns="0" bIns="0" rtlCol="0" anchor="t"/>
-          <a:lstStyle/>
-          <a:p>
-            <a:pPr rtl="1" algn="r" indent="0" marL="0">
-              <a:buNone/>
-            </a:pPr>
-            <a:r>
-              <a:rPr lang="he-IL" altLang="en-US" sz="4400" b="1" dirty="0">
-                <a:solidFill>
-                  <a:srgbClr val="FFFFFF"/>
-                </a:solidFill>
-                <a:latin typeface="Arial" pitchFamily="34" charset="0"/>
-                <a:ea typeface="Arial" pitchFamily="34" charset="-122"/>
-                <a:cs typeface="Arial" pitchFamily="34" charset="-120"/>
-              </a:rPr>
-              <a:t>ואז הכול נגמר</a:t>
-            </a:r>
-            <a:endParaRPr lang="he-IL" sz="4400" dirty="0"/>
-          </a:p>
-        </p:txBody>
-      </p:sp>
-      <p:sp>
-        <p:nvSpPr>
-          <p:cNvPr id="4" name="Text 2"/>
-          <p:cNvSpPr txBox="1"/>
-          <p:nvPr/>
-        </p:nvSpPr>
-        <p:spPr>
-          <a:xfrm>
-            <a:off x="822960" y="4206240"/>
-            <a:ext cx="10545775" cy="1097280"/>
-          </a:xfrm>
-          <a:prstGeom prst="rect">
-            <a:avLst/>
-          </a:prstGeom>
-          <a:noFill/>
-          <a:ln/>
-        </p:spPr>
-        <p:txBody>
-          <a:bodyPr wrap="square" lIns="0" tIns="0" rIns="0" bIns="0" rtlCol="0" anchor="t"/>
-          <a:lstStyle/>
-          <a:p>
-            <a:pPr rtl="1" algn="r" indent="0" marL="0">
-              <a:buNone/>
-            </a:pPr>
-            <a:r>
-              <a:rPr lang="he-IL" altLang="en-US" sz="2000" dirty="0">
-                <a:solidFill>
-                  <a:srgbClr val="A7ADB8"/>
-                </a:solidFill>
-                <a:latin typeface="Arial" pitchFamily="34" charset="0"/>
-                <a:ea typeface="Arial" pitchFamily="34" charset="-122"/>
-                <a:cs typeface="Arial" pitchFamily="34" charset="-120"/>
-              </a:rPr>
-              <a:t>מה שמגיע אחרי הקרב.</a:t>
-            </a:r>
-            <a:endParaRPr lang="he-IL" sz="2000" dirty="0"/>
-          </a:p>
-        </p:txBody>
-      </p:sp>
-      <p:sp>
-        <p:nvSpPr>
-          <p:cNvPr id="5" name="Text 3"/>
-          <p:cNvSpPr txBox="1"/>
-          <p:nvPr/>
-        </p:nvSpPr>
-        <p:spPr>
-          <a:xfrm>
-            <a:off x="457200" y="6309360"/>
-            <a:ext cx="548640" cy="274320"/>
-          </a:xfrm>
-          <a:prstGeom prst="rect">
-            <a:avLst/>
-          </a:prstGeom>
-          <a:noFill/>
-          <a:ln/>
-        </p:spPr>
-        <p:txBody>
-          <a:bodyPr wrap="square" lIns="0" tIns="0" rIns="0" bIns="0" rtlCol="0" anchor="t"/>
-          <a:lstStyle/>
-          <a:p>
-            <a:pPr rtl="1" algn="l" indent="0" marL="0">
-              <a:buNone/>
-            </a:pPr>
-            <a:r>
-              <a:rPr lang="he-IL" altLang="en-US" sz="1000" dirty="0">
-                <a:solidFill>
-                  <a:srgbClr val="A7ADB8"/>
-                </a:solidFill>
-                <a:latin typeface="Arial" pitchFamily="34" charset="0"/>
-                <a:ea typeface="Arial" pitchFamily="34" charset="-122"/>
-                <a:cs typeface="Arial" pitchFamily="34" charset="-120"/>
-              </a:rPr>
-              <a:t>15</a:t>
-            </a:r>
-            <a:endParaRPr lang="he-IL" sz="1000" dirty="0"/>
           </a:p>
         </p:txBody>
       </p:sp>
@@ -5178,30 +5741,42 @@
       </p:grpSpPr>
       <p:sp>
         <p:nvSpPr>
-          <p:cNvPr id="2" name="Shape 0"/>
-          <p:cNvSpPr/>
-          <p:nvPr/>
-        </p:nvSpPr>
-        <p:spPr>
-          <a:xfrm>
-            <a:off x="8938031" y="1463040"/>
-            <a:ext cx="2430704" cy="3291840"/>
-          </a:xfrm>
-          <a:prstGeom prst="roundRect">
-            <a:avLst>
-              <a:gd name="adj" fmla="val 4514"/>
-            </a:avLst>
-          </a:prstGeom>
-          <a:solidFill>
-            <a:srgbClr val="171C24"/>
-          </a:solidFill>
-          <a:ln w="9525">
-            <a:solidFill>
-              <a:srgbClr val="2A313C"/>
-            </a:solidFill>
-            <a:prstDash val="solid"/>
-          </a:ln>
-        </p:spPr>
+          <p:cNvPr id="2" name="Text 0"/>
+          <p:cNvSpPr txBox="1"/>
+          <p:nvPr/>
+        </p:nvSpPr>
+        <p:spPr>
+          <a:xfrm>
+            <a:off x="822960" y="1280160"/>
+            <a:ext cx="10545775" cy="1463040"/>
+          </a:xfrm>
+          <a:prstGeom prst="rect">
+            <a:avLst/>
+          </a:prstGeom>
+          <a:noFill/>
+          <a:ln/>
+        </p:spPr>
+        <p:txBody>
+          <a:bodyPr wrap="square" lIns="0" tIns="0" rIns="0" bIns="0" rtlCol="0" anchor="t"/>
+          <a:lstStyle/>
+          <a:p>
+            <a:pPr rtl="1" algn="r" indent="0" marL="0">
+              <a:buNone/>
+            </a:pPr>
+            <a:r>
+              <a:rPr lang="he-IL" altLang="en-US" sz="9600" b="1" dirty="0">
+                <a:solidFill>
+                  <a:srgbClr val="D9B78C"/>
+                </a:solidFill>
+                <a:latin typeface="Arial" pitchFamily="34" charset="0"/>
+                <a:ea typeface="Arial" pitchFamily="34" charset="-122"/>
+                <a:cs typeface="Arial" pitchFamily="34" charset="-120"/>
+              </a:rPr>
+              <a:t>04</a:t>
+            </a:r>
+            <a:endParaRPr lang="he-IL" sz="9600" dirty="0"/>
+          </a:p>
+        </p:txBody>
       </p:sp>
       <p:sp>
         <p:nvSpPr>
@@ -5211,34 +5786,34 @@
         </p:nvSpPr>
         <p:spPr>
           <a:xfrm>
-            <a:off x="9120911" y="1828800"/>
-            <a:ext cx="2064944" cy="1463040"/>
-          </a:xfrm>
-          <a:prstGeom prst="rect">
-            <a:avLst/>
-          </a:prstGeom>
-          <a:noFill/>
-          <a:ln/>
-        </p:spPr>
-        <p:txBody>
-          <a:bodyPr wrap="square" lIns="0" tIns="0" rIns="0" bIns="0" rtlCol="0" anchor="ctr"/>
-          <a:lstStyle/>
-          <a:p>
-            <a:pPr rtl="1" algn="ctr" indent="0" marL="0">
-              <a:buNone/>
-            </a:pPr>
-            <a:r>
-              <a:rPr lang="he-IL" altLang="en-US" sz="6400" b="1" dirty="0">
-                <a:solidFill>
-                  <a:srgbClr val="D9B78C"/>
-                </a:solidFill>
-                <a:latin typeface="Arial" pitchFamily="34" charset="0"/>
-                <a:ea typeface="Arial" pitchFamily="34" charset="-122"/>
-                <a:cs typeface="Arial" pitchFamily="34" charset="-120"/>
-              </a:rPr>
-              <a:t>19</a:t>
-            </a:r>
-            <a:endParaRPr lang="he-IL" sz="6400" dirty="0"/>
+            <a:off x="822960" y="2926080"/>
+            <a:ext cx="10545775" cy="1097280"/>
+          </a:xfrm>
+          <a:prstGeom prst="rect">
+            <a:avLst/>
+          </a:prstGeom>
+          <a:noFill/>
+          <a:ln/>
+        </p:spPr>
+        <p:txBody>
+          <a:bodyPr wrap="square" lIns="0" tIns="0" rIns="0" bIns="0" rtlCol="0" anchor="t"/>
+          <a:lstStyle/>
+          <a:p>
+            <a:pPr rtl="1" algn="r" indent="0" marL="0">
+              <a:buNone/>
+            </a:pPr>
+            <a:r>
+              <a:rPr lang="he-IL" altLang="en-US" sz="4400" b="1" dirty="0">
+                <a:solidFill>
+                  <a:srgbClr val="FFFFFF"/>
+                </a:solidFill>
+                <a:latin typeface="Arial" pitchFamily="34" charset="0"/>
+                <a:ea typeface="Arial" pitchFamily="34" charset="-122"/>
+                <a:cs typeface="Arial" pitchFamily="34" charset="-120"/>
+              </a:rPr>
+              <a:t>ואז הכול נגמר</a:t>
+            </a:r>
+            <a:endParaRPr lang="he-IL" sz="4400" dirty="0"/>
           </a:p>
         </p:txBody>
       </p:sp>
@@ -5250,378 +5825,24 @@
         </p:nvSpPr>
         <p:spPr>
           <a:xfrm>
-            <a:off x="9212351" y="3383280"/>
-            <a:ext cx="1882064" cy="1097280"/>
-          </a:xfrm>
-          <a:prstGeom prst="rect">
-            <a:avLst/>
-          </a:prstGeom>
-          <a:noFill/>
-          <a:ln/>
-        </p:spPr>
-        <p:txBody>
-          <a:bodyPr wrap="square" lIns="0" tIns="0" rIns="0" bIns="0" rtlCol="0" anchor="t"/>
-          <a:lstStyle/>
-          <a:p>
-            <a:pPr rtl="1" algn="ctr" indent="0" marL="0">
-              <a:buNone/>
-            </a:pPr>
-            <a:r>
-              <a:rPr lang="he-IL" altLang="en-US" sz="1600" dirty="0">
-                <a:solidFill>
-                  <a:srgbClr val="FFFFFF"/>
-                </a:solidFill>
-                <a:latin typeface="Arial" pitchFamily="34" charset="0"/>
-                <a:ea typeface="Arial" pitchFamily="34" charset="-122"/>
-                <a:cs typeface="Arial" pitchFamily="34" charset="-120"/>
-              </a:rPr>
-              <a:t>חברים ויותר שאיבדתי באותו יום</a:t>
-            </a:r>
-            <a:endParaRPr lang="he-IL" sz="1600" dirty="0"/>
-          </a:p>
-        </p:txBody>
-      </p:sp>
-      <p:sp>
-        <p:nvSpPr>
-          <p:cNvPr id="5" name="Shape 3"/>
-          <p:cNvSpPr/>
-          <p:nvPr/>
-        </p:nvSpPr>
-        <p:spPr>
-          <a:xfrm>
-            <a:off x="6233008" y="1463040"/>
-            <a:ext cx="2430704" cy="3291840"/>
-          </a:xfrm>
-          <a:prstGeom prst="roundRect">
-            <a:avLst>
-              <a:gd name="adj" fmla="val 4514"/>
-            </a:avLst>
-          </a:prstGeom>
-          <a:solidFill>
-            <a:srgbClr val="171C24"/>
-          </a:solidFill>
-          <a:ln w="9525">
-            <a:solidFill>
-              <a:srgbClr val="2A313C"/>
-            </a:solidFill>
-            <a:prstDash val="solid"/>
-          </a:ln>
-        </p:spPr>
-      </p:sp>
-      <p:sp>
-        <p:nvSpPr>
-          <p:cNvPr id="6" name="Text 4"/>
-          <p:cNvSpPr txBox="1"/>
-          <p:nvPr/>
-        </p:nvSpPr>
-        <p:spPr>
-          <a:xfrm>
-            <a:off x="6415888" y="1828800"/>
-            <a:ext cx="2064944" cy="1463040"/>
-          </a:xfrm>
-          <a:prstGeom prst="rect">
-            <a:avLst/>
-          </a:prstGeom>
-          <a:noFill/>
-          <a:ln/>
-        </p:spPr>
-        <p:txBody>
-          <a:bodyPr wrap="square" lIns="0" tIns="0" rIns="0" bIns="0" rtlCol="0" anchor="ctr"/>
-          <a:lstStyle/>
-          <a:p>
-            <a:pPr rtl="1" algn="ctr" indent="0" marL="0">
-              <a:buNone/>
-            </a:pPr>
-            <a:r>
-              <a:rPr lang="he-IL" altLang="en-US" sz="6400" b="1" dirty="0">
-                <a:solidFill>
-                  <a:srgbClr val="D9B78C"/>
-                </a:solidFill>
-                <a:latin typeface="Arial" pitchFamily="34" charset="0"/>
-                <a:ea typeface="Arial" pitchFamily="34" charset="-122"/>
-                <a:cs typeface="Arial" pitchFamily="34" charset="-120"/>
-              </a:rPr>
-              <a:t>10</a:t>
-            </a:r>
-            <a:endParaRPr lang="he-IL" sz="6400" dirty="0"/>
-          </a:p>
-        </p:txBody>
-      </p:sp>
-      <p:sp>
-        <p:nvSpPr>
-          <p:cNvPr id="7" name="Text 5"/>
-          <p:cNvSpPr txBox="1"/>
-          <p:nvPr/>
-        </p:nvSpPr>
-        <p:spPr>
-          <a:xfrm>
-            <a:off x="6507328" y="3383280"/>
-            <a:ext cx="1882064" cy="1097280"/>
-          </a:xfrm>
-          <a:prstGeom prst="rect">
-            <a:avLst/>
-          </a:prstGeom>
-          <a:noFill/>
-          <a:ln/>
-        </p:spPr>
-        <p:txBody>
-          <a:bodyPr wrap="square" lIns="0" tIns="0" rIns="0" bIns="0" rtlCol="0" anchor="t"/>
-          <a:lstStyle/>
-          <a:p>
-            <a:pPr rtl="1" algn="ctr" indent="0" marL="0">
-              <a:buNone/>
-            </a:pPr>
-            <a:r>
-              <a:rPr lang="he-IL" altLang="en-US" sz="1600" dirty="0">
-                <a:solidFill>
-                  <a:srgbClr val="FFFFFF"/>
-                </a:solidFill>
-                <a:latin typeface="Arial" pitchFamily="34" charset="0"/>
-                <a:ea typeface="Arial" pitchFamily="34" charset="-122"/>
-                <a:cs typeface="Arial" pitchFamily="34" charset="-120"/>
-              </a:rPr>
-              <a:t>חברים נוספים, כמעט, במהלך המלחמה</a:t>
-            </a:r>
-            <a:endParaRPr lang="he-IL" sz="1600" dirty="0"/>
-          </a:p>
-        </p:txBody>
-      </p:sp>
-      <p:sp>
-        <p:nvSpPr>
-          <p:cNvPr id="8" name="Shape 6"/>
-          <p:cNvSpPr/>
-          <p:nvPr/>
-        </p:nvSpPr>
-        <p:spPr>
-          <a:xfrm>
-            <a:off x="3527984" y="1463040"/>
-            <a:ext cx="2430704" cy="3291840"/>
-          </a:xfrm>
-          <a:prstGeom prst="roundRect">
-            <a:avLst>
-              <a:gd name="adj" fmla="val 4514"/>
-            </a:avLst>
-          </a:prstGeom>
-          <a:solidFill>
-            <a:srgbClr val="171C24"/>
-          </a:solidFill>
-          <a:ln w="9525">
-            <a:solidFill>
-              <a:srgbClr val="2A313C"/>
-            </a:solidFill>
-            <a:prstDash val="solid"/>
-          </a:ln>
-        </p:spPr>
-      </p:sp>
-      <p:sp>
-        <p:nvSpPr>
-          <p:cNvPr id="9" name="Text 7"/>
-          <p:cNvSpPr txBox="1"/>
-          <p:nvPr/>
-        </p:nvSpPr>
-        <p:spPr>
-          <a:xfrm>
-            <a:off x="3710864" y="1828800"/>
-            <a:ext cx="2064944" cy="1463040"/>
-          </a:xfrm>
-          <a:prstGeom prst="rect">
-            <a:avLst/>
-          </a:prstGeom>
-          <a:noFill/>
-          <a:ln/>
-        </p:spPr>
-        <p:txBody>
-          <a:bodyPr wrap="square" lIns="0" tIns="0" rIns="0" bIns="0" rtlCol="0" anchor="ctr"/>
-          <a:lstStyle/>
-          <a:p>
-            <a:pPr rtl="1" algn="ctr" indent="0" marL="0">
-              <a:buNone/>
-            </a:pPr>
-            <a:r>
-              <a:rPr lang="he-IL" altLang="en-US" sz="6400" b="1" dirty="0">
-                <a:solidFill>
-                  <a:srgbClr val="D9B78C"/>
-                </a:solidFill>
-                <a:latin typeface="Arial" pitchFamily="34" charset="0"/>
-                <a:ea typeface="Arial" pitchFamily="34" charset="-122"/>
-                <a:cs typeface="Arial" pitchFamily="34" charset="-120"/>
-              </a:rPr>
-              <a:t>3</a:t>
-            </a:r>
-            <a:endParaRPr lang="he-IL" sz="6400" dirty="0"/>
-          </a:p>
-        </p:txBody>
-      </p:sp>
-      <p:sp>
-        <p:nvSpPr>
-          <p:cNvPr id="10" name="Text 8"/>
-          <p:cNvSpPr txBox="1"/>
-          <p:nvPr/>
-        </p:nvSpPr>
-        <p:spPr>
-          <a:xfrm>
-            <a:off x="3802304" y="3383280"/>
-            <a:ext cx="1882064" cy="1097280"/>
-          </a:xfrm>
-          <a:prstGeom prst="rect">
-            <a:avLst/>
-          </a:prstGeom>
-          <a:noFill/>
-          <a:ln/>
-        </p:spPr>
-        <p:txBody>
-          <a:bodyPr wrap="square" lIns="0" tIns="0" rIns="0" bIns="0" rtlCol="0" anchor="t"/>
-          <a:lstStyle/>
-          <a:p>
-            <a:pPr rtl="1" algn="ctr" indent="0" marL="0">
-              <a:buNone/>
-            </a:pPr>
-            <a:r>
-              <a:rPr lang="he-IL" altLang="en-US" sz="1600" dirty="0">
-                <a:solidFill>
-                  <a:srgbClr val="FFFFFF"/>
-                </a:solidFill>
-                <a:latin typeface="Arial" pitchFamily="34" charset="0"/>
-                <a:ea typeface="Arial" pitchFamily="34" charset="-122"/>
-                <a:cs typeface="Arial" pitchFamily="34" charset="-120"/>
-              </a:rPr>
-              <a:t>חודשי אשפוז בתל השומר</a:t>
-            </a:r>
-            <a:endParaRPr lang="he-IL" sz="1600" dirty="0"/>
-          </a:p>
-        </p:txBody>
-      </p:sp>
-      <p:sp>
-        <p:nvSpPr>
-          <p:cNvPr id="11" name="Shape 9"/>
-          <p:cNvSpPr/>
-          <p:nvPr/>
-        </p:nvSpPr>
-        <p:spPr>
-          <a:xfrm>
-            <a:off x="822960" y="1463040"/>
-            <a:ext cx="2430704" cy="3291840"/>
-          </a:xfrm>
-          <a:prstGeom prst="roundRect">
-            <a:avLst>
-              <a:gd name="adj" fmla="val 4514"/>
-            </a:avLst>
-          </a:prstGeom>
-          <a:solidFill>
-            <a:srgbClr val="171C24"/>
-          </a:solidFill>
-          <a:ln w="9525">
-            <a:solidFill>
-              <a:srgbClr val="2A313C"/>
-            </a:solidFill>
-            <a:prstDash val="solid"/>
-          </a:ln>
-        </p:spPr>
-      </p:sp>
-      <p:sp>
-        <p:nvSpPr>
-          <p:cNvPr id="12" name="Text 10"/>
-          <p:cNvSpPr txBox="1"/>
-          <p:nvPr/>
-        </p:nvSpPr>
-        <p:spPr>
-          <a:xfrm>
-            <a:off x="1005840" y="1828800"/>
-            <a:ext cx="2064944" cy="1463040"/>
-          </a:xfrm>
-          <a:prstGeom prst="rect">
-            <a:avLst/>
-          </a:prstGeom>
-          <a:noFill/>
-          <a:ln/>
-        </p:spPr>
-        <p:txBody>
-          <a:bodyPr wrap="square" lIns="0" tIns="0" rIns="0" bIns="0" rtlCol="0" anchor="ctr"/>
-          <a:lstStyle/>
-          <a:p>
-            <a:pPr rtl="1" algn="ctr" indent="0" marL="0">
-              <a:buNone/>
-            </a:pPr>
-            <a:r>
-              <a:rPr lang="he-IL" altLang="en-US" sz="6400" b="1" dirty="0">
-                <a:solidFill>
-                  <a:srgbClr val="D9B78C"/>
-                </a:solidFill>
-                <a:latin typeface="Arial" pitchFamily="34" charset="0"/>
-                <a:ea typeface="Arial" pitchFamily="34" charset="-122"/>
-                <a:cs typeface="Arial" pitchFamily="34" charset="-120"/>
-              </a:rPr>
-              <a:t>0</a:t>
-            </a:r>
-            <a:endParaRPr lang="he-IL" sz="6400" dirty="0"/>
-          </a:p>
-        </p:txBody>
-      </p:sp>
-      <p:sp>
-        <p:nvSpPr>
-          <p:cNvPr id="13" name="Text 11"/>
-          <p:cNvSpPr txBox="1"/>
-          <p:nvPr/>
-        </p:nvSpPr>
-        <p:spPr>
-          <a:xfrm>
-            <a:off x="1097280" y="3383280"/>
-            <a:ext cx="1882064" cy="1097280"/>
-          </a:xfrm>
-          <a:prstGeom prst="rect">
-            <a:avLst/>
-          </a:prstGeom>
-          <a:noFill/>
-          <a:ln/>
-        </p:spPr>
-        <p:txBody>
-          <a:bodyPr wrap="square" lIns="0" tIns="0" rIns="0" bIns="0" rtlCol="0" anchor="t"/>
-          <a:lstStyle/>
-          <a:p>
-            <a:pPr rtl="1" algn="ctr" indent="0" marL="0">
-              <a:buNone/>
-            </a:pPr>
-            <a:r>
-              <a:rPr lang="he-IL" altLang="en-US" sz="1600" dirty="0">
-                <a:solidFill>
-                  <a:srgbClr val="FFFFFF"/>
-                </a:solidFill>
-                <a:latin typeface="Arial" pitchFamily="34" charset="0"/>
-                <a:ea typeface="Arial" pitchFamily="34" charset="-122"/>
-                <a:cs typeface="Arial" pitchFamily="34" charset="-120"/>
-              </a:rPr>
-              <a:t>משככי כאבים</a:t>
-            </a:r>
-            <a:endParaRPr lang="he-IL" sz="1600" dirty="0"/>
-          </a:p>
-        </p:txBody>
-      </p:sp>
-      <p:sp>
-        <p:nvSpPr>
-          <p:cNvPr id="14" name="Text 12"/>
-          <p:cNvSpPr txBox="1"/>
-          <p:nvPr/>
-        </p:nvSpPr>
-        <p:spPr>
-          <a:xfrm>
-            <a:off x="822960" y="5120640"/>
-            <a:ext cx="10545775" cy="822960"/>
-          </a:xfrm>
-          <a:prstGeom prst="rect">
-            <a:avLst/>
-          </a:prstGeom>
-          <a:noFill/>
-          <a:ln/>
-        </p:spPr>
-        <p:txBody>
-          <a:bodyPr wrap="square" lIns="0" tIns="0" rIns="0" bIns="0" rtlCol="0" anchor="t"/>
-          <a:lstStyle/>
-          <a:p>
-            <a:pPr rtl="1" algn="ctr" indent="0" marL="0">
-              <a:buNone/>
-            </a:pPr>
-            <a:r>
-              <a:rPr lang="he-IL" altLang="en-US" sz="1800" dirty="0">
+            <a:off x="822960" y="4206240"/>
+            <a:ext cx="10545775" cy="1097280"/>
+          </a:xfrm>
+          <a:prstGeom prst="rect">
+            <a:avLst/>
+          </a:prstGeom>
+          <a:noFill/>
+          <a:ln/>
+        </p:spPr>
+        <p:txBody>
+          <a:bodyPr wrap="square" lIns="0" tIns="0" rIns="0" bIns="0" rtlCol="0" anchor="t"/>
+          <a:lstStyle/>
+          <a:p>
+            <a:pPr rtl="1" algn="r" indent="0" marL="0">
+              <a:buNone/>
+            </a:pPr>
+            <a:r>
+              <a:rPr lang="he-IL" altLang="en-US" sz="2000" dirty="0">
                 <a:solidFill>
                   <a:srgbClr val="A7ADB8"/>
                 </a:solidFill>
@@ -5629,15 +5850,15 @@
                 <a:ea typeface="Arial" pitchFamily="34" charset="-122"/>
                 <a:cs typeface="Arial" pitchFamily="34" charset="-120"/>
               </a:rPr>
-              <a:t>הדבר הכי קשה אחרי השביעי: לא הפציעה. האובדן. הדברים שהם לא יספיקו לעשות, והמשפחות השכולות.</a:t>
-            </a:r>
-            <a:endParaRPr lang="he-IL" sz="1800" dirty="0"/>
-          </a:p>
-        </p:txBody>
-      </p:sp>
-      <p:sp>
-        <p:nvSpPr>
-          <p:cNvPr id="15" name="Text 13"/>
+              <a:t>מה שמגיע אחרי הקרב.</a:t>
+            </a:r>
+            <a:endParaRPr lang="he-IL" sz="2000" dirty="0"/>
+          </a:p>
+        </p:txBody>
+      </p:sp>
+      <p:sp>
+        <p:nvSpPr>
+          <p:cNvPr id="5" name="Text 3"/>
           <p:cNvSpPr txBox="1"/>
           <p:nvPr/>
         </p:nvSpPr>
@@ -5685,6 +5906,536 @@
 <file path=ppt/slides/slide17.xml><?xml version="1.0" encoding="utf-8"?>
 <p:sld xmlns:a="http://schemas.openxmlformats.org/drawingml/2006/main" xmlns:r="http://schemas.openxmlformats.org/officeDocument/2006/relationships" xmlns:p="http://schemas.openxmlformats.org/presentationml/2006/main">
   <p:cSld name="Slide 17">
+    <p:bg>
+      <p:bgPr>
+        <a:solidFill>
+          <a:srgbClr val="0E1116"/>
+        </a:solidFill>
+      </p:bgPr>
+    </p:bg>
+    <p:spTree>
+      <p:nvGrpSpPr>
+        <p:cNvPr id="1" name=""/>
+        <p:cNvGrpSpPr/>
+        <p:nvPr/>
+      </p:nvGrpSpPr>
+      <p:grpSpPr>
+        <a:xfrm>
+          <a:off x="0" y="0"/>
+          <a:ext cx="0" cy="0"/>
+          <a:chOff x="0" y="0"/>
+          <a:chExt cx="0" cy="0"/>
+        </a:xfrm>
+      </p:grpSpPr>
+      <p:sp>
+        <p:nvSpPr>
+          <p:cNvPr id="2" name="Shape 0"/>
+          <p:cNvSpPr/>
+          <p:nvPr/>
+        </p:nvSpPr>
+        <p:spPr>
+          <a:xfrm>
+            <a:off x="8938031" y="1463040"/>
+            <a:ext cx="2430704" cy="3291840"/>
+          </a:xfrm>
+          <a:prstGeom prst="roundRect">
+            <a:avLst>
+              <a:gd name="adj" fmla="val 4514"/>
+            </a:avLst>
+          </a:prstGeom>
+          <a:solidFill>
+            <a:srgbClr val="171C24"/>
+          </a:solidFill>
+          <a:ln w="9525">
+            <a:solidFill>
+              <a:srgbClr val="2A313C"/>
+            </a:solidFill>
+            <a:prstDash val="solid"/>
+          </a:ln>
+        </p:spPr>
+      </p:sp>
+      <p:sp>
+        <p:nvSpPr>
+          <p:cNvPr id="3" name="Text 1"/>
+          <p:cNvSpPr txBox="1"/>
+          <p:nvPr/>
+        </p:nvSpPr>
+        <p:spPr>
+          <a:xfrm>
+            <a:off x="9120911" y="1828800"/>
+            <a:ext cx="2064944" cy="1463040"/>
+          </a:xfrm>
+          <a:prstGeom prst="rect">
+            <a:avLst/>
+          </a:prstGeom>
+          <a:noFill/>
+          <a:ln/>
+        </p:spPr>
+        <p:txBody>
+          <a:bodyPr wrap="square" lIns="0" tIns="0" rIns="0" bIns="0" rtlCol="0" anchor="ctr"/>
+          <a:lstStyle/>
+          <a:p>
+            <a:pPr rtl="1" algn="ctr" indent="0" marL="0">
+              <a:buNone/>
+            </a:pPr>
+            <a:r>
+              <a:rPr lang="he-IL" altLang="en-US" sz="6400" b="1" dirty="0">
+                <a:solidFill>
+                  <a:srgbClr val="D9B78C"/>
+                </a:solidFill>
+                <a:latin typeface="Arial" pitchFamily="34" charset="0"/>
+                <a:ea typeface="Arial" pitchFamily="34" charset="-122"/>
+                <a:cs typeface="Arial" pitchFamily="34" charset="-120"/>
+              </a:rPr>
+              <a:t>19</a:t>
+            </a:r>
+            <a:endParaRPr lang="he-IL" sz="6400" dirty="0"/>
+          </a:p>
+        </p:txBody>
+      </p:sp>
+      <p:sp>
+        <p:nvSpPr>
+          <p:cNvPr id="4" name="Text 2"/>
+          <p:cNvSpPr txBox="1"/>
+          <p:nvPr/>
+        </p:nvSpPr>
+        <p:spPr>
+          <a:xfrm>
+            <a:off x="9212351" y="3383280"/>
+            <a:ext cx="1882064" cy="1097280"/>
+          </a:xfrm>
+          <a:prstGeom prst="rect">
+            <a:avLst/>
+          </a:prstGeom>
+          <a:noFill/>
+          <a:ln/>
+        </p:spPr>
+        <p:txBody>
+          <a:bodyPr wrap="square" lIns="0" tIns="0" rIns="0" bIns="0" rtlCol="0" anchor="t"/>
+          <a:lstStyle/>
+          <a:p>
+            <a:pPr rtl="1" algn="ctr" indent="0" marL="0">
+              <a:buNone/>
+            </a:pPr>
+            <a:r>
+              <a:rPr lang="he-IL" altLang="en-US" sz="1600" dirty="0">
+                <a:solidFill>
+                  <a:srgbClr val="FFFFFF"/>
+                </a:solidFill>
+                <a:latin typeface="Arial" pitchFamily="34" charset="0"/>
+                <a:ea typeface="Arial" pitchFamily="34" charset="-122"/>
+                <a:cs typeface="Arial" pitchFamily="34" charset="-120"/>
+              </a:rPr>
+              <a:t>חברים ויותר שאיבדתי באותו יום</a:t>
+            </a:r>
+            <a:endParaRPr lang="he-IL" sz="1600" dirty="0"/>
+          </a:p>
+        </p:txBody>
+      </p:sp>
+      <p:sp>
+        <p:nvSpPr>
+          <p:cNvPr id="5" name="Shape 3"/>
+          <p:cNvSpPr/>
+          <p:nvPr/>
+        </p:nvSpPr>
+        <p:spPr>
+          <a:xfrm>
+            <a:off x="6233008" y="1463040"/>
+            <a:ext cx="2430704" cy="3291840"/>
+          </a:xfrm>
+          <a:prstGeom prst="roundRect">
+            <a:avLst>
+              <a:gd name="adj" fmla="val 4514"/>
+            </a:avLst>
+          </a:prstGeom>
+          <a:solidFill>
+            <a:srgbClr val="171C24"/>
+          </a:solidFill>
+          <a:ln w="9525">
+            <a:solidFill>
+              <a:srgbClr val="2A313C"/>
+            </a:solidFill>
+            <a:prstDash val="solid"/>
+          </a:ln>
+        </p:spPr>
+      </p:sp>
+      <p:sp>
+        <p:nvSpPr>
+          <p:cNvPr id="6" name="Text 4"/>
+          <p:cNvSpPr txBox="1"/>
+          <p:nvPr/>
+        </p:nvSpPr>
+        <p:spPr>
+          <a:xfrm>
+            <a:off x="6415888" y="1828800"/>
+            <a:ext cx="2064944" cy="1463040"/>
+          </a:xfrm>
+          <a:prstGeom prst="rect">
+            <a:avLst/>
+          </a:prstGeom>
+          <a:noFill/>
+          <a:ln/>
+        </p:spPr>
+        <p:txBody>
+          <a:bodyPr wrap="square" lIns="0" tIns="0" rIns="0" bIns="0" rtlCol="0" anchor="ctr"/>
+          <a:lstStyle/>
+          <a:p>
+            <a:pPr rtl="1" algn="ctr" indent="0" marL="0">
+              <a:buNone/>
+            </a:pPr>
+            <a:r>
+              <a:rPr lang="he-IL" altLang="en-US" sz="6400" b="1" dirty="0">
+                <a:solidFill>
+                  <a:srgbClr val="D9B78C"/>
+                </a:solidFill>
+                <a:latin typeface="Arial" pitchFamily="34" charset="0"/>
+                <a:ea typeface="Arial" pitchFamily="34" charset="-122"/>
+                <a:cs typeface="Arial" pitchFamily="34" charset="-120"/>
+              </a:rPr>
+              <a:t>10</a:t>
+            </a:r>
+            <a:endParaRPr lang="he-IL" sz="6400" dirty="0"/>
+          </a:p>
+        </p:txBody>
+      </p:sp>
+      <p:sp>
+        <p:nvSpPr>
+          <p:cNvPr id="7" name="Text 5"/>
+          <p:cNvSpPr txBox="1"/>
+          <p:nvPr/>
+        </p:nvSpPr>
+        <p:spPr>
+          <a:xfrm>
+            <a:off x="6507328" y="3383280"/>
+            <a:ext cx="1882064" cy="1097280"/>
+          </a:xfrm>
+          <a:prstGeom prst="rect">
+            <a:avLst/>
+          </a:prstGeom>
+          <a:noFill/>
+          <a:ln/>
+        </p:spPr>
+        <p:txBody>
+          <a:bodyPr wrap="square" lIns="0" tIns="0" rIns="0" bIns="0" rtlCol="0" anchor="t"/>
+          <a:lstStyle/>
+          <a:p>
+            <a:pPr rtl="1" algn="ctr" indent="0" marL="0">
+              <a:buNone/>
+            </a:pPr>
+            <a:r>
+              <a:rPr lang="he-IL" altLang="en-US" sz="1600" dirty="0">
+                <a:solidFill>
+                  <a:srgbClr val="FFFFFF"/>
+                </a:solidFill>
+                <a:latin typeface="Arial" pitchFamily="34" charset="0"/>
+                <a:ea typeface="Arial" pitchFamily="34" charset="-122"/>
+                <a:cs typeface="Arial" pitchFamily="34" charset="-120"/>
+              </a:rPr>
+              <a:t>חברים נוספים, כמעט, במהלך המלחמה</a:t>
+            </a:r>
+            <a:endParaRPr lang="he-IL" sz="1600" dirty="0"/>
+          </a:p>
+        </p:txBody>
+      </p:sp>
+      <p:sp>
+        <p:nvSpPr>
+          <p:cNvPr id="8" name="Shape 6"/>
+          <p:cNvSpPr/>
+          <p:nvPr/>
+        </p:nvSpPr>
+        <p:spPr>
+          <a:xfrm>
+            <a:off x="3527984" y="1463040"/>
+            <a:ext cx="2430704" cy="3291840"/>
+          </a:xfrm>
+          <a:prstGeom prst="roundRect">
+            <a:avLst>
+              <a:gd name="adj" fmla="val 4514"/>
+            </a:avLst>
+          </a:prstGeom>
+          <a:solidFill>
+            <a:srgbClr val="171C24"/>
+          </a:solidFill>
+          <a:ln w="9525">
+            <a:solidFill>
+              <a:srgbClr val="2A313C"/>
+            </a:solidFill>
+            <a:prstDash val="solid"/>
+          </a:ln>
+        </p:spPr>
+      </p:sp>
+      <p:sp>
+        <p:nvSpPr>
+          <p:cNvPr id="9" name="Text 7"/>
+          <p:cNvSpPr txBox="1"/>
+          <p:nvPr/>
+        </p:nvSpPr>
+        <p:spPr>
+          <a:xfrm>
+            <a:off x="3710864" y="1828800"/>
+            <a:ext cx="2064944" cy="1463040"/>
+          </a:xfrm>
+          <a:prstGeom prst="rect">
+            <a:avLst/>
+          </a:prstGeom>
+          <a:noFill/>
+          <a:ln/>
+        </p:spPr>
+        <p:txBody>
+          <a:bodyPr wrap="square" lIns="0" tIns="0" rIns="0" bIns="0" rtlCol="0" anchor="ctr"/>
+          <a:lstStyle/>
+          <a:p>
+            <a:pPr rtl="1" algn="ctr" indent="0" marL="0">
+              <a:buNone/>
+            </a:pPr>
+            <a:r>
+              <a:rPr lang="he-IL" altLang="en-US" sz="6400" b="1" dirty="0">
+                <a:solidFill>
+                  <a:srgbClr val="D9B78C"/>
+                </a:solidFill>
+                <a:latin typeface="Arial" pitchFamily="34" charset="0"/>
+                <a:ea typeface="Arial" pitchFamily="34" charset="-122"/>
+                <a:cs typeface="Arial" pitchFamily="34" charset="-120"/>
+              </a:rPr>
+              <a:t>3</a:t>
+            </a:r>
+            <a:endParaRPr lang="he-IL" sz="6400" dirty="0"/>
+          </a:p>
+        </p:txBody>
+      </p:sp>
+      <p:sp>
+        <p:nvSpPr>
+          <p:cNvPr id="10" name="Text 8"/>
+          <p:cNvSpPr txBox="1"/>
+          <p:nvPr/>
+        </p:nvSpPr>
+        <p:spPr>
+          <a:xfrm>
+            <a:off x="3802304" y="3383280"/>
+            <a:ext cx="1882064" cy="1097280"/>
+          </a:xfrm>
+          <a:prstGeom prst="rect">
+            <a:avLst/>
+          </a:prstGeom>
+          <a:noFill/>
+          <a:ln/>
+        </p:spPr>
+        <p:txBody>
+          <a:bodyPr wrap="square" lIns="0" tIns="0" rIns="0" bIns="0" rtlCol="0" anchor="t"/>
+          <a:lstStyle/>
+          <a:p>
+            <a:pPr rtl="1" algn="ctr" indent="0" marL="0">
+              <a:buNone/>
+            </a:pPr>
+            <a:r>
+              <a:rPr lang="he-IL" altLang="en-US" sz="1600" dirty="0">
+                <a:solidFill>
+                  <a:srgbClr val="FFFFFF"/>
+                </a:solidFill>
+                <a:latin typeface="Arial" pitchFamily="34" charset="0"/>
+                <a:ea typeface="Arial" pitchFamily="34" charset="-122"/>
+                <a:cs typeface="Arial" pitchFamily="34" charset="-120"/>
+              </a:rPr>
+              <a:t>חודשי אשפוז בתל השומר</a:t>
+            </a:r>
+            <a:endParaRPr lang="he-IL" sz="1600" dirty="0"/>
+          </a:p>
+        </p:txBody>
+      </p:sp>
+      <p:sp>
+        <p:nvSpPr>
+          <p:cNvPr id="11" name="Shape 9"/>
+          <p:cNvSpPr/>
+          <p:nvPr/>
+        </p:nvSpPr>
+        <p:spPr>
+          <a:xfrm>
+            <a:off x="822960" y="1463040"/>
+            <a:ext cx="2430704" cy="3291840"/>
+          </a:xfrm>
+          <a:prstGeom prst="roundRect">
+            <a:avLst>
+              <a:gd name="adj" fmla="val 4514"/>
+            </a:avLst>
+          </a:prstGeom>
+          <a:solidFill>
+            <a:srgbClr val="171C24"/>
+          </a:solidFill>
+          <a:ln w="9525">
+            <a:solidFill>
+              <a:srgbClr val="2A313C"/>
+            </a:solidFill>
+            <a:prstDash val="solid"/>
+          </a:ln>
+        </p:spPr>
+      </p:sp>
+      <p:sp>
+        <p:nvSpPr>
+          <p:cNvPr id="12" name="Text 10"/>
+          <p:cNvSpPr txBox="1"/>
+          <p:nvPr/>
+        </p:nvSpPr>
+        <p:spPr>
+          <a:xfrm>
+            <a:off x="1005840" y="1828800"/>
+            <a:ext cx="2064944" cy="1463040"/>
+          </a:xfrm>
+          <a:prstGeom prst="rect">
+            <a:avLst/>
+          </a:prstGeom>
+          <a:noFill/>
+          <a:ln/>
+        </p:spPr>
+        <p:txBody>
+          <a:bodyPr wrap="square" lIns="0" tIns="0" rIns="0" bIns="0" rtlCol="0" anchor="ctr"/>
+          <a:lstStyle/>
+          <a:p>
+            <a:pPr rtl="1" algn="ctr" indent="0" marL="0">
+              <a:buNone/>
+            </a:pPr>
+            <a:r>
+              <a:rPr lang="he-IL" altLang="en-US" sz="6400" b="1" dirty="0">
+                <a:solidFill>
+                  <a:srgbClr val="D9B78C"/>
+                </a:solidFill>
+                <a:latin typeface="Arial" pitchFamily="34" charset="0"/>
+                <a:ea typeface="Arial" pitchFamily="34" charset="-122"/>
+                <a:cs typeface="Arial" pitchFamily="34" charset="-120"/>
+              </a:rPr>
+              <a:t>2</a:t>
+            </a:r>
+            <a:endParaRPr lang="he-IL" sz="6400" dirty="0"/>
+          </a:p>
+        </p:txBody>
+      </p:sp>
+      <p:sp>
+        <p:nvSpPr>
+          <p:cNvPr id="13" name="Text 11"/>
+          <p:cNvSpPr txBox="1"/>
+          <p:nvPr/>
+        </p:nvSpPr>
+        <p:spPr>
+          <a:xfrm>
+            <a:off x="1097280" y="3383280"/>
+            <a:ext cx="1882064" cy="1097280"/>
+          </a:xfrm>
+          <a:prstGeom prst="rect">
+            <a:avLst/>
+          </a:prstGeom>
+          <a:noFill/>
+          <a:ln/>
+        </p:spPr>
+        <p:txBody>
+          <a:bodyPr wrap="square" lIns="0" tIns="0" rIns="0" bIns="0" rtlCol="0" anchor="t"/>
+          <a:lstStyle/>
+          <a:p>
+            <a:pPr rtl="1" algn="ctr" indent="0" marL="0">
+              <a:buNone/>
+            </a:pPr>
+            <a:r>
+              <a:rPr lang="he-IL" altLang="en-US" sz="1600" dirty="0">
+                <a:solidFill>
+                  <a:srgbClr val="FFFFFF"/>
+                </a:solidFill>
+                <a:latin typeface="Arial" pitchFamily="34" charset="0"/>
+                <a:ea typeface="Arial" pitchFamily="34" charset="-122"/>
+                <a:cs typeface="Arial" pitchFamily="34" charset="-120"/>
+              </a:rPr>
+              <a:t>פציעות: יד ועין</a:t>
+            </a:r>
+            <a:endParaRPr lang="he-IL" sz="1600" dirty="0"/>
+          </a:p>
+        </p:txBody>
+      </p:sp>
+      <p:sp>
+        <p:nvSpPr>
+          <p:cNvPr id="14" name="Text 12"/>
+          <p:cNvSpPr txBox="1"/>
+          <p:nvPr/>
+        </p:nvSpPr>
+        <p:spPr>
+          <a:xfrm>
+            <a:off x="822960" y="5120640"/>
+            <a:ext cx="10545775" cy="822960"/>
+          </a:xfrm>
+          <a:prstGeom prst="rect">
+            <a:avLst/>
+          </a:prstGeom>
+          <a:noFill/>
+          <a:ln/>
+        </p:spPr>
+        <p:txBody>
+          <a:bodyPr wrap="square" lIns="0" tIns="0" rIns="0" bIns="0" rtlCol="0" anchor="t"/>
+          <a:lstStyle/>
+          <a:p>
+            <a:pPr rtl="1" algn="ctr" indent="0" marL="0">
+              <a:buNone/>
+            </a:pPr>
+            <a:r>
+              <a:rPr lang="he-IL" altLang="en-US" sz="1800" dirty="0">
+                <a:solidFill>
+                  <a:srgbClr val="A7ADB8"/>
+                </a:solidFill>
+                <a:latin typeface="Arial" pitchFamily="34" charset="0"/>
+                <a:ea typeface="Arial" pitchFamily="34" charset="-122"/>
+                <a:cs typeface="Arial" pitchFamily="34" charset="-120"/>
+              </a:rPr>
+              <a:t>הדבר הכי קשה אחרי השביעי: לא הפציעה. האובדן. הדברים שהם לא יספיקו לעשות, והמשפחות השכולות.</a:t>
+            </a:r>
+            <a:endParaRPr lang="he-IL" sz="1800" dirty="0"/>
+          </a:p>
+        </p:txBody>
+      </p:sp>
+      <p:sp>
+        <p:nvSpPr>
+          <p:cNvPr id="15" name="Text 13"/>
+          <p:cNvSpPr txBox="1"/>
+          <p:nvPr/>
+        </p:nvSpPr>
+        <p:spPr>
+          <a:xfrm>
+            <a:off x="457200" y="6309360"/>
+            <a:ext cx="548640" cy="274320"/>
+          </a:xfrm>
+          <a:prstGeom prst="rect">
+            <a:avLst/>
+          </a:prstGeom>
+          <a:noFill/>
+          <a:ln/>
+        </p:spPr>
+        <p:txBody>
+          <a:bodyPr wrap="square" lIns="0" tIns="0" rIns="0" bIns="0" rtlCol="0" anchor="t"/>
+          <a:lstStyle/>
+          <a:p>
+            <a:pPr rtl="1" algn="l" indent="0" marL="0">
+              <a:buNone/>
+            </a:pPr>
+            <a:r>
+              <a:rPr lang="he-IL" altLang="en-US" sz="1000" dirty="0">
+                <a:solidFill>
+                  <a:srgbClr val="A7ADB8"/>
+                </a:solidFill>
+                <a:latin typeface="Arial" pitchFamily="34" charset="0"/>
+                <a:ea typeface="Arial" pitchFamily="34" charset="-122"/>
+                <a:cs typeface="Arial" pitchFamily="34" charset="-120"/>
+              </a:rPr>
+              <a:t>17</a:t>
+            </a:r>
+            <a:endParaRPr lang="he-IL" sz="1000" dirty="0"/>
+          </a:p>
+        </p:txBody>
+      </p:sp>
+    </p:spTree>
+  </p:cSld>
+  <p:clrMapOvr>
+    <a:masterClrMapping/>
+  </p:clrMapOvr>
+</p:sld>
+</file>
+
+<file path=ppt/slides/slide18.xml><?xml version="1.0" encoding="utf-8"?>
+<p:sld xmlns:a="http://schemas.openxmlformats.org/drawingml/2006/main" xmlns:r="http://schemas.openxmlformats.org/officeDocument/2006/relationships" xmlns:p="http://schemas.openxmlformats.org/presentationml/2006/main">
+  <p:cSld name="Slide 18">
     <p:bg>
       <p:bgPr>
         <a:solidFill>
@@ -6371,284 +7122,6 @@
               <a:rPr lang="he-IL" altLang="en-US" sz="1000" dirty="0">
                 <a:solidFill>
                   <a:srgbClr val="6B7280"/>
-                </a:solidFill>
-                <a:latin typeface="Arial" pitchFamily="34" charset="0"/>
-                <a:ea typeface="Arial" pitchFamily="34" charset="-122"/>
-                <a:cs typeface="Arial" pitchFamily="34" charset="-120"/>
-              </a:rPr>
-              <a:t>17</a:t>
-            </a:r>
-            <a:endParaRPr lang="he-IL" sz="1000" dirty="0"/>
-          </a:p>
-        </p:txBody>
-      </p:sp>
-    </p:spTree>
-  </p:cSld>
-  <p:clrMapOvr>
-    <a:masterClrMapping/>
-  </p:clrMapOvr>
-</p:sld>
-</file>
-
-<file path=ppt/slides/slide18.xml><?xml version="1.0" encoding="utf-8"?>
-<p:sld xmlns:a="http://schemas.openxmlformats.org/drawingml/2006/main" xmlns:r="http://schemas.openxmlformats.org/officeDocument/2006/relationships" xmlns:p="http://schemas.openxmlformats.org/presentationml/2006/main">
-  <p:cSld name="Slide 18">
-    <p:bg>
-      <p:bgPr>
-        <a:solidFill>
-          <a:srgbClr val="0E1116"/>
-        </a:solidFill>
-      </p:bgPr>
-    </p:bg>
-    <p:spTree>
-      <p:nvGrpSpPr>
-        <p:cNvPr id="1" name=""/>
-        <p:cNvGrpSpPr/>
-        <p:nvPr/>
-      </p:nvGrpSpPr>
-      <p:grpSpPr>
-        <a:xfrm>
-          <a:off x="0" y="0"/>
-          <a:ext cx="0" cy="0"/>
-          <a:chOff x="0" y="0"/>
-          <a:chExt cx="0" cy="0"/>
-        </a:xfrm>
-      </p:grpSpPr>
-      <p:sp>
-        <p:nvSpPr>
-          <p:cNvPr id="2" name="Text 0"/>
-          <p:cNvSpPr txBox="1"/>
-          <p:nvPr/>
-        </p:nvSpPr>
-        <p:spPr>
-          <a:xfrm>
-            <a:off x="914400" y="1463040"/>
-            <a:ext cx="10362895" cy="914400"/>
-          </a:xfrm>
-          <a:prstGeom prst="rect">
-            <a:avLst/>
-          </a:prstGeom>
-          <a:noFill/>
-          <a:ln/>
-        </p:spPr>
-        <p:txBody>
-          <a:bodyPr wrap="square" lIns="0" tIns="0" rIns="0" bIns="0" rtlCol="0" anchor="t"/>
-          <a:lstStyle/>
-          <a:p>
-            <a:pPr rtl="1" algn="ctr" indent="0" marL="0">
-              <a:buNone/>
-            </a:pPr>
-            <a:r>
-              <a:rPr lang="he-IL" altLang="en-US" sz="4000" b="1" dirty="0">
-                <a:solidFill>
-                  <a:srgbClr val="A7ADB8"/>
-                </a:solidFill>
-                <a:latin typeface="Arial" pitchFamily="34" charset="0"/>
-                <a:ea typeface="Arial" pitchFamily="34" charset="-122"/>
-                <a:cs typeface="Arial" pitchFamily="34" charset="-120"/>
-              </a:rPr>
-              <a:t>עברתי תהליך ארוך</a:t>
-            </a:r>
-            <a:endParaRPr lang="he-IL" sz="4000" dirty="0"/>
-          </a:p>
-        </p:txBody>
-      </p:sp>
-      <p:sp>
-        <p:nvSpPr>
-          <p:cNvPr id="3" name="Text 1"/>
-          <p:cNvSpPr txBox="1"/>
-          <p:nvPr/>
-        </p:nvSpPr>
-        <p:spPr>
-          <a:xfrm>
-            <a:off x="914400" y="2468880"/>
-            <a:ext cx="10362895" cy="914400"/>
-          </a:xfrm>
-          <a:prstGeom prst="rect">
-            <a:avLst/>
-          </a:prstGeom>
-          <a:noFill/>
-          <a:ln/>
-        </p:spPr>
-        <p:txBody>
-          <a:bodyPr wrap="square" lIns="0" tIns="0" rIns="0" bIns="0" rtlCol="0" anchor="t"/>
-          <a:lstStyle/>
-          <a:p>
-            <a:pPr rtl="1" algn="ctr" indent="0" marL="0">
-              <a:buNone/>
-            </a:pPr>
-            <a:r>
-              <a:rPr lang="he-IL" altLang="en-US" sz="4000" b="1" dirty="0">
-                <a:solidFill>
-                  <a:srgbClr val="FFFFFF"/>
-                </a:solidFill>
-                <a:latin typeface="Arial" pitchFamily="34" charset="0"/>
-                <a:ea typeface="Arial" pitchFamily="34" charset="-122"/>
-                <a:cs typeface="Arial" pitchFamily="34" charset="-120"/>
-              </a:rPr>
-              <a:t>עד שהבנתי כמה משמעותיים הקשרים בחיים שלי.</a:t>
-            </a:r>
-            <a:endParaRPr lang="he-IL" sz="4000" dirty="0"/>
-          </a:p>
-        </p:txBody>
-      </p:sp>
-      <p:sp>
-        <p:nvSpPr>
-          <p:cNvPr id="4" name="Text 2"/>
-          <p:cNvSpPr txBox="1"/>
-          <p:nvPr/>
-        </p:nvSpPr>
-        <p:spPr>
-          <a:xfrm>
-            <a:off x="914400" y="3657600"/>
-            <a:ext cx="10362895" cy="914400"/>
-          </a:xfrm>
-          <a:prstGeom prst="rect">
-            <a:avLst/>
-          </a:prstGeom>
-          <a:noFill/>
-          <a:ln/>
-        </p:spPr>
-        <p:txBody>
-          <a:bodyPr wrap="square" lIns="0" tIns="0" rIns="0" bIns="0" rtlCol="0" anchor="t"/>
-          <a:lstStyle/>
-          <a:p>
-            <a:pPr rtl="1" algn="ctr" indent="0" marL="0">
-              <a:buNone/>
-            </a:pPr>
-            <a:r>
-              <a:rPr lang="he-IL" altLang="en-US" sz="4400" b="1" dirty="0">
-                <a:solidFill>
-                  <a:srgbClr val="D9B78C"/>
-                </a:solidFill>
-                <a:latin typeface="Arial" pitchFamily="34" charset="0"/>
-                <a:ea typeface="Arial" pitchFamily="34" charset="-122"/>
-                <a:cs typeface="Arial" pitchFamily="34" charset="-120"/>
-              </a:rPr>
-              <a:t>היום אני הרבה יותר פתוח.</a:t>
-            </a:r>
-            <a:endParaRPr lang="he-IL" sz="4400" dirty="0"/>
-          </a:p>
-        </p:txBody>
-      </p:sp>
-      <p:sp>
-        <p:nvSpPr>
-          <p:cNvPr id="5" name="Shape 3"/>
-          <p:cNvSpPr/>
-          <p:nvPr/>
-        </p:nvSpPr>
-        <p:spPr>
-          <a:xfrm>
-            <a:off x="4023360" y="4754880"/>
-            <a:ext cx="4114800" cy="1737360"/>
-          </a:xfrm>
-          <a:prstGeom prst="roundRect">
-            <a:avLst>
-              <a:gd name="adj" fmla="val 7895"/>
-            </a:avLst>
-          </a:prstGeom>
-          <a:solidFill>
-            <a:srgbClr val="171C24"/>
-          </a:solidFill>
-          <a:ln w="15875">
-            <a:solidFill>
-              <a:srgbClr val="3A4150"/>
-            </a:solidFill>
-            <a:prstDash val="dash"/>
-          </a:ln>
-        </p:spPr>
-      </p:sp>
-      <p:pic>
-        <p:nvPicPr>
-          <p:cNvPr id="6" name="Image 0" descr="preencoded.png">    </p:cNvPr>
-          <p:cNvPicPr>
-            <a:picLocks noChangeAspect="1"/>
-          </p:cNvPicPr>
-          <p:nvPr/>
-        </p:nvPicPr>
-        <p:blipFill>
-          <a:blip r:embed="rId1"/>
-          <a:stretch>
-            <a:fillRect/>
-          </a:stretch>
-        </p:blipFill>
-        <p:spPr>
-          <a:xfrm>
-            <a:off x="5806440" y="5029200"/>
-            <a:ext cx="548640" cy="548640"/>
-          </a:xfrm>
-          <a:prstGeom prst="rect">
-            <a:avLst/>
-          </a:prstGeom>
-        </p:spPr>
-      </p:pic>
-      <p:sp>
-        <p:nvSpPr>
-          <p:cNvPr id="7" name="Text 4"/>
-          <p:cNvSpPr txBox="1"/>
-          <p:nvPr/>
-        </p:nvSpPr>
-        <p:spPr>
-          <a:xfrm>
-            <a:off x="4297680" y="5852160"/>
-            <a:ext cx="3566160" cy="640080"/>
-          </a:xfrm>
-          <a:prstGeom prst="rect">
-            <a:avLst/>
-          </a:prstGeom>
-          <a:noFill/>
-          <a:ln/>
-        </p:spPr>
-        <p:txBody>
-          <a:bodyPr wrap="square" lIns="0" tIns="0" rIns="0" bIns="0" rtlCol="0" anchor="t"/>
-          <a:lstStyle/>
-          <a:p>
-            <a:pPr rtl="1" algn="ctr" indent="0" marL="0">
-              <a:buNone/>
-            </a:pPr>
-            <a:r>
-              <a:rPr lang="he-IL" altLang="en-US" sz="1200" dirty="0">
-                <a:solidFill>
-                  <a:srgbClr val="A7ADB8"/>
-                </a:solidFill>
-                <a:latin typeface="Arial" pitchFamily="34" charset="0"/>
-                <a:ea typeface="Arial" pitchFamily="34" charset="-122"/>
-                <a:cs typeface="Arial" pitchFamily="34" charset="-120"/>
-              </a:rPr>
-              <a:t>תמונה: חנוך עם חברים / משפחה – היום</a:t>
-            </a:r>
-            <a:endParaRPr lang="he-IL" sz="1200" dirty="0"/>
-          </a:p>
-        </p:txBody>
-      </p:sp>
-      <p:sp>
-        <p:nvSpPr>
-          <p:cNvPr id="8" name="Text 5"/>
-          <p:cNvSpPr txBox="1"/>
-          <p:nvPr/>
-        </p:nvSpPr>
-        <p:spPr>
-          <a:xfrm>
-            <a:off x="457200" y="6309360"/>
-            <a:ext cx="548640" cy="274320"/>
-          </a:xfrm>
-          <a:prstGeom prst="rect">
-            <a:avLst/>
-          </a:prstGeom>
-          <a:noFill/>
-          <a:ln/>
-        </p:spPr>
-        <p:txBody>
-          <a:bodyPr wrap="square" lIns="0" tIns="0" rIns="0" bIns="0" rtlCol="0" anchor="t"/>
-          <a:lstStyle/>
-          <a:p>
-            <a:pPr rtl="1" algn="l" indent="0" marL="0">
-              <a:buNone/>
-            </a:pPr>
-            <a:r>
-              <a:rPr lang="he-IL" altLang="en-US" sz="1000" dirty="0">
-                <a:solidFill>
-                  <a:srgbClr val="A7ADB8"/>
                 </a:solidFill>
                 <a:latin typeface="Arial" pitchFamily="34" charset="0"/>
                 <a:ea typeface="Arial" pitchFamily="34" charset="-122"/>
@@ -6694,14 +7167,104 @@
       </p:grpSpPr>
       <p:sp>
         <p:nvSpPr>
-          <p:cNvPr id="2" name="Text 0"/>
-          <p:cNvSpPr txBox="1"/>
-          <p:nvPr/>
-        </p:nvSpPr>
-        <p:spPr>
-          <a:xfrm>
-            <a:off x="822960" y="1280160"/>
-            <a:ext cx="10545775" cy="1463040"/>
+          <p:cNvPr id="2" name="Shape 0"/>
+          <p:cNvSpPr/>
+          <p:nvPr/>
+        </p:nvSpPr>
+        <p:spPr>
+          <a:xfrm>
+            <a:off x="822960" y="822960"/>
+            <a:ext cx="4754880" cy="5212080"/>
+          </a:xfrm>
+          <a:prstGeom prst="roundRect">
+            <a:avLst>
+              <a:gd name="adj" fmla="val 2885"/>
+            </a:avLst>
+          </a:prstGeom>
+          <a:solidFill>
+            <a:srgbClr val="171C24"/>
+          </a:solidFill>
+          <a:ln w="15875">
+            <a:solidFill>
+              <a:srgbClr val="3A4150"/>
+            </a:solidFill>
+            <a:prstDash val="dash"/>
+          </a:ln>
+        </p:spPr>
+      </p:sp>
+      <p:pic>
+        <p:nvPicPr>
+          <p:cNvPr id="3" name="Image 0" descr="preencoded.png">    </p:cNvPr>
+          <p:cNvPicPr>
+            <a:picLocks noChangeAspect="1"/>
+          </p:cNvPicPr>
+          <p:nvPr/>
+        </p:nvPicPr>
+        <p:blipFill>
+          <a:blip r:embed="rId1"/>
+          <a:stretch>
+            <a:fillRect/>
+          </a:stretch>
+        </p:blipFill>
+        <p:spPr>
+          <a:xfrm>
+            <a:off x="2926080" y="2834640"/>
+            <a:ext cx="548640" cy="548640"/>
+          </a:xfrm>
+          <a:prstGeom prst="rect">
+            <a:avLst/>
+          </a:prstGeom>
+        </p:spPr>
+      </p:pic>
+      <p:sp>
+        <p:nvSpPr>
+          <p:cNvPr id="4" name="Text 1"/>
+          <p:cNvSpPr txBox="1"/>
+          <p:nvPr/>
+        </p:nvSpPr>
+        <p:spPr>
+          <a:xfrm>
+            <a:off x="1097280" y="3657600"/>
+            <a:ext cx="4206240" cy="640080"/>
+          </a:xfrm>
+          <a:prstGeom prst="rect">
+            <a:avLst/>
+          </a:prstGeom>
+          <a:noFill/>
+          <a:ln/>
+        </p:spPr>
+        <p:txBody>
+          <a:bodyPr wrap="square" lIns="0" tIns="0" rIns="0" bIns="0" rtlCol="0" anchor="t"/>
+          <a:lstStyle/>
+          <a:p>
+            <a:pPr rtl="1" algn="ctr" indent="0" marL="0">
+              <a:buNone/>
+            </a:pPr>
+            <a:r>
+              <a:rPr lang="he-IL" altLang="en-US" sz="1200" dirty="0">
+                <a:solidFill>
+                  <a:srgbClr val="A7ADB8"/>
+                </a:solidFill>
+                <a:latin typeface="Arial" pitchFamily="34" charset="0"/>
+                <a:ea typeface="Arial" pitchFamily="34" charset="-122"/>
+                <a:cs typeface="Arial" pitchFamily="34" charset="-120"/>
+              </a:rPr>
+              <a:t>תמונה: מהריטריט בפנמה – האנשים שפגשת שם</a:t>
+            </a:r>
+            <a:endParaRPr lang="he-IL" sz="1200" dirty="0"/>
+          </a:p>
+        </p:txBody>
+      </p:sp>
+      <p:sp>
+        <p:nvSpPr>
+          <p:cNvPr id="5" name="Text 2"/>
+          <p:cNvSpPr txBox="1"/>
+          <p:nvPr/>
+        </p:nvSpPr>
+        <p:spPr>
+          <a:xfrm>
+            <a:off x="6035040" y="1188720"/>
+            <a:ext cx="5333695" cy="1005840"/>
           </a:xfrm>
           <a:prstGeom prst="rect">
             <a:avLst/>
@@ -6717,7 +7280,7 @@
               <a:buNone/>
             </a:pPr>
             <a:r>
-              <a:rPr lang="he-IL" altLang="en-US" sz="9600" b="1" dirty="0">
+              <a:rPr lang="he-IL" altLang="en-US" sz="6000" b="1" dirty="0">
                 <a:solidFill>
                   <a:srgbClr val="D9B78C"/>
                 </a:solidFill>
@@ -6725,22 +7288,22 @@
                 <a:ea typeface="Arial" pitchFamily="34" charset="-122"/>
                 <a:cs typeface="Arial" pitchFamily="34" charset="-120"/>
               </a:rPr>
-              <a:t>05</a:t>
-            </a:r>
-            <a:endParaRPr lang="he-IL" sz="9600" dirty="0"/>
-          </a:p>
-        </p:txBody>
-      </p:sp>
-      <p:sp>
-        <p:nvSpPr>
-          <p:cNvPr id="3" name="Text 1"/>
-          <p:cNvSpPr txBox="1"/>
-          <p:nvPr/>
-        </p:nvSpPr>
-        <p:spPr>
-          <a:xfrm>
-            <a:off x="822960" y="2926080"/>
-            <a:ext cx="10545775" cy="1097280"/>
+              <a:t>פנמה.</a:t>
+            </a:r>
+            <a:endParaRPr lang="he-IL" sz="6000" dirty="0"/>
+          </a:p>
+        </p:txBody>
+      </p:sp>
+      <p:sp>
+        <p:nvSpPr>
+          <p:cNvPr id="6" name="Text 3"/>
+          <p:cNvSpPr txBox="1"/>
+          <p:nvPr/>
+        </p:nvSpPr>
+        <p:spPr>
+          <a:xfrm>
+            <a:off x="6035040" y="2377440"/>
+            <a:ext cx="5333695" cy="1097280"/>
           </a:xfrm>
           <a:prstGeom prst="rect">
             <a:avLst/>
@@ -6756,7 +7319,7 @@
               <a:buNone/>
             </a:pPr>
             <a:r>
-              <a:rPr lang="he-IL" altLang="en-US" sz="3400" b="1" dirty="0">
+              <a:rPr lang="he-IL" altLang="en-US" sz="2600" b="1" dirty="0">
                 <a:solidFill>
                   <a:srgbClr val="FFFFFF"/>
                 </a:solidFill>
@@ -6764,22 +7327,22 @@
                 <a:ea typeface="Arial" pitchFamily="34" charset="-122"/>
                 <a:cs typeface="Arial" pitchFamily="34" charset="-120"/>
               </a:rPr>
-              <a:t>מה עושים כשהחיים לא חוזרים להיות מה שהיו?</a:t>
-            </a:r>
-            <a:endParaRPr lang="he-IL" sz="3400" dirty="0"/>
-          </a:p>
-        </p:txBody>
-      </p:sp>
-      <p:sp>
-        <p:nvSpPr>
-          <p:cNvPr id="4" name="Text 2"/>
-          <p:cNvSpPr txBox="1"/>
-          <p:nvPr/>
-        </p:nvSpPr>
-        <p:spPr>
-          <a:xfrm>
-            <a:off x="822960" y="4206240"/>
-            <a:ext cx="10545775" cy="1097280"/>
+              <a:t>בריטריט, רחוק מהכול, פגשתי אנשים ממש טובים.</a:t>
+            </a:r>
+            <a:endParaRPr lang="he-IL" sz="2600" dirty="0"/>
+          </a:p>
+        </p:txBody>
+      </p:sp>
+      <p:sp>
+        <p:nvSpPr>
+          <p:cNvPr id="7" name="Text 4"/>
+          <p:cNvSpPr txBox="1"/>
+          <p:nvPr/>
+        </p:nvSpPr>
+        <p:spPr>
+          <a:xfrm>
+            <a:off x="6035040" y="3474720"/>
+            <a:ext cx="5333695" cy="731520"/>
           </a:xfrm>
           <a:prstGeom prst="rect">
             <a:avLst/>
@@ -6795,7 +7358,46 @@
               <a:buNone/>
             </a:pPr>
             <a:r>
-              <a:rPr lang="he-IL" altLang="en-US" sz="2000" dirty="0">
+              <a:rPr lang="he-IL" altLang="en-US" sz="2600" b="1" dirty="0">
+                <a:solidFill>
+                  <a:srgbClr val="FFFFFF"/>
+                </a:solidFill>
+                <a:latin typeface="Arial" pitchFamily="34" charset="0"/>
+                <a:ea typeface="Arial" pitchFamily="34" charset="-122"/>
+                <a:cs typeface="Arial" pitchFamily="34" charset="-120"/>
+              </a:rPr>
+              <a:t>וראיתי שבאמת קיימים כאלה.</a:t>
+            </a:r>
+            <a:endParaRPr lang="he-IL" sz="2600" dirty="0"/>
+          </a:p>
+        </p:txBody>
+      </p:sp>
+      <p:sp>
+        <p:nvSpPr>
+          <p:cNvPr id="8" name="Text 5"/>
+          <p:cNvSpPr txBox="1"/>
+          <p:nvPr/>
+        </p:nvSpPr>
+        <p:spPr>
+          <a:xfrm>
+            <a:off x="6035040" y="4480560"/>
+            <a:ext cx="5333695" cy="1463040"/>
+          </a:xfrm>
+          <a:prstGeom prst="rect">
+            <a:avLst/>
+          </a:prstGeom>
+          <a:noFill/>
+          <a:ln/>
+        </p:spPr>
+        <p:txBody>
+          <a:bodyPr wrap="square" lIns="0" tIns="0" rIns="0" bIns="0" rtlCol="0" anchor="t"/>
+          <a:lstStyle/>
+          <a:p>
+            <a:pPr rtl="1" algn="r" indent="0" marL="0">
+              <a:buNone/>
+            </a:pPr>
+            <a:r>
+              <a:rPr lang="he-IL" altLang="en-US" sz="1600" dirty="0">
                 <a:solidFill>
                   <a:srgbClr val="A7ADB8"/>
                 </a:solidFill>
@@ -6803,15 +7405,15 @@
                 <a:ea typeface="Arial" pitchFamily="34" charset="-122"/>
                 <a:cs typeface="Arial" pitchFamily="34" charset="-120"/>
               </a:rPr>
-              <a:t>שלושה עקרונות.</a:t>
-            </a:r>
-            <a:endParaRPr lang="he-IL" sz="2000" dirty="0"/>
-          </a:p>
-        </p:txBody>
-      </p:sp>
-      <p:sp>
-        <p:nvSpPr>
-          <p:cNvPr id="5" name="Text 3"/>
+              <a:t>משם התחלתי לחזור לאנשים. עברתי תהליך ארוך עד שהבנתי כמה משמעותיים הקשרים בחיים שלי. היום אני הרבה יותר פתוח.</a:t>
+            </a:r>
+            <a:endParaRPr lang="he-IL" sz="1600" dirty="0"/>
+          </a:p>
+        </p:txBody>
+      </p:sp>
+      <p:sp>
+        <p:nvSpPr>
+          <p:cNvPr id="9" name="Text 6"/>
           <p:cNvSpPr txBox="1"/>
           <p:nvPr/>
         </p:nvSpPr>
@@ -7069,6 +7671,194 @@
     <p:bg>
       <p:bgPr>
         <a:solidFill>
+          <a:srgbClr val="0E1116"/>
+        </a:solidFill>
+      </p:bgPr>
+    </p:bg>
+    <p:spTree>
+      <p:nvGrpSpPr>
+        <p:cNvPr id="1" name=""/>
+        <p:cNvGrpSpPr/>
+        <p:nvPr/>
+      </p:nvGrpSpPr>
+      <p:grpSpPr>
+        <a:xfrm>
+          <a:off x="0" y="0"/>
+          <a:ext cx="0" cy="0"/>
+          <a:chOff x="0" y="0"/>
+          <a:chExt cx="0" cy="0"/>
+        </a:xfrm>
+      </p:grpSpPr>
+      <p:sp>
+        <p:nvSpPr>
+          <p:cNvPr id="2" name="Text 0"/>
+          <p:cNvSpPr txBox="1"/>
+          <p:nvPr/>
+        </p:nvSpPr>
+        <p:spPr>
+          <a:xfrm>
+            <a:off x="822960" y="1280160"/>
+            <a:ext cx="10545775" cy="1463040"/>
+          </a:xfrm>
+          <a:prstGeom prst="rect">
+            <a:avLst/>
+          </a:prstGeom>
+          <a:noFill/>
+          <a:ln/>
+        </p:spPr>
+        <p:txBody>
+          <a:bodyPr wrap="square" lIns="0" tIns="0" rIns="0" bIns="0" rtlCol="0" anchor="t"/>
+          <a:lstStyle/>
+          <a:p>
+            <a:pPr rtl="1" algn="r" indent="0" marL="0">
+              <a:buNone/>
+            </a:pPr>
+            <a:r>
+              <a:rPr lang="he-IL" altLang="en-US" sz="9600" b="1" dirty="0">
+                <a:solidFill>
+                  <a:srgbClr val="D9B78C"/>
+                </a:solidFill>
+                <a:latin typeface="Arial" pitchFamily="34" charset="0"/>
+                <a:ea typeface="Arial" pitchFamily="34" charset="-122"/>
+                <a:cs typeface="Arial" pitchFamily="34" charset="-120"/>
+              </a:rPr>
+              <a:t>05</a:t>
+            </a:r>
+            <a:endParaRPr lang="he-IL" sz="9600" dirty="0"/>
+          </a:p>
+        </p:txBody>
+      </p:sp>
+      <p:sp>
+        <p:nvSpPr>
+          <p:cNvPr id="3" name="Text 1"/>
+          <p:cNvSpPr txBox="1"/>
+          <p:nvPr/>
+        </p:nvSpPr>
+        <p:spPr>
+          <a:xfrm>
+            <a:off x="822960" y="2926080"/>
+            <a:ext cx="10545775" cy="1097280"/>
+          </a:xfrm>
+          <a:prstGeom prst="rect">
+            <a:avLst/>
+          </a:prstGeom>
+          <a:noFill/>
+          <a:ln/>
+        </p:spPr>
+        <p:txBody>
+          <a:bodyPr wrap="square" lIns="0" tIns="0" rIns="0" bIns="0" rtlCol="0" anchor="t"/>
+          <a:lstStyle/>
+          <a:p>
+            <a:pPr rtl="1" algn="r" indent="0" marL="0">
+              <a:buNone/>
+            </a:pPr>
+            <a:r>
+              <a:rPr lang="he-IL" altLang="en-US" sz="3400" b="1" dirty="0">
+                <a:solidFill>
+                  <a:srgbClr val="FFFFFF"/>
+                </a:solidFill>
+                <a:latin typeface="Arial" pitchFamily="34" charset="0"/>
+                <a:ea typeface="Arial" pitchFamily="34" charset="-122"/>
+                <a:cs typeface="Arial" pitchFamily="34" charset="-120"/>
+              </a:rPr>
+              <a:t>מה עושים כשהחיים לא חוזרים להיות מה שהיו?</a:t>
+            </a:r>
+            <a:endParaRPr lang="he-IL" sz="3400" dirty="0"/>
+          </a:p>
+        </p:txBody>
+      </p:sp>
+      <p:sp>
+        <p:nvSpPr>
+          <p:cNvPr id="4" name="Text 2"/>
+          <p:cNvSpPr txBox="1"/>
+          <p:nvPr/>
+        </p:nvSpPr>
+        <p:spPr>
+          <a:xfrm>
+            <a:off x="822960" y="4206240"/>
+            <a:ext cx="10545775" cy="1097280"/>
+          </a:xfrm>
+          <a:prstGeom prst="rect">
+            <a:avLst/>
+          </a:prstGeom>
+          <a:noFill/>
+          <a:ln/>
+        </p:spPr>
+        <p:txBody>
+          <a:bodyPr wrap="square" lIns="0" tIns="0" rIns="0" bIns="0" rtlCol="0" anchor="t"/>
+          <a:lstStyle/>
+          <a:p>
+            <a:pPr rtl="1" algn="r" indent="0" marL="0">
+              <a:buNone/>
+            </a:pPr>
+            <a:r>
+              <a:rPr lang="he-IL" altLang="en-US" sz="2000" dirty="0">
+                <a:solidFill>
+                  <a:srgbClr val="A7ADB8"/>
+                </a:solidFill>
+                <a:latin typeface="Arial" pitchFamily="34" charset="0"/>
+                <a:ea typeface="Arial" pitchFamily="34" charset="-122"/>
+                <a:cs typeface="Arial" pitchFamily="34" charset="-120"/>
+              </a:rPr>
+              <a:t>שלושה עקרונות.</a:t>
+            </a:r>
+            <a:endParaRPr lang="he-IL" sz="2000" dirty="0"/>
+          </a:p>
+        </p:txBody>
+      </p:sp>
+      <p:sp>
+        <p:nvSpPr>
+          <p:cNvPr id="5" name="Text 3"/>
+          <p:cNvSpPr txBox="1"/>
+          <p:nvPr/>
+        </p:nvSpPr>
+        <p:spPr>
+          <a:xfrm>
+            <a:off x="457200" y="6309360"/>
+            <a:ext cx="548640" cy="274320"/>
+          </a:xfrm>
+          <a:prstGeom prst="rect">
+            <a:avLst/>
+          </a:prstGeom>
+          <a:noFill/>
+          <a:ln/>
+        </p:spPr>
+        <p:txBody>
+          <a:bodyPr wrap="square" lIns="0" tIns="0" rIns="0" bIns="0" rtlCol="0" anchor="t"/>
+          <a:lstStyle/>
+          <a:p>
+            <a:pPr rtl="1" algn="l" indent="0" marL="0">
+              <a:buNone/>
+            </a:pPr>
+            <a:r>
+              <a:rPr lang="he-IL" altLang="en-US" sz="1000" dirty="0">
+                <a:solidFill>
+                  <a:srgbClr val="A7ADB8"/>
+                </a:solidFill>
+                <a:latin typeface="Arial" pitchFamily="34" charset="0"/>
+                <a:ea typeface="Arial" pitchFamily="34" charset="-122"/>
+                <a:cs typeface="Arial" pitchFamily="34" charset="-120"/>
+              </a:rPr>
+              <a:t>20</a:t>
+            </a:r>
+            <a:endParaRPr lang="he-IL" sz="1000" dirty="0"/>
+          </a:p>
+        </p:txBody>
+      </p:sp>
+    </p:spTree>
+  </p:cSld>
+  <p:clrMapOvr>
+    <a:masterClrMapping/>
+  </p:clrMapOvr>
+</p:sld>
+</file>
+
+<file path=ppt/slides/slide21.xml><?xml version="1.0" encoding="utf-8"?>
+<p:sld xmlns:a="http://schemas.openxmlformats.org/drawingml/2006/main" xmlns:r="http://schemas.openxmlformats.org/officeDocument/2006/relationships" xmlns:p="http://schemas.openxmlformats.org/presentationml/2006/main">
+  <p:cSld name="Slide 21">
+    <p:bg>
+      <p:bgPr>
+        <a:solidFill>
           <a:srgbClr val="F6F3EE"/>
         </a:solidFill>
       </p:bgPr>
@@ -7738,7 +8528,7 @@
                 <a:ea typeface="Arial" pitchFamily="34" charset="-122"/>
                 <a:cs typeface="Arial" pitchFamily="34" charset="-120"/>
               </a:rPr>
-              <a:t>20</a:t>
+              <a:t>21</a:t>
             </a:r>
             <a:endParaRPr lang="he-IL" sz="1000" dirty="0"/>
           </a:p>
@@ -7752,9 +8542,9 @@
 </p:sld>
 </file>
 
-<file path=ppt/slides/slide21.xml><?xml version="1.0" encoding="utf-8"?>
+<file path=ppt/slides/slide22.xml><?xml version="1.0" encoding="utf-8"?>
 <p:sld xmlns:a="http://schemas.openxmlformats.org/drawingml/2006/main" xmlns:r="http://schemas.openxmlformats.org/officeDocument/2006/relationships" xmlns:p="http://schemas.openxmlformats.org/presentationml/2006/main">
-  <p:cSld name="Slide 21">
+  <p:cSld name="Slide 22">
     <p:bg>
       <p:bgPr>
         <a:solidFill>
@@ -7926,7 +8716,7 @@
                 <a:ea typeface="Arial" pitchFamily="34" charset="-122"/>
                 <a:cs typeface="Arial" pitchFamily="34" charset="-120"/>
               </a:rPr>
-              <a:t>21</a:t>
+              <a:t>22</a:t>
             </a:r>
             <a:endParaRPr lang="he-IL" sz="1000" dirty="0"/>
           </a:p>
@@ -7940,9 +8730,9 @@
 </p:sld>
 </file>
 
-<file path=ppt/slides/slide22.xml><?xml version="1.0" encoding="utf-8"?>
+<file path=ppt/slides/slide23.xml><?xml version="1.0" encoding="utf-8"?>
 <p:sld xmlns:a="http://schemas.openxmlformats.org/drawingml/2006/main" xmlns:r="http://schemas.openxmlformats.org/officeDocument/2006/relationships" xmlns:p="http://schemas.openxmlformats.org/presentationml/2006/main">
-  <p:cSld name="Slide 22">
+  <p:cSld name="Slide 23">
     <p:bg>
       <p:bgPr>
         <a:solidFill>
@@ -8728,7 +9518,7 @@
                 <a:ea typeface="Arial" pitchFamily="34" charset="-122"/>
                 <a:cs typeface="Arial" pitchFamily="34" charset="-120"/>
               </a:rPr>
-              <a:t>מטרות</a:t>
+              <a:t>שאיפות</a:t>
             </a:r>
             <a:endParaRPr lang="he-IL" sz="1800" dirty="0"/>
           </a:p>
@@ -8767,7 +9557,7 @@
                 <a:ea typeface="Arial" pitchFamily="34" charset="-122"/>
                 <a:cs typeface="Arial" pitchFamily="34" charset="-120"/>
               </a:rPr>
-              <a:t>יעדים ברורים לשנה הקרובה – ולחמש הבאות.</a:t>
+              <a:t>יש לי שאיפות גדולות. אני לא יודע את כל הדרך – אני יודע מה הצעד הבא.</a:t>
             </a:r>
             <a:endParaRPr lang="he-IL" sz="1350" dirty="0"/>
           </a:p>
@@ -8955,284 +9745,6 @@
               <a:rPr lang="he-IL" altLang="en-US" sz="1000" dirty="0">
                 <a:solidFill>
                   <a:srgbClr val="6B7280"/>
-                </a:solidFill>
-                <a:latin typeface="Arial" pitchFamily="34" charset="0"/>
-                <a:ea typeface="Arial" pitchFamily="34" charset="-122"/>
-                <a:cs typeface="Arial" pitchFamily="34" charset="-120"/>
-              </a:rPr>
-              <a:t>22</a:t>
-            </a:r>
-            <a:endParaRPr lang="he-IL" sz="1000" dirty="0"/>
-          </a:p>
-        </p:txBody>
-      </p:sp>
-    </p:spTree>
-  </p:cSld>
-  <p:clrMapOvr>
-    <a:masterClrMapping/>
-  </p:clrMapOvr>
-</p:sld>
-</file>
-
-<file path=ppt/slides/slide23.xml><?xml version="1.0" encoding="utf-8"?>
-<p:sld xmlns:a="http://schemas.openxmlformats.org/drawingml/2006/main" xmlns:r="http://schemas.openxmlformats.org/officeDocument/2006/relationships" xmlns:p="http://schemas.openxmlformats.org/presentationml/2006/main">
-  <p:cSld name="Slide 23">
-    <p:bg>
-      <p:bgPr>
-        <a:solidFill>
-          <a:srgbClr val="0E1116"/>
-        </a:solidFill>
-      </p:bgPr>
-    </p:bg>
-    <p:spTree>
-      <p:nvGrpSpPr>
-        <p:cNvPr id="1" name=""/>
-        <p:cNvGrpSpPr/>
-        <p:nvPr/>
-      </p:nvGrpSpPr>
-      <p:grpSpPr>
-        <a:xfrm>
-          <a:off x="0" y="0"/>
-          <a:ext cx="0" cy="0"/>
-          <a:chOff x="0" y="0"/>
-          <a:chExt cx="0" cy="0"/>
-        </a:xfrm>
-      </p:grpSpPr>
-      <p:sp>
-        <p:nvSpPr>
-          <p:cNvPr id="2" name="Text 0"/>
-          <p:cNvSpPr txBox="1"/>
-          <p:nvPr/>
-        </p:nvSpPr>
-        <p:spPr>
-          <a:xfrm>
-            <a:off x="822960" y="731520"/>
-            <a:ext cx="10545775" cy="731520"/>
-          </a:xfrm>
-          <a:prstGeom prst="rect">
-            <a:avLst/>
-          </a:prstGeom>
-          <a:noFill/>
-          <a:ln/>
-        </p:spPr>
-        <p:txBody>
-          <a:bodyPr wrap="square" lIns="0" tIns="0" rIns="0" bIns="0" rtlCol="0" anchor="t"/>
-          <a:lstStyle/>
-          <a:p>
-            <a:pPr rtl="1" algn="ctr" indent="0" marL="0">
-              <a:buNone/>
-            </a:pPr>
-            <a:r>
-              <a:rPr lang="he-IL" altLang="en-US" sz="2800" b="1" dirty="0">
-                <a:solidFill>
-                  <a:srgbClr val="A7ADB8"/>
-                </a:solidFill>
-                <a:latin typeface="Arial" pitchFamily="34" charset="0"/>
-                <a:ea typeface="Arial" pitchFamily="34" charset="-122"/>
-                <a:cs typeface="Arial" pitchFamily="34" charset="-120"/>
-              </a:rPr>
-              <a:t>למה אני עומד פה?</a:t>
-            </a:r>
-            <a:endParaRPr lang="he-IL" sz="2800" dirty="0"/>
-          </a:p>
-        </p:txBody>
-      </p:sp>
-      <p:sp>
-        <p:nvSpPr>
-          <p:cNvPr id="3" name="Text 1"/>
-          <p:cNvSpPr txBox="1"/>
-          <p:nvPr/>
-        </p:nvSpPr>
-        <p:spPr>
-          <a:xfrm>
-            <a:off x="822960" y="1554480"/>
-            <a:ext cx="10545775" cy="640080"/>
-          </a:xfrm>
-          <a:prstGeom prst="rect">
-            <a:avLst/>
-          </a:prstGeom>
-          <a:noFill/>
-          <a:ln/>
-        </p:spPr>
-        <p:txBody>
-          <a:bodyPr wrap="square" lIns="0" tIns="0" rIns="0" bIns="0" rtlCol="0" anchor="t"/>
-          <a:lstStyle/>
-          <a:p>
-            <a:pPr rtl="1" algn="ctr" indent="0" marL="0">
-              <a:buNone/>
-            </a:pPr>
-            <a:r>
-              <a:rPr lang="he-IL" altLang="en-US" sz="2200" dirty="0">
-                <a:solidFill>
-                  <a:srgbClr val="FFFFFF"/>
-                </a:solidFill>
-                <a:latin typeface="Arial" pitchFamily="34" charset="0"/>
-                <a:ea typeface="Arial" pitchFamily="34" charset="-122"/>
-                <a:cs typeface="Arial" pitchFamily="34" charset="-120"/>
-              </a:rPr>
-              <a:t>לא בשביל שירחמו עליי.   לא בשביל ״איזה גיבור״.</a:t>
-            </a:r>
-            <a:endParaRPr lang="he-IL" sz="2200" dirty="0"/>
-          </a:p>
-        </p:txBody>
-      </p:sp>
-      <p:sp>
-        <p:nvSpPr>
-          <p:cNvPr id="4" name="Shape 2"/>
-          <p:cNvSpPr/>
-          <p:nvPr/>
-        </p:nvSpPr>
-        <p:spPr>
-          <a:xfrm>
-            <a:off x="1280160" y="2651760"/>
-            <a:ext cx="9631375" cy="2651760"/>
-          </a:xfrm>
-          <a:prstGeom prst="roundRect">
-            <a:avLst>
-              <a:gd name="adj" fmla="val 5172"/>
-            </a:avLst>
-          </a:prstGeom>
-          <a:solidFill>
-            <a:srgbClr val="171C24"/>
-          </a:solidFill>
-          <a:ln w="9525">
-            <a:solidFill>
-              <a:srgbClr val="2A313C"/>
-            </a:solidFill>
-            <a:prstDash val="solid"/>
-          </a:ln>
-        </p:spPr>
-      </p:sp>
-      <p:pic>
-        <p:nvPicPr>
-          <p:cNvPr id="5" name="Image 0" descr="preencoded.png">    </p:cNvPr>
-          <p:cNvPicPr>
-            <a:picLocks noChangeAspect="1"/>
-          </p:cNvPicPr>
-          <p:nvPr/>
-        </p:nvPicPr>
-        <p:blipFill>
-          <a:blip r:embed="rId1"/>
-          <a:stretch>
-            <a:fillRect/>
-          </a:stretch>
-        </p:blipFill>
-        <p:spPr>
-          <a:xfrm>
-            <a:off x="9905695" y="2926080"/>
-            <a:ext cx="640080" cy="640080"/>
-          </a:xfrm>
-          <a:prstGeom prst="rect">
-            <a:avLst/>
-          </a:prstGeom>
-        </p:spPr>
-      </p:pic>
-      <p:sp>
-        <p:nvSpPr>
-          <p:cNvPr id="6" name="Text 3"/>
-          <p:cNvSpPr txBox="1"/>
-          <p:nvPr/>
-        </p:nvSpPr>
-        <p:spPr>
-          <a:xfrm>
-            <a:off x="1737360" y="3108960"/>
-            <a:ext cx="7894015" cy="2011680"/>
-          </a:xfrm>
-          <a:prstGeom prst="rect">
-            <a:avLst/>
-          </a:prstGeom>
-          <a:noFill/>
-          <a:ln/>
-        </p:spPr>
-        <p:txBody>
-          <a:bodyPr wrap="square" lIns="0" tIns="0" rIns="0" bIns="0" rtlCol="0" anchor="ctr"/>
-          <a:lstStyle/>
-          <a:p>
-            <a:pPr rtl="1" algn="r" indent="0" marL="0">
-              <a:buNone/>
-            </a:pPr>
-            <a:r>
-              <a:rPr lang="he-IL" altLang="en-US" sz="2400" b="1" dirty="0">
-                <a:solidFill>
-                  <a:srgbClr val="FFFFFF"/>
-                </a:solidFill>
-                <a:latin typeface="Arial" pitchFamily="34" charset="0"/>
-                <a:ea typeface="Arial" pitchFamily="34" charset="-122"/>
-                <a:cs typeface="Arial" pitchFamily="34" charset="-120"/>
-              </a:rPr>
-              <a:t>״אני מספר לכם את הסיפור שלי כי אם בן אדם אחד כאן יחליט לקחת אחריות על החיים שלו בגלל משהו שהוא שמע ממני – היה שווה לי לספר אותו.״</a:t>
-            </a:r>
-            <a:endParaRPr lang="he-IL" sz="2400" dirty="0"/>
-          </a:p>
-        </p:txBody>
-      </p:sp>
-      <p:sp>
-        <p:nvSpPr>
-          <p:cNvPr id="7" name="Text 4"/>
-          <p:cNvSpPr txBox="1"/>
-          <p:nvPr/>
-        </p:nvSpPr>
-        <p:spPr>
-          <a:xfrm>
-            <a:off x="822960" y="5577840"/>
-            <a:ext cx="10545775" cy="548640"/>
-          </a:xfrm>
-          <a:prstGeom prst="rect">
-            <a:avLst/>
-          </a:prstGeom>
-          <a:noFill/>
-          <a:ln/>
-        </p:spPr>
-        <p:txBody>
-          <a:bodyPr wrap="square" lIns="0" tIns="0" rIns="0" bIns="0" rtlCol="0" anchor="t"/>
-          <a:lstStyle/>
-          <a:p>
-            <a:pPr rtl="1" algn="ctr" indent="0" marL="0">
-              <a:buNone/>
-            </a:pPr>
-            <a:r>
-              <a:rPr lang="he-IL" altLang="en-US" sz="1800" dirty="0">
-                <a:solidFill>
-                  <a:srgbClr val="D9B78C"/>
-                </a:solidFill>
-                <a:latin typeface="Arial" pitchFamily="34" charset="0"/>
-                <a:ea typeface="Arial" pitchFamily="34" charset="-122"/>
-                <a:cs typeface="Arial" pitchFamily="34" charset="-120"/>
-              </a:rPr>
-              <a:t>לא תמיד אפשר לבחור את הסיפור שקיבלת. אפשר לבחור מה אתה עושה איתו.</a:t>
-            </a:r>
-            <a:endParaRPr lang="he-IL" sz="1800" dirty="0"/>
-          </a:p>
-        </p:txBody>
-      </p:sp>
-      <p:sp>
-        <p:nvSpPr>
-          <p:cNvPr id="8" name="Text 5"/>
-          <p:cNvSpPr txBox="1"/>
-          <p:nvPr/>
-        </p:nvSpPr>
-        <p:spPr>
-          <a:xfrm>
-            <a:off x="457200" y="6309360"/>
-            <a:ext cx="548640" cy="274320"/>
-          </a:xfrm>
-          <a:prstGeom prst="rect">
-            <a:avLst/>
-          </a:prstGeom>
-          <a:noFill/>
-          <a:ln/>
-        </p:spPr>
-        <p:txBody>
-          <a:bodyPr wrap="square" lIns="0" tIns="0" rIns="0" bIns="0" rtlCol="0" anchor="t"/>
-          <a:lstStyle/>
-          <a:p>
-            <a:pPr rtl="1" algn="l" indent="0" marL="0">
-              <a:buNone/>
-            </a:pPr>
-            <a:r>
-              <a:rPr lang="he-IL" altLang="en-US" sz="1000" dirty="0">
-                <a:solidFill>
-                  <a:srgbClr val="A7ADB8"/>
                 </a:solidFill>
                 <a:latin typeface="Arial" pitchFamily="34" charset="0"/>
                 <a:ea typeface="Arial" pitchFamily="34" charset="-122"/>
@@ -9284,8 +9796,8 @@
         </p:nvSpPr>
         <p:spPr>
           <a:xfrm>
-            <a:off x="914400" y="1371600"/>
-            <a:ext cx="10362895" cy="731520"/>
+            <a:off x="822960" y="731520"/>
+            <a:ext cx="10545775" cy="731520"/>
           </a:xfrm>
           <a:prstGeom prst="rect">
             <a:avLst/>
@@ -9301,7 +9813,7 @@
               <a:buNone/>
             </a:pPr>
             <a:r>
-              <a:rPr lang="he-IL" altLang="en-US" sz="2800" dirty="0">
+              <a:rPr lang="he-IL" altLang="en-US" sz="2800" b="1" dirty="0">
                 <a:solidFill>
                   <a:srgbClr val="A7ADB8"/>
                 </a:solidFill>
@@ -9309,7 +9821,7 @@
                 <a:ea typeface="Arial" pitchFamily="34" charset="-122"/>
                 <a:cs typeface="Arial" pitchFamily="34" charset="-120"/>
               </a:rPr>
-              <a:t>אז חשבתי שההחלטה הכי חשובה שקיבלתי</a:t>
+              <a:t>למה אני עומד פה?</a:t>
             </a:r>
             <a:endParaRPr lang="he-IL" sz="2800" dirty="0"/>
           </a:p>
@@ -9323,8 +9835,8 @@
         </p:nvSpPr>
         <p:spPr>
           <a:xfrm>
-            <a:off x="914400" y="2103120"/>
-            <a:ext cx="10362895" cy="822960"/>
+            <a:off x="822960" y="1554480"/>
+            <a:ext cx="10545775" cy="640080"/>
           </a:xfrm>
           <a:prstGeom prst="rect">
             <a:avLst/>
@@ -9340,30 +9852,120 @@
               <a:buNone/>
             </a:pPr>
             <a:r>
-              <a:rPr lang="he-IL" altLang="en-US" sz="3400" b="1" dirty="0">
-                <a:solidFill>
-                  <a:srgbClr val="A7ADB8"/>
-                </a:solidFill>
-                <a:latin typeface="Arial" pitchFamily="34" charset="0"/>
-                <a:ea typeface="Arial" pitchFamily="34" charset="-122"/>
-                <a:cs typeface="Arial" pitchFamily="34" charset="-120"/>
-              </a:rPr>
-              <a:t>הייתה להמשיך להילחם.</a:t>
-            </a:r>
-            <a:endParaRPr lang="he-IL" sz="3400" dirty="0"/>
-          </a:p>
-        </p:txBody>
-      </p:sp>
-      <p:sp>
-        <p:nvSpPr>
-          <p:cNvPr id="4" name="Text 2"/>
-          <p:cNvSpPr txBox="1"/>
-          <p:nvPr/>
-        </p:nvSpPr>
-        <p:spPr>
-          <a:xfrm>
-            <a:off x="914400" y="3383280"/>
-            <a:ext cx="10362895" cy="731520"/>
+              <a:rPr lang="he-IL" altLang="en-US" sz="2200" dirty="0">
+                <a:solidFill>
+                  <a:srgbClr val="FFFFFF"/>
+                </a:solidFill>
+                <a:latin typeface="Arial" pitchFamily="34" charset="0"/>
+                <a:ea typeface="Arial" pitchFamily="34" charset="-122"/>
+                <a:cs typeface="Arial" pitchFamily="34" charset="-120"/>
+              </a:rPr>
+              <a:t>לא בשביל שירחמו עליי.   לא בשביל ״איזה גיבור״.</a:t>
+            </a:r>
+            <a:endParaRPr lang="he-IL" sz="2200" dirty="0"/>
+          </a:p>
+        </p:txBody>
+      </p:sp>
+      <p:sp>
+        <p:nvSpPr>
+          <p:cNvPr id="4" name="Shape 2"/>
+          <p:cNvSpPr/>
+          <p:nvPr/>
+        </p:nvSpPr>
+        <p:spPr>
+          <a:xfrm>
+            <a:off x="1280160" y="2651760"/>
+            <a:ext cx="9631375" cy="2651760"/>
+          </a:xfrm>
+          <a:prstGeom prst="roundRect">
+            <a:avLst>
+              <a:gd name="adj" fmla="val 5172"/>
+            </a:avLst>
+          </a:prstGeom>
+          <a:solidFill>
+            <a:srgbClr val="171C24"/>
+          </a:solidFill>
+          <a:ln w="9525">
+            <a:solidFill>
+              <a:srgbClr val="2A313C"/>
+            </a:solidFill>
+            <a:prstDash val="solid"/>
+          </a:ln>
+        </p:spPr>
+      </p:sp>
+      <p:pic>
+        <p:nvPicPr>
+          <p:cNvPr id="5" name="Image 0" descr="preencoded.png">    </p:cNvPr>
+          <p:cNvPicPr>
+            <a:picLocks noChangeAspect="1"/>
+          </p:cNvPicPr>
+          <p:nvPr/>
+        </p:nvPicPr>
+        <p:blipFill>
+          <a:blip r:embed="rId1"/>
+          <a:stretch>
+            <a:fillRect/>
+          </a:stretch>
+        </p:blipFill>
+        <p:spPr>
+          <a:xfrm>
+            <a:off x="9905695" y="2926080"/>
+            <a:ext cx="640080" cy="640080"/>
+          </a:xfrm>
+          <a:prstGeom prst="rect">
+            <a:avLst/>
+          </a:prstGeom>
+        </p:spPr>
+      </p:pic>
+      <p:sp>
+        <p:nvSpPr>
+          <p:cNvPr id="6" name="Text 3"/>
+          <p:cNvSpPr txBox="1"/>
+          <p:nvPr/>
+        </p:nvSpPr>
+        <p:spPr>
+          <a:xfrm>
+            <a:off x="1737360" y="3108960"/>
+            <a:ext cx="7894015" cy="2011680"/>
+          </a:xfrm>
+          <a:prstGeom prst="rect">
+            <a:avLst/>
+          </a:prstGeom>
+          <a:noFill/>
+          <a:ln/>
+        </p:spPr>
+        <p:txBody>
+          <a:bodyPr wrap="square" lIns="0" tIns="0" rIns="0" bIns="0" rtlCol="0" anchor="ctr"/>
+          <a:lstStyle/>
+          <a:p>
+            <a:pPr rtl="1" algn="r" indent="0" marL="0">
+              <a:buNone/>
+            </a:pPr>
+            <a:r>
+              <a:rPr lang="he-IL" altLang="en-US" sz="2400" b="1" dirty="0">
+                <a:solidFill>
+                  <a:srgbClr val="FFFFFF"/>
+                </a:solidFill>
+                <a:latin typeface="Arial" pitchFamily="34" charset="0"/>
+                <a:ea typeface="Arial" pitchFamily="34" charset="-122"/>
+                <a:cs typeface="Arial" pitchFamily="34" charset="-120"/>
+              </a:rPr>
+              <a:t>״אני מספר לכם את הסיפור שלי כי אם בן אדם אחד כאן יחליט לקחת אחריות על החיים שלו בגלל משהו שהוא שמע ממני – היה שווה לי לספר אותו.״</a:t>
+            </a:r>
+            <a:endParaRPr lang="he-IL" sz="2400" dirty="0"/>
+          </a:p>
+        </p:txBody>
+      </p:sp>
+      <p:sp>
+        <p:nvSpPr>
+          <p:cNvPr id="7" name="Text 4"/>
+          <p:cNvSpPr txBox="1"/>
+          <p:nvPr/>
+        </p:nvSpPr>
+        <p:spPr>
+          <a:xfrm>
+            <a:off x="822960" y="5577840"/>
+            <a:ext cx="10545775" cy="548640"/>
           </a:xfrm>
           <a:prstGeom prst="rect">
             <a:avLst/>
@@ -9379,46 +9981,7 @@
               <a:buNone/>
             </a:pPr>
             <a:r>
-              <a:rPr lang="he-IL" altLang="en-US" sz="2800" dirty="0">
-                <a:solidFill>
-                  <a:srgbClr val="FFFFFF"/>
-                </a:solidFill>
-                <a:latin typeface="Arial" pitchFamily="34" charset="0"/>
-                <a:ea typeface="Arial" pitchFamily="34" charset="-122"/>
-                <a:cs typeface="Arial" pitchFamily="34" charset="-120"/>
-              </a:rPr>
-              <a:t>היום אני מבין שההחלטה החשובה באמת הייתה</a:t>
-            </a:r>
-            <a:endParaRPr lang="he-IL" sz="2800" dirty="0"/>
-          </a:p>
-        </p:txBody>
-      </p:sp>
-      <p:sp>
-        <p:nvSpPr>
-          <p:cNvPr id="5" name="Text 3"/>
-          <p:cNvSpPr txBox="1"/>
-          <p:nvPr/>
-        </p:nvSpPr>
-        <p:spPr>
-          <a:xfrm>
-            <a:off x="914400" y="4114800"/>
-            <a:ext cx="10362895" cy="1005840"/>
-          </a:xfrm>
-          <a:prstGeom prst="rect">
-            <a:avLst/>
-          </a:prstGeom>
-          <a:noFill/>
-          <a:ln/>
-        </p:spPr>
-        <p:txBody>
-          <a:bodyPr wrap="square" lIns="0" tIns="0" rIns="0" bIns="0" rtlCol="0" anchor="t"/>
-          <a:lstStyle/>
-          <a:p>
-            <a:pPr rtl="1" algn="ctr" indent="0" marL="0">
-              <a:buNone/>
-            </a:pPr>
-            <a:r>
-              <a:rPr lang="he-IL" altLang="en-US" sz="4200" b="1" dirty="0">
+              <a:rPr lang="he-IL" altLang="en-US" sz="1800" dirty="0">
                 <a:solidFill>
                   <a:srgbClr val="D9B78C"/>
                 </a:solidFill>
@@ -9426,15 +9989,15 @@
                 <a:ea typeface="Arial" pitchFamily="34" charset="-122"/>
                 <a:cs typeface="Arial" pitchFamily="34" charset="-120"/>
               </a:rPr>
-              <a:t>מה אני עושה אחרי שהמלחמה נגמרה.</a:t>
-            </a:r>
-            <a:endParaRPr lang="he-IL" sz="4200" dirty="0"/>
-          </a:p>
-        </p:txBody>
-      </p:sp>
-      <p:sp>
-        <p:nvSpPr>
-          <p:cNvPr id="6" name="Text 4"/>
+              <a:t>לא תמיד אפשר לבחור את הסיפור שקיבלת. אפשר לבחור מה אתה עושה איתו.</a:t>
+            </a:r>
+            <a:endParaRPr lang="he-IL" sz="1800" dirty="0"/>
+          </a:p>
+        </p:txBody>
+      </p:sp>
+      <p:sp>
+        <p:nvSpPr>
+          <p:cNvPr id="8" name="Text 5"/>
           <p:cNvSpPr txBox="1"/>
           <p:nvPr/>
         </p:nvSpPr>
@@ -9482,6 +10045,963 @@
 <file path=ppt/slides/slide25.xml><?xml version="1.0" encoding="utf-8"?>
 <p:sld xmlns:a="http://schemas.openxmlformats.org/drawingml/2006/main" xmlns:r="http://schemas.openxmlformats.org/officeDocument/2006/relationships" xmlns:p="http://schemas.openxmlformats.org/presentationml/2006/main">
   <p:cSld name="Slide 25">
+    <p:bg>
+      <p:bgPr>
+        <a:solidFill>
+          <a:srgbClr val="F6F3EE"/>
+        </a:solidFill>
+      </p:bgPr>
+    </p:bg>
+    <p:spTree>
+      <p:nvGrpSpPr>
+        <p:cNvPr id="1" name=""/>
+        <p:cNvGrpSpPr/>
+        <p:nvPr/>
+      </p:nvGrpSpPr>
+      <p:grpSpPr>
+        <a:xfrm>
+          <a:off x="0" y="0"/>
+          <a:ext cx="0" cy="0"/>
+          <a:chOff x="0" y="0"/>
+          <a:chExt cx="0" cy="0"/>
+        </a:xfrm>
+      </p:grpSpPr>
+      <p:sp>
+        <p:nvSpPr>
+          <p:cNvPr id="2" name="Text 0"/>
+          <p:cNvSpPr txBox="1"/>
+          <p:nvPr/>
+        </p:nvSpPr>
+        <p:spPr>
+          <a:xfrm>
+            <a:off x="822960" y="822960"/>
+            <a:ext cx="10545775" cy="731520"/>
+          </a:xfrm>
+          <a:prstGeom prst="rect">
+            <a:avLst/>
+          </a:prstGeom>
+          <a:noFill/>
+          <a:ln/>
+        </p:spPr>
+        <p:txBody>
+          <a:bodyPr wrap="square" lIns="0" tIns="0" rIns="0" bIns="0" rtlCol="0" anchor="t"/>
+          <a:lstStyle/>
+          <a:p>
+            <a:pPr rtl="1" algn="ctr" indent="0" marL="0">
+              <a:buNone/>
+            </a:pPr>
+            <a:r>
+              <a:rPr lang="he-IL" altLang="en-US" sz="2800" b="1" dirty="0">
+                <a:solidFill>
+                  <a:srgbClr val="6B7280"/>
+                </a:solidFill>
+                <a:latin typeface="Arial" pitchFamily="34" charset="0"/>
+                <a:ea typeface="Arial" pitchFamily="34" charset="-122"/>
+                <a:cs typeface="Arial" pitchFamily="34" charset="-120"/>
+              </a:rPr>
+              <a:t>ומה עם המדינה?</a:t>
+            </a:r>
+            <a:endParaRPr lang="he-IL" sz="2800" dirty="0"/>
+          </a:p>
+        </p:txBody>
+      </p:sp>
+      <p:sp>
+        <p:nvSpPr>
+          <p:cNvPr id="3" name="Text 1"/>
+          <p:cNvSpPr txBox="1"/>
+          <p:nvPr/>
+        </p:nvSpPr>
+        <p:spPr>
+          <a:xfrm>
+            <a:off x="914400" y="1828800"/>
+            <a:ext cx="10362895" cy="1097280"/>
+          </a:xfrm>
+          <a:prstGeom prst="rect">
+            <a:avLst/>
+          </a:prstGeom>
+          <a:noFill/>
+          <a:ln/>
+        </p:spPr>
+        <p:txBody>
+          <a:bodyPr wrap="square" lIns="0" tIns="0" rIns="0" bIns="0" rtlCol="0" anchor="t"/>
+          <a:lstStyle/>
+          <a:p>
+            <a:pPr rtl="1" algn="ctr" indent="0" marL="0">
+              <a:buNone/>
+            </a:pPr>
+            <a:r>
+              <a:rPr lang="he-IL" altLang="en-US" sz="6000" b="1" dirty="0">
+                <a:solidFill>
+                  <a:srgbClr val="1C1F26"/>
+                </a:solidFill>
+                <a:latin typeface="Arial" pitchFamily="34" charset="0"/>
+                <a:ea typeface="Arial" pitchFamily="34" charset="-122"/>
+                <a:cs typeface="Arial" pitchFamily="34" charset="-120"/>
+              </a:rPr>
+              <a:t>אין בי כעס.</a:t>
+            </a:r>
+            <a:endParaRPr lang="he-IL" sz="6000" dirty="0"/>
+          </a:p>
+        </p:txBody>
+      </p:sp>
+      <p:sp>
+        <p:nvSpPr>
+          <p:cNvPr id="4" name="Text 2"/>
+          <p:cNvSpPr txBox="1"/>
+          <p:nvPr/>
+        </p:nvSpPr>
+        <p:spPr>
+          <a:xfrm>
+            <a:off x="914400" y="3017520"/>
+            <a:ext cx="10362895" cy="640080"/>
+          </a:xfrm>
+          <a:prstGeom prst="rect">
+            <a:avLst/>
+          </a:prstGeom>
+          <a:noFill/>
+          <a:ln/>
+        </p:spPr>
+        <p:txBody>
+          <a:bodyPr wrap="square" lIns="0" tIns="0" rIns="0" bIns="0" rtlCol="0" anchor="t"/>
+          <a:lstStyle/>
+          <a:p>
+            <a:pPr rtl="1" algn="ctr" indent="0" marL="0">
+              <a:buNone/>
+            </a:pPr>
+            <a:r>
+              <a:rPr lang="he-IL" altLang="en-US" sz="2200" dirty="0">
+                <a:solidFill>
+                  <a:srgbClr val="6B7280"/>
+                </a:solidFill>
+                <a:latin typeface="Arial" pitchFamily="34" charset="0"/>
+                <a:ea typeface="Arial" pitchFamily="34" charset="-122"/>
+                <a:cs typeface="Arial" pitchFamily="34" charset="-120"/>
+              </a:rPr>
+              <a:t>לא על ״ההפקרה״, לא על המדינה, לא על אף אחד.</a:t>
+            </a:r>
+            <a:endParaRPr lang="he-IL" sz="2200" dirty="0"/>
+          </a:p>
+        </p:txBody>
+      </p:sp>
+      <p:sp>
+        <p:nvSpPr>
+          <p:cNvPr id="5" name="Text 3"/>
+          <p:cNvSpPr txBox="1"/>
+          <p:nvPr/>
+        </p:nvSpPr>
+        <p:spPr>
+          <a:xfrm>
+            <a:off x="914400" y="4023360"/>
+            <a:ext cx="10362895" cy="822960"/>
+          </a:xfrm>
+          <a:prstGeom prst="rect">
+            <a:avLst/>
+          </a:prstGeom>
+          <a:noFill/>
+          <a:ln/>
+        </p:spPr>
+        <p:txBody>
+          <a:bodyPr wrap="square" lIns="0" tIns="0" rIns="0" bIns="0" rtlCol="0" anchor="t"/>
+          <a:lstStyle/>
+          <a:p>
+            <a:pPr rtl="1" algn="ctr" indent="0" marL="0">
+              <a:buNone/>
+            </a:pPr>
+            <a:r>
+              <a:rPr lang="he-IL" altLang="en-US" sz="3600" b="1" dirty="0">
+                <a:solidFill>
+                  <a:srgbClr val="B8925C"/>
+                </a:solidFill>
+                <a:latin typeface="Arial" pitchFamily="34" charset="0"/>
+                <a:ea typeface="Arial" pitchFamily="34" charset="-122"/>
+                <a:cs typeface="Arial" pitchFamily="34" charset="-120"/>
+              </a:rPr>
+              <a:t>אני מקווה שנתאחד כעם.</a:t>
+            </a:r>
+            <a:endParaRPr lang="he-IL" sz="3600" dirty="0"/>
+          </a:p>
+        </p:txBody>
+      </p:sp>
+      <p:sp>
+        <p:nvSpPr>
+          <p:cNvPr id="6" name="Text 4"/>
+          <p:cNvSpPr txBox="1"/>
+          <p:nvPr/>
+        </p:nvSpPr>
+        <p:spPr>
+          <a:xfrm>
+            <a:off x="914400" y="4846320"/>
+            <a:ext cx="10362895" cy="640080"/>
+          </a:xfrm>
+          <a:prstGeom prst="rect">
+            <a:avLst/>
+          </a:prstGeom>
+          <a:noFill/>
+          <a:ln/>
+        </p:spPr>
+        <p:txBody>
+          <a:bodyPr wrap="square" lIns="0" tIns="0" rIns="0" bIns="0" rtlCol="0" anchor="t"/>
+          <a:lstStyle/>
+          <a:p>
+            <a:pPr rtl="1" algn="ctr" indent="0" marL="0">
+              <a:buNone/>
+            </a:pPr>
+            <a:r>
+              <a:rPr lang="he-IL" altLang="en-US" sz="2000" dirty="0">
+                <a:solidFill>
+                  <a:srgbClr val="1C1F26"/>
+                </a:solidFill>
+                <a:latin typeface="Arial" pitchFamily="34" charset="0"/>
+                <a:ea typeface="Arial" pitchFamily="34" charset="-122"/>
+                <a:cs typeface="Arial" pitchFamily="34" charset="-120"/>
+              </a:rPr>
+              <a:t>זה הדבר הראשון שצריך לקרות בשביל שינוי אמיתי.</a:t>
+            </a:r>
+            <a:endParaRPr lang="he-IL" sz="2000" dirty="0"/>
+          </a:p>
+        </p:txBody>
+      </p:sp>
+      <p:sp>
+        <p:nvSpPr>
+          <p:cNvPr id="7" name="Text 5"/>
+          <p:cNvSpPr txBox="1"/>
+          <p:nvPr/>
+        </p:nvSpPr>
+        <p:spPr>
+          <a:xfrm>
+            <a:off x="457200" y="6309360"/>
+            <a:ext cx="548640" cy="274320"/>
+          </a:xfrm>
+          <a:prstGeom prst="rect">
+            <a:avLst/>
+          </a:prstGeom>
+          <a:noFill/>
+          <a:ln/>
+        </p:spPr>
+        <p:txBody>
+          <a:bodyPr wrap="square" lIns="0" tIns="0" rIns="0" bIns="0" rtlCol="0" anchor="t"/>
+          <a:lstStyle/>
+          <a:p>
+            <a:pPr rtl="1" algn="l" indent="0" marL="0">
+              <a:buNone/>
+            </a:pPr>
+            <a:r>
+              <a:rPr lang="he-IL" altLang="en-US" sz="1000" dirty="0">
+                <a:solidFill>
+                  <a:srgbClr val="6B7280"/>
+                </a:solidFill>
+                <a:latin typeface="Arial" pitchFamily="34" charset="0"/>
+                <a:ea typeface="Arial" pitchFamily="34" charset="-122"/>
+                <a:cs typeface="Arial" pitchFamily="34" charset="-120"/>
+              </a:rPr>
+              <a:t>25</a:t>
+            </a:r>
+            <a:endParaRPr lang="he-IL" sz="1000" dirty="0"/>
+          </a:p>
+        </p:txBody>
+      </p:sp>
+    </p:spTree>
+  </p:cSld>
+  <p:clrMapOvr>
+    <a:masterClrMapping/>
+  </p:clrMapOvr>
+</p:sld>
+</file>
+
+<file path=ppt/slides/slide26.xml><?xml version="1.0" encoding="utf-8"?>
+<p:sld xmlns:a="http://schemas.openxmlformats.org/drawingml/2006/main" xmlns:r="http://schemas.openxmlformats.org/officeDocument/2006/relationships" xmlns:p="http://schemas.openxmlformats.org/presentationml/2006/main">
+  <p:cSld name="Slide 26">
+    <p:bg>
+      <p:bgPr>
+        <a:solidFill>
+          <a:srgbClr val="0E1116"/>
+        </a:solidFill>
+      </p:bgPr>
+    </p:bg>
+    <p:spTree>
+      <p:nvGrpSpPr>
+        <p:cNvPr id="1" name=""/>
+        <p:cNvGrpSpPr/>
+        <p:nvPr/>
+      </p:nvGrpSpPr>
+      <p:grpSpPr>
+        <a:xfrm>
+          <a:off x="0" y="0"/>
+          <a:ext cx="0" cy="0"/>
+          <a:chOff x="0" y="0"/>
+          <a:chExt cx="0" cy="0"/>
+        </a:xfrm>
+      </p:grpSpPr>
+      <p:sp>
+        <p:nvSpPr>
+          <p:cNvPr id="2" name="Text 0"/>
+          <p:cNvSpPr txBox="1"/>
+          <p:nvPr/>
+        </p:nvSpPr>
+        <p:spPr>
+          <a:xfrm>
+            <a:off x="914400" y="1371600"/>
+            <a:ext cx="10362895" cy="731520"/>
+          </a:xfrm>
+          <a:prstGeom prst="rect">
+            <a:avLst/>
+          </a:prstGeom>
+          <a:noFill/>
+          <a:ln/>
+        </p:spPr>
+        <p:txBody>
+          <a:bodyPr wrap="square" lIns="0" tIns="0" rIns="0" bIns="0" rtlCol="0" anchor="t"/>
+          <a:lstStyle/>
+          <a:p>
+            <a:pPr rtl="1" algn="ctr" indent="0" marL="0">
+              <a:buNone/>
+            </a:pPr>
+            <a:r>
+              <a:rPr lang="he-IL" altLang="en-US" sz="2800" dirty="0">
+                <a:solidFill>
+                  <a:srgbClr val="A7ADB8"/>
+                </a:solidFill>
+                <a:latin typeface="Arial" pitchFamily="34" charset="0"/>
+                <a:ea typeface="Arial" pitchFamily="34" charset="-122"/>
+                <a:cs typeface="Arial" pitchFamily="34" charset="-120"/>
+              </a:rPr>
+              <a:t>אז חשבתי שההחלטה הכי חשובה שקיבלתי</a:t>
+            </a:r>
+            <a:endParaRPr lang="he-IL" sz="2800" dirty="0"/>
+          </a:p>
+        </p:txBody>
+      </p:sp>
+      <p:sp>
+        <p:nvSpPr>
+          <p:cNvPr id="3" name="Text 1"/>
+          <p:cNvSpPr txBox="1"/>
+          <p:nvPr/>
+        </p:nvSpPr>
+        <p:spPr>
+          <a:xfrm>
+            <a:off x="914400" y="2103120"/>
+            <a:ext cx="10362895" cy="822960"/>
+          </a:xfrm>
+          <a:prstGeom prst="rect">
+            <a:avLst/>
+          </a:prstGeom>
+          <a:noFill/>
+          <a:ln/>
+        </p:spPr>
+        <p:txBody>
+          <a:bodyPr wrap="square" lIns="0" tIns="0" rIns="0" bIns="0" rtlCol="0" anchor="t"/>
+          <a:lstStyle/>
+          <a:p>
+            <a:pPr rtl="1" algn="ctr" indent="0" marL="0">
+              <a:buNone/>
+            </a:pPr>
+            <a:r>
+              <a:rPr lang="he-IL" altLang="en-US" sz="3400" b="1" dirty="0">
+                <a:solidFill>
+                  <a:srgbClr val="A7ADB8"/>
+                </a:solidFill>
+                <a:latin typeface="Arial" pitchFamily="34" charset="0"/>
+                <a:ea typeface="Arial" pitchFamily="34" charset="-122"/>
+                <a:cs typeface="Arial" pitchFamily="34" charset="-120"/>
+              </a:rPr>
+              <a:t>הייתה להמשיך להילחם.</a:t>
+            </a:r>
+            <a:endParaRPr lang="he-IL" sz="3400" dirty="0"/>
+          </a:p>
+        </p:txBody>
+      </p:sp>
+      <p:sp>
+        <p:nvSpPr>
+          <p:cNvPr id="4" name="Text 2"/>
+          <p:cNvSpPr txBox="1"/>
+          <p:nvPr/>
+        </p:nvSpPr>
+        <p:spPr>
+          <a:xfrm>
+            <a:off x="914400" y="3383280"/>
+            <a:ext cx="10362895" cy="731520"/>
+          </a:xfrm>
+          <a:prstGeom prst="rect">
+            <a:avLst/>
+          </a:prstGeom>
+          <a:noFill/>
+          <a:ln/>
+        </p:spPr>
+        <p:txBody>
+          <a:bodyPr wrap="square" lIns="0" tIns="0" rIns="0" bIns="0" rtlCol="0" anchor="t"/>
+          <a:lstStyle/>
+          <a:p>
+            <a:pPr rtl="1" algn="ctr" indent="0" marL="0">
+              <a:buNone/>
+            </a:pPr>
+            <a:r>
+              <a:rPr lang="he-IL" altLang="en-US" sz="2800" dirty="0">
+                <a:solidFill>
+                  <a:srgbClr val="FFFFFF"/>
+                </a:solidFill>
+                <a:latin typeface="Arial" pitchFamily="34" charset="0"/>
+                <a:ea typeface="Arial" pitchFamily="34" charset="-122"/>
+                <a:cs typeface="Arial" pitchFamily="34" charset="-120"/>
+              </a:rPr>
+              <a:t>היום אני מבין שההחלטה החשובה באמת הייתה</a:t>
+            </a:r>
+            <a:endParaRPr lang="he-IL" sz="2800" dirty="0"/>
+          </a:p>
+        </p:txBody>
+      </p:sp>
+      <p:sp>
+        <p:nvSpPr>
+          <p:cNvPr id="5" name="Text 3"/>
+          <p:cNvSpPr txBox="1"/>
+          <p:nvPr/>
+        </p:nvSpPr>
+        <p:spPr>
+          <a:xfrm>
+            <a:off x="914400" y="4114800"/>
+            <a:ext cx="10362895" cy="1005840"/>
+          </a:xfrm>
+          <a:prstGeom prst="rect">
+            <a:avLst/>
+          </a:prstGeom>
+          <a:noFill/>
+          <a:ln/>
+        </p:spPr>
+        <p:txBody>
+          <a:bodyPr wrap="square" lIns="0" tIns="0" rIns="0" bIns="0" rtlCol="0" anchor="t"/>
+          <a:lstStyle/>
+          <a:p>
+            <a:pPr rtl="1" algn="ctr" indent="0" marL="0">
+              <a:buNone/>
+            </a:pPr>
+            <a:r>
+              <a:rPr lang="he-IL" altLang="en-US" sz="4200" b="1" dirty="0">
+                <a:solidFill>
+                  <a:srgbClr val="D9B78C"/>
+                </a:solidFill>
+                <a:latin typeface="Arial" pitchFamily="34" charset="0"/>
+                <a:ea typeface="Arial" pitchFamily="34" charset="-122"/>
+                <a:cs typeface="Arial" pitchFamily="34" charset="-120"/>
+              </a:rPr>
+              <a:t>מה אני עושה אחרי שהמלחמה נגמרה.</a:t>
+            </a:r>
+            <a:endParaRPr lang="he-IL" sz="4200" dirty="0"/>
+          </a:p>
+        </p:txBody>
+      </p:sp>
+      <p:sp>
+        <p:nvSpPr>
+          <p:cNvPr id="6" name="Text 4"/>
+          <p:cNvSpPr txBox="1"/>
+          <p:nvPr/>
+        </p:nvSpPr>
+        <p:spPr>
+          <a:xfrm>
+            <a:off x="457200" y="6309360"/>
+            <a:ext cx="548640" cy="274320"/>
+          </a:xfrm>
+          <a:prstGeom prst="rect">
+            <a:avLst/>
+          </a:prstGeom>
+          <a:noFill/>
+          <a:ln/>
+        </p:spPr>
+        <p:txBody>
+          <a:bodyPr wrap="square" lIns="0" tIns="0" rIns="0" bIns="0" rtlCol="0" anchor="t"/>
+          <a:lstStyle/>
+          <a:p>
+            <a:pPr rtl="1" algn="l" indent="0" marL="0">
+              <a:buNone/>
+            </a:pPr>
+            <a:r>
+              <a:rPr lang="he-IL" altLang="en-US" sz="1000" dirty="0">
+                <a:solidFill>
+                  <a:srgbClr val="A7ADB8"/>
+                </a:solidFill>
+                <a:latin typeface="Arial" pitchFamily="34" charset="0"/>
+                <a:ea typeface="Arial" pitchFamily="34" charset="-122"/>
+                <a:cs typeface="Arial" pitchFamily="34" charset="-120"/>
+              </a:rPr>
+              <a:t>26</a:t>
+            </a:r>
+            <a:endParaRPr lang="he-IL" sz="1000" dirty="0"/>
+          </a:p>
+        </p:txBody>
+      </p:sp>
+    </p:spTree>
+  </p:cSld>
+  <p:clrMapOvr>
+    <a:masterClrMapping/>
+  </p:clrMapOvr>
+</p:sld>
+</file>
+
+<file path=ppt/slides/slide27.xml><?xml version="1.0" encoding="utf-8"?>
+<p:sld xmlns:a="http://schemas.openxmlformats.org/drawingml/2006/main" xmlns:r="http://schemas.openxmlformats.org/officeDocument/2006/relationships" xmlns:p="http://schemas.openxmlformats.org/presentationml/2006/main">
+  <p:cSld name="Slide 27">
+    <p:bg>
+      <p:bgPr>
+        <a:solidFill>
+          <a:srgbClr val="0E1116"/>
+        </a:solidFill>
+      </p:bgPr>
+    </p:bg>
+    <p:spTree>
+      <p:nvGrpSpPr>
+        <p:cNvPr id="1" name=""/>
+        <p:cNvGrpSpPr/>
+        <p:nvPr/>
+      </p:nvGrpSpPr>
+      <p:grpSpPr>
+        <a:xfrm>
+          <a:off x="0" y="0"/>
+          <a:ext cx="0" cy="0"/>
+          <a:chOff x="0" y="0"/>
+          <a:chExt cx="0" cy="0"/>
+        </a:xfrm>
+      </p:grpSpPr>
+      <p:sp>
+        <p:nvSpPr>
+          <p:cNvPr id="2" name="Text 0"/>
+          <p:cNvSpPr txBox="1"/>
+          <p:nvPr/>
+        </p:nvSpPr>
+        <p:spPr>
+          <a:xfrm>
+            <a:off x="822960" y="640080"/>
+            <a:ext cx="10545775" cy="914400"/>
+          </a:xfrm>
+          <a:prstGeom prst="rect">
+            <a:avLst/>
+          </a:prstGeom>
+          <a:noFill/>
+          <a:ln/>
+        </p:spPr>
+        <p:txBody>
+          <a:bodyPr wrap="square" lIns="0" tIns="0" rIns="0" bIns="0" rtlCol="0" anchor="t"/>
+          <a:lstStyle/>
+          <a:p>
+            <a:pPr rtl="1" algn="ctr" indent="0" marL="0">
+              <a:buNone/>
+            </a:pPr>
+            <a:r>
+              <a:rPr lang="he-IL" altLang="en-US" sz="3000" b="1" dirty="0">
+                <a:solidFill>
+                  <a:srgbClr val="FFFFFF"/>
+                </a:solidFill>
+                <a:latin typeface="Arial" pitchFamily="34" charset="0"/>
+                <a:ea typeface="Arial" pitchFamily="34" charset="-122"/>
+                <a:cs typeface="Arial" pitchFamily="34" charset="-120"/>
+              </a:rPr>
+              <a:t>ההחלטה הייתה לקחת את ההחלטות בחיים שלי בעצמי.</a:t>
+            </a:r>
+            <a:endParaRPr lang="he-IL" sz="3000" dirty="0"/>
+          </a:p>
+        </p:txBody>
+      </p:sp>
+      <p:sp>
+        <p:nvSpPr>
+          <p:cNvPr id="3" name="Text 1"/>
+          <p:cNvSpPr txBox="1"/>
+          <p:nvPr/>
+        </p:nvSpPr>
+        <p:spPr>
+          <a:xfrm>
+            <a:off x="822960" y="1463040"/>
+            <a:ext cx="10545775" cy="548640"/>
+          </a:xfrm>
+          <a:prstGeom prst="rect">
+            <a:avLst/>
+          </a:prstGeom>
+          <a:noFill/>
+          <a:ln/>
+        </p:spPr>
+        <p:txBody>
+          <a:bodyPr wrap="square" lIns="0" tIns="0" rIns="0" bIns="0" rtlCol="0" anchor="t"/>
+          <a:lstStyle/>
+          <a:p>
+            <a:pPr rtl="1" algn="ctr" indent="0" marL="0">
+              <a:buNone/>
+            </a:pPr>
+            <a:r>
+              <a:rPr lang="he-IL" altLang="en-US" sz="1800" dirty="0">
+                <a:solidFill>
+                  <a:srgbClr val="A7ADB8"/>
+                </a:solidFill>
+                <a:latin typeface="Arial" pitchFamily="34" charset="0"/>
+                <a:ea typeface="Arial" pitchFamily="34" charset="-122"/>
+                <a:cs typeface="Arial" pitchFamily="34" charset="-120"/>
+              </a:rPr>
+              <a:t>אותה החלטה. שלוש פעמים.</a:t>
+            </a:r>
+            <a:endParaRPr lang="he-IL" sz="1800" dirty="0"/>
+          </a:p>
+        </p:txBody>
+      </p:sp>
+      <p:sp>
+        <p:nvSpPr>
+          <p:cNvPr id="4" name="Shape 2"/>
+          <p:cNvSpPr/>
+          <p:nvPr/>
+        </p:nvSpPr>
+        <p:spPr>
+          <a:xfrm>
+            <a:off x="8097317" y="2377440"/>
+            <a:ext cx="3271418" cy="3291840"/>
+          </a:xfrm>
+          <a:prstGeom prst="roundRect">
+            <a:avLst>
+              <a:gd name="adj" fmla="val 3913"/>
+            </a:avLst>
+          </a:prstGeom>
+          <a:solidFill>
+            <a:srgbClr val="171C24"/>
+          </a:solidFill>
+          <a:ln w="9525">
+            <a:solidFill>
+              <a:srgbClr val="2A313C"/>
+            </a:solidFill>
+            <a:prstDash val="solid"/>
+          </a:ln>
+        </p:spPr>
+      </p:sp>
+      <p:sp>
+        <p:nvSpPr>
+          <p:cNvPr id="5" name="Text 3"/>
+          <p:cNvSpPr txBox="1"/>
+          <p:nvPr/>
+        </p:nvSpPr>
+        <p:spPr>
+          <a:xfrm>
+            <a:off x="8463077" y="2743200"/>
+            <a:ext cx="2539898" cy="914400"/>
+          </a:xfrm>
+          <a:prstGeom prst="rect">
+            <a:avLst/>
+          </a:prstGeom>
+          <a:noFill/>
+          <a:ln/>
+        </p:spPr>
+        <p:txBody>
+          <a:bodyPr wrap="square" lIns="0" tIns="0" rIns="0" bIns="0" rtlCol="0" anchor="ctr"/>
+          <a:lstStyle/>
+          <a:p>
+            <a:pPr rtl="1" algn="ctr" indent="0" marL="0">
+              <a:buNone/>
+            </a:pPr>
+            <a:r>
+              <a:rPr lang="he-IL" altLang="en-US" sz="4000" b="1" dirty="0">
+                <a:solidFill>
+                  <a:srgbClr val="D9B78C"/>
+                </a:solidFill>
+                <a:latin typeface="Arial" pitchFamily="34" charset="0"/>
+                <a:ea typeface="Arial" pitchFamily="34" charset="-122"/>
+                <a:cs typeface="Arial" pitchFamily="34" charset="-120"/>
+              </a:rPr>
+              <a:t>כיתה י׳</a:t>
+            </a:r>
+            <a:endParaRPr lang="he-IL" sz="4000" dirty="0"/>
+          </a:p>
+        </p:txBody>
+      </p:sp>
+      <p:sp>
+        <p:nvSpPr>
+          <p:cNvPr id="6" name="Text 4"/>
+          <p:cNvSpPr txBox="1"/>
+          <p:nvPr/>
+        </p:nvSpPr>
+        <p:spPr>
+          <a:xfrm>
+            <a:off x="8463077" y="3840480"/>
+            <a:ext cx="2539898" cy="1554480"/>
+          </a:xfrm>
+          <a:prstGeom prst="rect">
+            <a:avLst/>
+          </a:prstGeom>
+          <a:noFill/>
+          <a:ln/>
+        </p:spPr>
+        <p:txBody>
+          <a:bodyPr wrap="square" lIns="0" tIns="0" rIns="0" bIns="0" rtlCol="0" anchor="t"/>
+          <a:lstStyle/>
+          <a:p>
+            <a:pPr rtl="1" algn="ctr" indent="0" marL="0">
+              <a:buNone/>
+            </a:pPr>
+            <a:r>
+              <a:rPr lang="he-IL" altLang="en-US" sz="1700" dirty="0">
+                <a:solidFill>
+                  <a:srgbClr val="FFFFFF"/>
+                </a:solidFill>
+                <a:latin typeface="Arial" pitchFamily="34" charset="0"/>
+                <a:ea typeface="Arial" pitchFamily="34" charset="-122"/>
+                <a:cs typeface="Arial" pitchFamily="34" charset="-120"/>
+              </a:rPr>
+              <a:t>כשהאשימו אותי – החלטתי לכתוב את הסיפור שלי בעצמי.</a:t>
+            </a:r>
+            <a:endParaRPr lang="he-IL" sz="1700" dirty="0"/>
+          </a:p>
+        </p:txBody>
+      </p:sp>
+      <p:sp>
+        <p:nvSpPr>
+          <p:cNvPr id="7" name="Shape 5"/>
+          <p:cNvSpPr/>
+          <p:nvPr/>
+        </p:nvSpPr>
+        <p:spPr>
+          <a:xfrm>
+            <a:off x="4460138" y="2377440"/>
+            <a:ext cx="3271418" cy="3291840"/>
+          </a:xfrm>
+          <a:prstGeom prst="roundRect">
+            <a:avLst>
+              <a:gd name="adj" fmla="val 3913"/>
+            </a:avLst>
+          </a:prstGeom>
+          <a:solidFill>
+            <a:srgbClr val="171C24"/>
+          </a:solidFill>
+          <a:ln w="9525">
+            <a:solidFill>
+              <a:srgbClr val="2A313C"/>
+            </a:solidFill>
+            <a:prstDash val="solid"/>
+          </a:ln>
+        </p:spPr>
+      </p:sp>
+      <p:sp>
+        <p:nvSpPr>
+          <p:cNvPr id="8" name="Text 6"/>
+          <p:cNvSpPr txBox="1"/>
+          <p:nvPr/>
+        </p:nvSpPr>
+        <p:spPr>
+          <a:xfrm>
+            <a:off x="4825898" y="2743200"/>
+            <a:ext cx="2539898" cy="914400"/>
+          </a:xfrm>
+          <a:prstGeom prst="rect">
+            <a:avLst/>
+          </a:prstGeom>
+          <a:noFill/>
+          <a:ln/>
+        </p:spPr>
+        <p:txBody>
+          <a:bodyPr wrap="square" lIns="0" tIns="0" rIns="0" bIns="0" rtlCol="0" anchor="ctr"/>
+          <a:lstStyle/>
+          <a:p>
+            <a:pPr rtl="1" algn="ctr" indent="0" marL="0">
+              <a:buNone/>
+            </a:pPr>
+            <a:r>
+              <a:rPr lang="he-IL" altLang="en-US" sz="4000" b="1" dirty="0">
+                <a:solidFill>
+                  <a:srgbClr val="D9B78C"/>
+                </a:solidFill>
+                <a:latin typeface="Arial" pitchFamily="34" charset="0"/>
+                <a:ea typeface="Arial" pitchFamily="34" charset="-122"/>
+                <a:cs typeface="Arial" pitchFamily="34" charset="-120"/>
+              </a:rPr>
+              <a:t>7.10</a:t>
+            </a:r>
+            <a:endParaRPr lang="he-IL" sz="4000" dirty="0"/>
+          </a:p>
+        </p:txBody>
+      </p:sp>
+      <p:sp>
+        <p:nvSpPr>
+          <p:cNvPr id="9" name="Text 7"/>
+          <p:cNvSpPr txBox="1"/>
+          <p:nvPr/>
+        </p:nvSpPr>
+        <p:spPr>
+          <a:xfrm>
+            <a:off x="4825898" y="3840480"/>
+            <a:ext cx="2539898" cy="1554480"/>
+          </a:xfrm>
+          <a:prstGeom prst="rect">
+            <a:avLst/>
+          </a:prstGeom>
+          <a:noFill/>
+          <a:ln/>
+        </p:spPr>
+        <p:txBody>
+          <a:bodyPr wrap="square" lIns="0" tIns="0" rIns="0" bIns="0" rtlCol="0" anchor="t"/>
+          <a:lstStyle/>
+          <a:p>
+            <a:pPr rtl="1" algn="ctr" indent="0" marL="0">
+              <a:buNone/>
+            </a:pPr>
+            <a:r>
+              <a:rPr lang="he-IL" altLang="en-US" sz="1700" dirty="0">
+                <a:solidFill>
+                  <a:srgbClr val="FFFFFF"/>
+                </a:solidFill>
+                <a:latin typeface="Arial" pitchFamily="34" charset="0"/>
+                <a:ea typeface="Arial" pitchFamily="34" charset="-122"/>
+                <a:cs typeface="Arial" pitchFamily="34" charset="-120"/>
+              </a:rPr>
+              <a:t>כשנפצעתי – החלטתי לתפקד ולהמשיך.</a:t>
+            </a:r>
+            <a:endParaRPr lang="he-IL" sz="1700" dirty="0"/>
+          </a:p>
+        </p:txBody>
+      </p:sp>
+      <p:sp>
+        <p:nvSpPr>
+          <p:cNvPr id="10" name="Shape 8"/>
+          <p:cNvSpPr/>
+          <p:nvPr/>
+        </p:nvSpPr>
+        <p:spPr>
+          <a:xfrm>
+            <a:off x="822960" y="2377440"/>
+            <a:ext cx="3271418" cy="3291840"/>
+          </a:xfrm>
+          <a:prstGeom prst="roundRect">
+            <a:avLst>
+              <a:gd name="adj" fmla="val 3913"/>
+            </a:avLst>
+          </a:prstGeom>
+          <a:solidFill>
+            <a:srgbClr val="171C24"/>
+          </a:solidFill>
+          <a:ln w="9525">
+            <a:solidFill>
+              <a:srgbClr val="2A313C"/>
+            </a:solidFill>
+            <a:prstDash val="solid"/>
+          </a:ln>
+        </p:spPr>
+      </p:sp>
+      <p:sp>
+        <p:nvSpPr>
+          <p:cNvPr id="11" name="Text 9"/>
+          <p:cNvSpPr txBox="1"/>
+          <p:nvPr/>
+        </p:nvSpPr>
+        <p:spPr>
+          <a:xfrm>
+            <a:off x="1188720" y="2743200"/>
+            <a:ext cx="2539898" cy="914400"/>
+          </a:xfrm>
+          <a:prstGeom prst="rect">
+            <a:avLst/>
+          </a:prstGeom>
+          <a:noFill/>
+          <a:ln/>
+        </p:spPr>
+        <p:txBody>
+          <a:bodyPr wrap="square" lIns="0" tIns="0" rIns="0" bIns="0" rtlCol="0" anchor="ctr"/>
+          <a:lstStyle/>
+          <a:p>
+            <a:pPr rtl="1" algn="ctr" indent="0" marL="0">
+              <a:buNone/>
+            </a:pPr>
+            <a:r>
+              <a:rPr lang="he-IL" altLang="en-US" sz="4000" b="1" dirty="0">
+                <a:solidFill>
+                  <a:srgbClr val="D9B78C"/>
+                </a:solidFill>
+                <a:latin typeface="Arial" pitchFamily="34" charset="0"/>
+                <a:ea typeface="Arial" pitchFamily="34" charset="-122"/>
+                <a:cs typeface="Arial" pitchFamily="34" charset="-120"/>
+              </a:rPr>
+              <a:t>היום</a:t>
+            </a:r>
+            <a:endParaRPr lang="he-IL" sz="4000" dirty="0"/>
+          </a:p>
+        </p:txBody>
+      </p:sp>
+      <p:sp>
+        <p:nvSpPr>
+          <p:cNvPr id="12" name="Text 10"/>
+          <p:cNvSpPr txBox="1"/>
+          <p:nvPr/>
+        </p:nvSpPr>
+        <p:spPr>
+          <a:xfrm>
+            <a:off x="1188720" y="3840480"/>
+            <a:ext cx="2539898" cy="1554480"/>
+          </a:xfrm>
+          <a:prstGeom prst="rect">
+            <a:avLst/>
+          </a:prstGeom>
+          <a:noFill/>
+          <a:ln/>
+        </p:spPr>
+        <p:txBody>
+          <a:bodyPr wrap="square" lIns="0" tIns="0" rIns="0" bIns="0" rtlCol="0" anchor="t"/>
+          <a:lstStyle/>
+          <a:p>
+            <a:pPr rtl="1" algn="ctr" indent="0" marL="0">
+              <a:buNone/>
+            </a:pPr>
+            <a:r>
+              <a:rPr lang="he-IL" altLang="en-US" sz="1700" dirty="0">
+                <a:solidFill>
+                  <a:srgbClr val="FFFFFF"/>
+                </a:solidFill>
+                <a:latin typeface="Arial" pitchFamily="34" charset="0"/>
+                <a:ea typeface="Arial" pitchFamily="34" charset="-122"/>
+                <a:cs typeface="Arial" pitchFamily="34" charset="-120"/>
+              </a:rPr>
+              <a:t>כשהחיים לא חזרו למה שהיו – החלטתי לבנות אותם מחדש.</a:t>
+            </a:r>
+            <a:endParaRPr lang="he-IL" sz="1700" dirty="0"/>
+          </a:p>
+        </p:txBody>
+      </p:sp>
+      <p:sp>
+        <p:nvSpPr>
+          <p:cNvPr id="13" name="Text 11"/>
+          <p:cNvSpPr txBox="1"/>
+          <p:nvPr/>
+        </p:nvSpPr>
+        <p:spPr>
+          <a:xfrm>
+            <a:off x="457200" y="6309360"/>
+            <a:ext cx="548640" cy="274320"/>
+          </a:xfrm>
+          <a:prstGeom prst="rect">
+            <a:avLst/>
+          </a:prstGeom>
+          <a:noFill/>
+          <a:ln/>
+        </p:spPr>
+        <p:txBody>
+          <a:bodyPr wrap="square" lIns="0" tIns="0" rIns="0" bIns="0" rtlCol="0" anchor="t"/>
+          <a:lstStyle/>
+          <a:p>
+            <a:pPr rtl="1" algn="l" indent="0" marL="0">
+              <a:buNone/>
+            </a:pPr>
+            <a:r>
+              <a:rPr lang="he-IL" altLang="en-US" sz="1000" dirty="0">
+                <a:solidFill>
+                  <a:srgbClr val="A7ADB8"/>
+                </a:solidFill>
+                <a:latin typeface="Arial" pitchFamily="34" charset="0"/>
+                <a:ea typeface="Arial" pitchFamily="34" charset="-122"/>
+                <a:cs typeface="Arial" pitchFamily="34" charset="-120"/>
+              </a:rPr>
+              <a:t>27</a:t>
+            </a:r>
+            <a:endParaRPr lang="he-IL" sz="1000" dirty="0"/>
+          </a:p>
+        </p:txBody>
+      </p:sp>
+    </p:spTree>
+  </p:cSld>
+  <p:clrMapOvr>
+    <a:masterClrMapping/>
+  </p:clrMapOvr>
+</p:sld>
+</file>
+
+<file path=ppt/slides/slide28.xml><?xml version="1.0" encoding="utf-8"?>
+<p:sld xmlns:a="http://schemas.openxmlformats.org/drawingml/2006/main" xmlns:r="http://schemas.openxmlformats.org/officeDocument/2006/relationships" xmlns:p="http://schemas.openxmlformats.org/presentationml/2006/main">
+  <p:cSld name="Slide 28">
     <p:bg>
       <p:bgPr>
         <a:solidFill>
@@ -9653,7 +11173,7 @@
                 <a:ea typeface="Arial" pitchFamily="34" charset="-122"/>
                 <a:cs typeface="Arial" pitchFamily="34" charset="-120"/>
               </a:rPr>
-              <a:t>חנוך  |  [טלפון / אינסטגרם / מייל להרצאות]</a:t>
+              <a:t>חנוך  |  054-5522053  |  Instagram: hanoch234</a:t>
             </a:r>
             <a:endParaRPr lang="he-IL" sz="1400" dirty="0"/>
           </a:p>
@@ -11207,7 +12727,7 @@
                 <a:ea typeface="Arial" pitchFamily="34" charset="-122"/>
                 <a:cs typeface="Arial" pitchFamily="34" charset="-120"/>
               </a:rPr>
-              <a:t>אני לא ״ילד רע״ כמו שכולם אומרים. זו תדמית, לא אני.</a:t>
+              <a:t>בסוף האמינו לי. אבל נשאר חותם: יכולים לחשוד בי בדבר כל כך חמור. אני לא ״ילד רע״ – זו תדמית, לא אני.</a:t>
             </a:r>
             <a:endParaRPr lang="he-IL" sz="1500" dirty="0"/>
           </a:p>
@@ -12396,7 +13916,7 @@
                 <a:ea typeface="Arial" pitchFamily="34" charset="-122"/>
                 <a:cs typeface="Arial" pitchFamily="34" charset="-120"/>
               </a:rPr>
-              <a:t>קליין וברנש, המפקצ׳ והמג״ד שלי. אנשים שראו בי משהו לפני שראיתי אותו בעצמי.</a:t>
+              <a:t>קליין וברנש, המפקצ׳ והמג״ד שלי. שני אנשים שונים לגמרי – ושני שיעורים שנשארו איתי (בשקף הבא).</a:t>
             </a:r>
             <a:endParaRPr lang="he-IL" sz="1300" dirty="0"/>
           </a:p>
